--- a/others/CSE499A_Final_Presentation.pptx
+++ b/others/CSE499A_Final_Presentation.pptx
@@ -1,9 +1,12 @@
 
 <file path=ppt/presentation.xml><?xml version="1.0" encoding="utf-8"?>
-<p:presentation xmlns:a="http://schemas.openxmlformats.org/drawingml/2006/main" xmlns:r="http://schemas.openxmlformats.org/officeDocument/2006/relationships" xmlns:p="http://schemas.openxmlformats.org/presentationml/2006/main" saveSubsetFonts="true" autoCompressPictures="0" embedTrueTypeFonts="true">
+<p:presentation xmlns:a="http://schemas.openxmlformats.org/drawingml/2006/main" xmlns:r="http://schemas.openxmlformats.org/officeDocument/2006/relationships" xmlns:p="http://schemas.openxmlformats.org/presentationml/2006/main" embedTrueTypeFonts="1" saveSubsetFonts="1" autoCompressPictures="0">
   <p:sldMasterIdLst>
     <p:sldMasterId id="2147483648" r:id="rId1"/>
   </p:sldMasterIdLst>
+  <p:notesMasterIdLst>
+    <p:notesMasterId r:id="rId19"/>
+  </p:notesMasterIdLst>
   <p:sldIdLst>
     <p:sldId id="256" r:id="rId2"/>
     <p:sldId id="257" r:id="rId3"/>
@@ -22,37 +25,28 @@
     <p:sldId id="270" r:id="rId16"/>
     <p:sldId id="271" r:id="rId17"/>
     <p:sldId id="272" r:id="rId18"/>
-    <p:sldId id="273" r:id="rId19"/>
   </p:sldIdLst>
-  <p:notesMasterIdLst>
-    <p:notesMasterId r:id="rId20"/>
-  </p:notesMasterIdLst>
-  <p:sldSz cx="12191695" cy="6858000"/>
-  <p:notesSz cx="6858000" cy="12191695"/>
+  <p:sldSz cx="12192000" cy="6858000"/>
+  <p:notesSz cx="6858000" cy="12192000"/>
   <p:embeddedFontLst>
     <p:embeddedFont>
-      <p:font typeface="Bitter"/>
-      <p:regular r:id="rId201314"/>
+      <p:font typeface="Bitter" panose="020B0604020202020204" charset="0"/>
+      <p:regular r:id="rId20"/>
     </p:embeddedFont>
     <p:embeddedFont>
-      <p:font typeface="Bitter Bold"/>
-      <p:regular r:id="rId201315"/>
+      <p:font typeface="Bitter Bold" panose="020B0604020202020204" charset="0"/>
+      <p:regular r:id="rId21"/>
     </p:embeddedFont>
     <p:embeddedFont>
-      <p:font typeface="Bitter Black"/>
-      <p:regular r:id="rId201316"/>
+      <p:font typeface="Consolas" panose="020B0609020204030204" pitchFamily="49" charset="0"/>
+      <p:regular r:id="rId22"/>
+      <p:bold r:id="rId23"/>
+      <p:italic r:id="rId24"/>
+      <p:boldItalic r:id="rId25"/>
     </p:embeddedFont>
     <p:embeddedFont>
-      <p:font typeface="Outfit"/>
-      <p:regular r:id="rId201317"/>
-    </p:embeddedFont>
-    <p:embeddedFont>
-      <p:font typeface="Outfit Bold"/>
-      <p:regular r:id="rId201318"/>
-    </p:embeddedFont>
-    <p:embeddedFont>
-      <p:font typeface="Outfit Black"/>
-      <p:regular r:id="rId201319"/>
+      <p:font typeface="Outfit Bold" panose="020B0604020202020204" charset="0"/>
+      <p:regular r:id="rId26"/>
     </p:embeddedFont>
   </p:embeddedFontLst>
   <p:defaultTextStyle>
@@ -147,6 +141,11 @@
       </a:defRPr>
     </a:lvl9pPr>
   </p:defaultTextStyle>
+  <p:extLst>
+    <p:ext uri="{EFAFB233-063F-42B5-8137-9DF3F51BA10A}">
+      <p15:sldGuideLst xmlns:p15="http://schemas.microsoft.com/office/powerpoint/2012/main"/>
+    </p:ext>
+  </p:extLst>
 </p:presentation>
 </file>
 
@@ -172,234 +171,10 @@
           <a:chExt cx="0" cy="0"/>
         </a:xfrm>
       </p:grpSpPr>
-      <p:sp>
-        <p:nvSpPr>
-          <p:cNvPr id="2" name="Header Placeholder 1"/>
-          <p:cNvSpPr>
-            <a:spLocks noGrp="1"/>
-          </p:cNvSpPr>
-          <p:nvPr>
-            <p:ph type="hdr" sz="quarter"/>
-          </p:nvPr>
-        </p:nvSpPr>
-        <p:spPr>
-          <a:xfrm>
-            <a:off x="0" y="0"/>
-            <a:ext cx="2971800" cy="458788"/>
-          </a:xfrm>
-          <a:prstGeom prst="rect">
-            <a:avLst/>
-          </a:prstGeom>
-        </p:spPr>
-        <p:txBody>
-          <a:bodyPr vert="horz" lIns="91440" tIns="45720" rIns="91440" bIns="45720" rtlCol="0"/>
-          <a:lstStyle>
-            <a:lvl1pPr algn="l">
-              <a:defRPr sz="1200"/>
-            </a:lvl1pPr>
-          </a:lstStyle>
-          <a:p>
-            <a:endParaRPr lang="en-US"/>
-          </a:p>
-        </p:txBody>
-      </p:sp>
-      <p:sp>
-        <p:nvSpPr>
-          <p:cNvPr id="3" name="Date Placeholder 2"/>
-          <p:cNvSpPr>
-            <a:spLocks noGrp="1"/>
-          </p:cNvSpPr>
-          <p:nvPr>
-            <p:ph type="dt" idx="1"/>
-          </p:nvPr>
-        </p:nvSpPr>
-        <p:spPr>
-          <a:xfrm>
-            <a:off x="3884613" y="0"/>
-            <a:ext cx="2971800" cy="458788"/>
-          </a:xfrm>
-          <a:prstGeom prst="rect">
-            <a:avLst/>
-          </a:prstGeom>
-        </p:spPr>
-        <p:txBody>
-          <a:bodyPr vert="horz" lIns="91440" tIns="45720" rIns="91440" bIns="45720" rtlCol="0"/>
-          <a:lstStyle>
-            <a:lvl1pPr algn="r">
-              <a:defRPr sz="1200"/>
-            </a:lvl1pPr>
-          </a:lstStyle>
-          <a:p>
-            <a:fld id="{5282F153-3F37-0F45-9E97-73ACFA13230C}" type="datetimeFigureOut">
-              <a:rPr lang="en-US"/>
-              <a:t>7/23/19</a:t>
-            </a:fld>
-            <a:endParaRPr lang="en-US"/>
-          </a:p>
-        </p:txBody>
-      </p:sp>
-      <p:sp>
-        <p:nvSpPr>
-          <p:cNvPr id="4" name="Slide Image Placeholder 3"/>
-          <p:cNvSpPr>
-            <a:spLocks noGrp="1" noRot="1" noChangeAspect="1"/>
-          </p:cNvSpPr>
-          <p:nvPr>
-            <p:ph type="sldImg" idx="2"/>
-          </p:nvPr>
-        </p:nvSpPr>
-        <p:spPr>
-          <a:xfrm>
-            <a:off x="685800" y="1143000"/>
-            <a:ext cx="5486400" cy="3086100"/>
-          </a:xfrm>
-          <a:prstGeom prst="rect">
-            <a:avLst/>
-          </a:prstGeom>
-          <a:noFill/>
-          <a:ln w="12700">
-            <a:solidFill>
-              <a:prstClr val="black"/>
-            </a:solidFill>
-          </a:ln>
-        </p:spPr>
-        <p:txBody>
-          <a:bodyPr vert="horz" lIns="91440" tIns="45720" rIns="91440" bIns="45720" rtlCol="0" anchor="ctr"/>
-          <a:lstStyle/>
-          <a:p>
-            <a:endParaRPr lang="en-US"/>
-          </a:p>
-        </p:txBody>
-      </p:sp>
-      <p:sp>
-        <p:nvSpPr>
-          <p:cNvPr id="5" name="Notes Placeholder 4"/>
-          <p:cNvSpPr>
-            <a:spLocks noGrp="1"/>
-          </p:cNvSpPr>
-          <p:nvPr>
-            <p:ph type="body" sz="quarter" idx="3"/>
-          </p:nvPr>
-        </p:nvSpPr>
-        <p:spPr>
-          <a:xfrm>
-            <a:off x="685800" y="4400550"/>
-            <a:ext cx="5486400" cy="3600450"/>
-          </a:xfrm>
-          <a:prstGeom prst="rect">
-            <a:avLst/>
-          </a:prstGeom>
-        </p:spPr>
-        <p:txBody>
-          <a:bodyPr vert="horz" lIns="91440" tIns="45720" rIns="91440" bIns="45720" rtlCol="0"/>
-          <a:lstStyle/>
-          <a:p>
-            <a:pPr lvl="0"/>
-            <a:r>
-              <a:rPr lang="en-US"/>
-              <a:t>Click to edit Master text styles</a:t>
-            </a:r>
-          </a:p>
-          <a:p>
-            <a:pPr lvl="1"/>
-            <a:r>
-              <a:rPr lang="en-US"/>
-              <a:t>Second level</a:t>
-            </a:r>
-          </a:p>
-          <a:p>
-            <a:pPr lvl="2"/>
-            <a:r>
-              <a:rPr lang="en-US"/>
-              <a:t>Third level</a:t>
-            </a:r>
-          </a:p>
-          <a:p>
-            <a:pPr lvl="3"/>
-            <a:r>
-              <a:rPr lang="en-US"/>
-              <a:t>Fourth level</a:t>
-            </a:r>
-          </a:p>
-          <a:p>
-            <a:pPr lvl="4"/>
-            <a:r>
-              <a:rPr lang="en-US"/>
-              <a:t>Fifth level</a:t>
-            </a:r>
-          </a:p>
-        </p:txBody>
-      </p:sp>
-      <p:sp>
-        <p:nvSpPr>
-          <p:cNvPr id="6" name="Footer Placeholder 5"/>
-          <p:cNvSpPr>
-            <a:spLocks noGrp="1"/>
-          </p:cNvSpPr>
-          <p:nvPr>
-            <p:ph type="ftr" sz="quarter" idx="4"/>
-          </p:nvPr>
-        </p:nvSpPr>
-        <p:spPr>
-          <a:xfrm>
-            <a:off x="0" y="8685213"/>
-            <a:ext cx="2971800" cy="458787"/>
-          </a:xfrm>
-          <a:prstGeom prst="rect">
-            <a:avLst/>
-          </a:prstGeom>
-        </p:spPr>
-        <p:txBody>
-          <a:bodyPr vert="horz" lIns="91440" tIns="45720" rIns="91440" bIns="45720" rtlCol="0" anchor="b"/>
-          <a:lstStyle>
-            <a:lvl1pPr algn="l">
-              <a:defRPr sz="1200"/>
-            </a:lvl1pPr>
-          </a:lstStyle>
-          <a:p>
-            <a:endParaRPr lang="en-US"/>
-          </a:p>
-        </p:txBody>
-      </p:sp>
-      <p:sp>
-        <p:nvSpPr>
-          <p:cNvPr id="7" name="Slide Number Placeholder 6"/>
-          <p:cNvSpPr>
-            <a:spLocks noGrp="1"/>
-          </p:cNvSpPr>
-          <p:nvPr>
-            <p:ph type="sldNum" sz="quarter" idx="5"/>
-          </p:nvPr>
-        </p:nvSpPr>
-        <p:spPr>
-          <a:xfrm>
-            <a:off x="3884613" y="8685213"/>
-            <a:ext cx="2971800" cy="458787"/>
-          </a:xfrm>
-          <a:prstGeom prst="rect">
-            <a:avLst/>
-          </a:prstGeom>
-        </p:spPr>
-        <p:txBody>
-          <a:bodyPr vert="horz" lIns="91440" tIns="45720" rIns="91440" bIns="45720" rtlCol="0" anchor="b"/>
-          <a:lstStyle>
-            <a:lvl1pPr algn="r">
-              <a:defRPr sz="1200"/>
-            </a:lvl1pPr>
-          </a:lstStyle>
-          <a:p>
-            <a:fld id="{CE5E9CC1-C706-0F49-92D6-E571CC5EEA8F}" type="slidenum">
-              <a:rPr lang="en-US"/>
-              <a:t>‹#›</a:t>
-            </a:fld>
-            <a:endParaRPr lang="en-US"/>
-          </a:p>
-        </p:txBody>
-      </p:sp>
     </p:spTree>
     <p:extLst>
       <p:ext uri="{BB962C8B-B14F-4D97-AF65-F5344CB8AC3E}">
-        <p14:creationId xmlns:p14="http://schemas.microsoft.com/office/powerpoint/2010/main" val="1024086991"/>
+        <p14:creationId xmlns:p14="http://schemas.microsoft.com/office/powerpoint/2010/main" val="1984853259"/>
       </p:ext>
     </p:extLst>
   </p:cSld>
@@ -543,10 +318,6 @@
           <a:bodyPr/>
           <a:lstStyle/>
           <a:p>
-            <a:r>
-              <a:rPr lang="en-US" dirty="0"/>
-              <a:t/>
-            </a:r>
             <a:endParaRPr lang="en-US" dirty="0"/>
           </a:p>
         </p:txBody>
@@ -631,10 +402,6 @@
           <a:bodyPr/>
           <a:lstStyle/>
           <a:p>
-            <a:r>
-              <a:rPr lang="en-US" dirty="0"/>
-              <a:t/>
-            </a:r>
             <a:endParaRPr lang="en-US" dirty="0"/>
           </a:p>
         </p:txBody>
@@ -719,10 +486,6 @@
           <a:bodyPr/>
           <a:lstStyle/>
           <a:p>
-            <a:r>
-              <a:rPr lang="en-US" dirty="0"/>
-              <a:t/>
-            </a:r>
             <a:endParaRPr lang="en-US" dirty="0"/>
           </a:p>
         </p:txBody>
@@ -807,10 +570,6 @@
           <a:bodyPr/>
           <a:lstStyle/>
           <a:p>
-            <a:r>
-              <a:rPr lang="en-US" dirty="0"/>
-              <a:t/>
-            </a:r>
             <a:endParaRPr lang="en-US" dirty="0"/>
           </a:p>
         </p:txBody>
@@ -895,10 +654,6 @@
           <a:bodyPr/>
           <a:lstStyle/>
           <a:p>
-            <a:r>
-              <a:rPr lang="en-US" dirty="0"/>
-              <a:t/>
-            </a:r>
             <a:endParaRPr lang="en-US" dirty="0"/>
           </a:p>
         </p:txBody>
@@ -983,10 +738,6 @@
           <a:bodyPr/>
           <a:lstStyle/>
           <a:p>
-            <a:r>
-              <a:rPr lang="en-US" dirty="0"/>
-              <a:t/>
-            </a:r>
             <a:endParaRPr lang="en-US" dirty="0"/>
           </a:p>
         </p:txBody>
@@ -1071,10 +822,6 @@
           <a:bodyPr/>
           <a:lstStyle/>
           <a:p>
-            <a:r>
-              <a:rPr lang="en-US" dirty="0"/>
-              <a:t/>
-            </a:r>
             <a:endParaRPr lang="en-US" dirty="0"/>
           </a:p>
         </p:txBody>
@@ -1159,10 +906,6 @@
           <a:bodyPr/>
           <a:lstStyle/>
           <a:p>
-            <a:r>
-              <a:rPr lang="en-US" dirty="0"/>
-              <a:t/>
-            </a:r>
             <a:endParaRPr lang="en-US" dirty="0"/>
           </a:p>
         </p:txBody>
@@ -1247,10 +990,6 @@
           <a:bodyPr/>
           <a:lstStyle/>
           <a:p>
-            <a:r>
-              <a:rPr lang="en-US" dirty="0"/>
-              <a:t/>
-            </a:r>
             <a:endParaRPr lang="en-US" dirty="0"/>
           </a:p>
         </p:txBody>
@@ -1273,94 +1012,6 @@
             <a:fld id="{F7021451-1387-4CA6-816F-3879F97B5CBC}" type="slidenum">
               <a:rPr lang="en-US"/>
               <a:t>17</a:t>
-            </a:fld>
-            <a:endParaRPr lang="en-US"/>
-          </a:p>
-        </p:txBody>
-      </p:sp>
-    </p:spTree>
-    <p:extLst>
-      <p:ext uri="{BB962C8B-B14F-4D97-AF65-F5344CB8AC3E}">
-        <p14:creationId xmlns:p14="http://schemas.microsoft.com/office/powerpoint/2010/main" val="1024086991"/>
-      </p:ext>
-    </p:extLst>
-  </p:cSld>
-  <p:clrMapOvr>
-    <a:masterClrMapping/>
-  </p:clrMapOvr>
-</p:notes>
-</file>
-
-<file path=ppt/notesSlides/notesSlide18.xml><?xml version="1.0" encoding="utf-8"?>
-<p:notes xmlns:a="http://schemas.openxmlformats.org/drawingml/2006/main" xmlns:r="http://schemas.openxmlformats.org/officeDocument/2006/relationships" xmlns:p="http://schemas.openxmlformats.org/presentationml/2006/main">
-  <p:cSld>
-    <p:spTree>
-      <p:nvGrpSpPr>
-        <p:cNvPr id="1" name=""/>
-        <p:cNvGrpSpPr/>
-        <p:nvPr/>
-      </p:nvGrpSpPr>
-      <p:grpSpPr>
-        <a:xfrm>
-          <a:off x="0" y="0"/>
-          <a:ext cx="0" cy="0"/>
-          <a:chOff x="0" y="0"/>
-          <a:chExt cx="0" cy="0"/>
-        </a:xfrm>
-      </p:grpSpPr>
-      <p:sp>
-        <p:nvSpPr>
-          <p:cNvPr id="2" name="Slide Image Placeholder 1"/>
-          <p:cNvSpPr>
-            <a:spLocks noGrp="1" noRot="1" noChangeAspect="1"/>
-          </p:cNvSpPr>
-          <p:nvPr>
-            <p:ph type="sldImg"/>
-          </p:nvPr>
-        </p:nvSpPr>
-        <p:spPr/>
-      </p:sp>
-      <p:sp>
-        <p:nvSpPr>
-          <p:cNvPr id="3" name="Notes Placeholder 2"/>
-          <p:cNvSpPr>
-            <a:spLocks noGrp="1"/>
-          </p:cNvSpPr>
-          <p:nvPr>
-            <p:ph type="body" idx="1"/>
-          </p:nvPr>
-        </p:nvSpPr>
-        <p:spPr/>
-        <p:txBody>
-          <a:bodyPr/>
-          <a:lstStyle/>
-          <a:p>
-            <a:r>
-              <a:rPr lang="en-US" dirty="0"/>
-              <a:t/>
-            </a:r>
-            <a:endParaRPr lang="en-US" dirty="0"/>
-          </a:p>
-        </p:txBody>
-      </p:sp>
-      <p:sp>
-        <p:nvSpPr>
-          <p:cNvPr id="4" name="Slide Number Placeholder 3"/>
-          <p:cNvSpPr>
-            <a:spLocks noGrp="1"/>
-          </p:cNvSpPr>
-          <p:nvPr>
-            <p:ph type="sldNum" sz="quarter" idx="10"/>
-          </p:nvPr>
-        </p:nvSpPr>
-        <p:spPr/>
-        <p:txBody>
-          <a:bodyPr/>
-          <a:lstStyle/>
-          <a:p>
-            <a:fld id="{F7021451-1387-4CA6-816F-3879F97B5CBC}" type="slidenum">
-              <a:rPr lang="en-US"/>
-              <a:t>18</a:t>
             </a:fld>
             <a:endParaRPr lang="en-US"/>
           </a:p>
@@ -1423,10 +1074,6 @@
           <a:bodyPr/>
           <a:lstStyle/>
           <a:p>
-            <a:r>
-              <a:rPr lang="en-US" dirty="0"/>
-              <a:t/>
-            </a:r>
             <a:endParaRPr lang="en-US" dirty="0"/>
           </a:p>
         </p:txBody>
@@ -1511,10 +1158,6 @@
           <a:bodyPr/>
           <a:lstStyle/>
           <a:p>
-            <a:r>
-              <a:rPr lang="en-US" dirty="0"/>
-              <a:t/>
-            </a:r>
             <a:endParaRPr lang="en-US" dirty="0"/>
           </a:p>
         </p:txBody>
@@ -1599,10 +1242,6 @@
           <a:bodyPr/>
           <a:lstStyle/>
           <a:p>
-            <a:r>
-              <a:rPr lang="en-US" dirty="0"/>
-              <a:t/>
-            </a:r>
             <a:endParaRPr lang="en-US" dirty="0"/>
           </a:p>
         </p:txBody>
@@ -1687,10 +1326,6 @@
           <a:bodyPr/>
           <a:lstStyle/>
           <a:p>
-            <a:r>
-              <a:rPr lang="en-US" dirty="0"/>
-              <a:t/>
-            </a:r>
             <a:endParaRPr lang="en-US" dirty="0"/>
           </a:p>
         </p:txBody>
@@ -1775,10 +1410,6 @@
           <a:bodyPr/>
           <a:lstStyle/>
           <a:p>
-            <a:r>
-              <a:rPr lang="en-US" dirty="0"/>
-              <a:t/>
-            </a:r>
             <a:endParaRPr lang="en-US" dirty="0"/>
           </a:p>
         </p:txBody>
@@ -1863,10 +1494,6 @@
           <a:bodyPr/>
           <a:lstStyle/>
           <a:p>
-            <a:r>
-              <a:rPr lang="en-US" dirty="0"/>
-              <a:t/>
-            </a:r>
             <a:endParaRPr lang="en-US" dirty="0"/>
           </a:p>
         </p:txBody>
@@ -1951,10 +1578,6 @@
           <a:bodyPr/>
           <a:lstStyle/>
           <a:p>
-            <a:r>
-              <a:rPr lang="en-US" dirty="0"/>
-              <a:t/>
-            </a:r>
             <a:endParaRPr lang="en-US" dirty="0"/>
           </a:p>
         </p:txBody>
@@ -2039,10 +1662,6 @@
           <a:bodyPr/>
           <a:lstStyle/>
           <a:p>
-            <a:r>
-              <a:rPr lang="en-US" dirty="0"/>
-              <a:t/>
-            </a:r>
             <a:endParaRPr lang="en-US" dirty="0"/>
           </a:p>
         </p:txBody>
@@ -2121,6 +1740,7 @@
         <a:solidFill>
           <a:srgbClr val="000000"/>
         </a:solidFill>
+        <a:effectLst/>
       </p:bgPr>
     </p:bg>
     <p:spTree>
@@ -2156,6 +1776,13 @@
           </a:solidFill>
           <a:ln/>
         </p:spPr>
+        <p:txBody>
+          <a:bodyPr/>
+          <a:lstStyle/>
+          <a:p>
+            <a:endParaRPr lang="en-US"/>
+          </a:p>
+        </p:txBody>
       </p:sp>
       <p:sp>
         <p:nvSpPr>
@@ -2176,17 +1803,24 @@
           </a:solidFill>
           <a:ln/>
         </p:spPr>
+        <p:txBody>
+          <a:bodyPr/>
+          <a:lstStyle/>
+          <a:p>
+            <a:endParaRPr lang="en-US"/>
+          </a:p>
+        </p:txBody>
       </p:sp>
       <p:pic>
         <p:nvPicPr>
-          <p:cNvPr id="4" name="Image 0" descr="preencoded.png">    </p:cNvPr>
+          <p:cNvPr id="4" name="Image 0" descr="preencoded.png"/>
           <p:cNvPicPr>
             <a:picLocks noChangeAspect="1"/>
           </p:cNvPicPr>
           <p:nvPr/>
         </p:nvPicPr>
         <p:blipFill>
-          <a:blip r:embed="rId1"/>
+          <a:blip r:embed="rId2"/>
           <a:stretch>
             <a:fillRect/>
           </a:stretch>
@@ -2222,11 +1856,18 @@
           </a:solidFill>
           <a:ln/>
         </p:spPr>
+        <p:txBody>
+          <a:bodyPr/>
+          <a:lstStyle/>
+          <a:p>
+            <a:endParaRPr lang="en-US"/>
+          </a:p>
+        </p:txBody>
       </p:sp>
       <p:pic>
         <p:nvPicPr>
           <p:cNvPr id="6" name="Image 1" descr="preencoded.png">
-            <a:hlinkClick r:id="rId3" tooltip=""/>
+            <a:hlinkClick r:id="rId3"/>
           </p:cNvPr>
           <p:cNvPicPr>
             <a:picLocks noChangeAspect="1"/>
@@ -2234,7 +1875,7 @@
           <p:nvPr/>
         </p:nvPicPr>
         <p:blipFill>
-          <a:blip r:embed="rId2"/>
+          <a:blip r:embed="rId4"/>
           <a:stretch>
             <a:fillRect/>
           </a:stretch>
@@ -2265,6 +1906,7 @@
         <a:solidFill>
           <a:srgbClr val="000000"/>
         </a:solidFill>
+        <a:effectLst/>
       </p:bgPr>
     </p:bg>
     <p:spTree>
@@ -2324,7 +1966,7 @@
       <p:pic>
         <p:nvPicPr>
           <p:cNvPr id="4" name="Image 0" descr="preencoded.png">
-            <a:hlinkClick r:id="rId2" tooltip=""/>
+            <a:hlinkClick r:id="rId2"/>
           </p:cNvPr>
           <p:cNvPicPr>
             <a:picLocks noChangeAspect="1"/>
@@ -2332,7 +1974,7 @@
           <p:nvPr/>
         </p:nvPicPr>
         <p:blipFill>
-          <a:blip r:embed="rId1"/>
+          <a:blip r:embed="rId3"/>
           <a:stretch>
             <a:fillRect/>
           </a:stretch>
@@ -2363,6 +2005,7 @@
         <a:solidFill>
           <a:srgbClr val="000000"/>
         </a:solidFill>
+        <a:effectLst/>
       </p:bgPr>
     </p:bg>
     <p:spTree>
@@ -2422,7 +2065,7 @@
       <p:pic>
         <p:nvPicPr>
           <p:cNvPr id="4" name="Image 0" descr="preencoded.png">
-            <a:hlinkClick r:id="rId2" tooltip=""/>
+            <a:hlinkClick r:id="rId2"/>
           </p:cNvPr>
           <p:cNvPicPr>
             <a:picLocks noChangeAspect="1"/>
@@ -2430,7 +2073,7 @@
           <p:nvPr/>
         </p:nvPicPr>
         <p:blipFill>
-          <a:blip r:embed="rId1"/>
+          <a:blip r:embed="rId3"/>
           <a:stretch>
             <a:fillRect/>
           </a:stretch>
@@ -2456,6 +2099,11 @@
 <file path=ppt/slideMasters/slideMaster1.xml><?xml version="1.0" encoding="utf-8"?>
 <p:sldMaster xmlns:a="http://schemas.openxmlformats.org/drawingml/2006/main" xmlns:r="http://schemas.openxmlformats.org/officeDocument/2006/relationships" xmlns:p="http://schemas.openxmlformats.org/presentationml/2006/main">
   <p:cSld>
+    <p:bg>
+      <p:bgRef idx="1001">
+        <a:schemeClr val="bg1"/>
+      </p:bgRef>
+    </p:bg>
     <p:spTree>
       <p:nvGrpSpPr>
         <p:cNvPr id="1" name=""/>
@@ -2773,7 +2421,7 @@
           </a:bodyPr>
           <a:lstStyle/>
           <a:p>
-            <a:pPr algn="l" indent="0" marL="0">
+            <a:pPr marL="0" indent="0" algn="l">
               <a:lnSpc>
                 <a:spcPct val="104000"/>
               </a:lnSpc>
@@ -2815,7 +2463,7 @@
           <a:bodyPr wrap="square" lIns="0" tIns="0" rIns="0" bIns="0" rtlCol="0" anchor="t"/>
           <a:lstStyle/>
           <a:p>
-            <a:pPr algn="l" indent="0" marL="0">
+            <a:pPr marL="0" indent="0" algn="l">
               <a:lnSpc>
                 <a:spcPct val="133000"/>
               </a:lnSpc>
@@ -2827,7 +2475,7 @@
             <a:endParaRPr lang="en-US" sz="1450" dirty="0"/>
           </a:p>
           <a:p>
-            <a:pPr algn="l" indent="0" marL="0">
+            <a:pPr marL="0" indent="0" algn="l">
               <a:lnSpc>
                 <a:spcPct val="133000"/>
               </a:lnSpc>
@@ -2869,7 +2517,7 @@
           <a:bodyPr wrap="none" lIns="0" tIns="0" rIns="0" bIns="0" rtlCol="0" anchor="t"/>
           <a:lstStyle/>
           <a:p>
-            <a:pPr algn="l" indent="0" marL="0">
+            <a:pPr marL="0" indent="0" algn="l">
               <a:lnSpc>
                 <a:spcPct val="104000"/>
               </a:lnSpc>
@@ -2913,7 +2561,7 @@
           </a:bodyPr>
           <a:lstStyle/>
           <a:p>
-            <a:pPr algn="l" marL="294640" indent="-294640">
+            <a:pPr marL="294640" indent="-294640" algn="l">
               <a:lnSpc>
                 <a:spcPct val="133000"/>
               </a:lnSpc>
@@ -2934,7 +2582,7 @@
             <a:endParaRPr lang="en-US" sz="1450" dirty="0"/>
           </a:p>
           <a:p>
-            <a:pPr algn="l" marL="294640" indent="-294640">
+            <a:pPr marL="294640" indent="-294640" algn="l">
               <a:lnSpc>
                 <a:spcPct val="133000"/>
               </a:lnSpc>
@@ -2955,7 +2603,7 @@
             <a:endParaRPr lang="en-US" sz="1450" dirty="0"/>
           </a:p>
           <a:p>
-            <a:pPr algn="l" marL="294640" indent="-294640">
+            <a:pPr marL="294640" indent="-294640" algn="l">
               <a:lnSpc>
                 <a:spcPct val="133000"/>
               </a:lnSpc>
@@ -2976,7 +2624,7 @@
             <a:endParaRPr lang="en-US" sz="1450" dirty="0"/>
           </a:p>
           <a:p>
-            <a:pPr algn="l" marL="294640" indent="-294640">
+            <a:pPr marL="294640" indent="-294640" algn="l">
               <a:lnSpc>
                 <a:spcPct val="133000"/>
               </a:lnSpc>
@@ -2997,7 +2645,7 @@
             <a:endParaRPr lang="en-US" sz="1450" dirty="0"/>
           </a:p>
           <a:p>
-            <a:pPr algn="l" marL="294640" indent="-294640">
+            <a:pPr marL="294640" indent="-294640" algn="l">
               <a:lnSpc>
                 <a:spcPct val="133000"/>
               </a:lnSpc>
@@ -3065,7 +2713,7 @@
           <a:bodyPr wrap="none" lIns="0" tIns="0" rIns="0" bIns="0" rtlCol="0" anchor="t"/>
           <a:lstStyle/>
           <a:p>
-            <a:pPr algn="l" indent="0" marL="0">
+            <a:pPr marL="0" indent="0" algn="l">
               <a:lnSpc>
                 <a:spcPct val="104000"/>
               </a:lnSpc>
@@ -3088,17 +2736,17 @@
       </p:sp>
       <p:pic>
         <p:nvPicPr>
-          <p:cNvPr id="3" name="Image 0" descr="preencoded.png">    </p:cNvPr>
+          <p:cNvPr id="3" name="Image 0" descr="preencoded.png"/>
           <p:cNvPicPr>
             <a:picLocks noChangeAspect="1"/>
           </p:cNvPicPr>
           <p:nvPr/>
         </p:nvPicPr>
         <p:blipFill>
-          <a:blip r:embed="rId1">
+          <a:blip>
             <a:extLst>
               <a:ext uri="{96DAC541-7B7A-43D3-8B79-37D633B846F1}">
-                <asvg:svgBlip xmlns:asvg="http://schemas.microsoft.com/office/drawing/2016/SVG/main" r:embed="rId2"/>
+                <asvg:svgBlip xmlns:asvg="http://schemas.microsoft.com/office/drawing/2016/SVG/main" r:embed="rId3"/>
               </a:ext>
             </a:extLst>
           </a:blip>
@@ -3137,7 +2785,7 @@
           <a:bodyPr wrap="none" lIns="0" tIns="0" rIns="0" bIns="0" rtlCol="0" anchor="ctr"/>
           <a:lstStyle/>
           <a:p>
-            <a:pPr algn="ctr" indent="0" marL="0">
+            <a:pPr marL="0" indent="0" algn="ctr">
               <a:lnSpc>
                 <a:spcPct val="100000"/>
               </a:lnSpc>
@@ -3179,7 +2827,7 @@
           <a:bodyPr wrap="none" lIns="0" tIns="0" rIns="0" bIns="0" rtlCol="0" anchor="t"/>
           <a:lstStyle/>
           <a:p>
-            <a:pPr algn="l" indent="0" marL="0">
+            <a:pPr marL="0" indent="0" algn="l">
               <a:lnSpc>
                 <a:spcPct val="104000"/>
               </a:lnSpc>
@@ -3223,7 +2871,7 @@
           </a:bodyPr>
           <a:lstStyle/>
           <a:p>
-            <a:pPr algn="l" indent="0" marL="0">
+            <a:pPr marL="0" indent="0" algn="l">
               <a:lnSpc>
                 <a:spcPct val="133000"/>
               </a:lnSpc>
@@ -3243,15 +2891,6 @@
               </a:rPr>
               <a:t>Challenge:</a:t>
             </a:r>
-            <a:pPr algn="l" indent="0" marL="0">
-              <a:lnSpc>
-                <a:spcPct val="133000"/>
-              </a:lnSpc>
-              <a:spcAft>
-                <a:spcPts val="850"/>
-              </a:spcAft>
-              <a:buNone/>
-            </a:pPr>
             <a:r>
               <a:rPr lang="en-US" sz="1450" dirty="0">
                 <a:solidFill>
@@ -3266,7 +2905,7 @@
             <a:endParaRPr lang="en-US" sz="1450" dirty="0"/>
           </a:p>
           <a:p>
-            <a:pPr algn="l" indent="0" marL="0">
+            <a:pPr marL="0" indent="0" algn="l">
               <a:lnSpc>
                 <a:spcPct val="133000"/>
               </a:lnSpc>
@@ -3283,12 +2922,6 @@
               </a:rPr>
               <a:t>Solution:</a:t>
             </a:r>
-            <a:pPr algn="l" indent="0" marL="0">
-              <a:lnSpc>
-                <a:spcPct val="133000"/>
-              </a:lnSpc>
-              <a:buNone/>
-            </a:pPr>
             <a:r>
               <a:rPr lang="en-US" sz="1450" dirty="0">
                 <a:solidFill>
@@ -3306,17 +2939,17 @@
       </p:sp>
       <p:pic>
         <p:nvPicPr>
-          <p:cNvPr id="7" name="Image 1" descr="preencoded.png">    </p:cNvPr>
+          <p:cNvPr id="7" name="Image 1" descr="preencoded.png"/>
           <p:cNvPicPr>
             <a:picLocks noChangeAspect="1"/>
           </p:cNvPicPr>
           <p:nvPr/>
         </p:nvPicPr>
         <p:blipFill>
-          <a:blip r:embed="rId3">
+          <a:blip>
             <a:extLst>
               <a:ext uri="{96DAC541-7B7A-43D3-8B79-37D633B846F1}">
-                <asvg:svgBlip xmlns:asvg="http://schemas.microsoft.com/office/drawing/2016/SVG/main" r:embed="rId4"/>
+                <asvg:svgBlip xmlns:asvg="http://schemas.microsoft.com/office/drawing/2016/SVG/main" r:embed="rId3"/>
               </a:ext>
             </a:extLst>
           </a:blip>
@@ -3355,7 +2988,7 @@
           <a:bodyPr wrap="none" lIns="0" tIns="0" rIns="0" bIns="0" rtlCol="0" anchor="ctr"/>
           <a:lstStyle/>
           <a:p>
-            <a:pPr algn="ctr" indent="0" marL="0">
+            <a:pPr marL="0" indent="0" algn="ctr">
               <a:lnSpc>
                 <a:spcPct val="100000"/>
               </a:lnSpc>
@@ -3397,7 +3030,7 @@
           <a:bodyPr wrap="none" lIns="0" tIns="0" rIns="0" bIns="0" rtlCol="0" anchor="t"/>
           <a:lstStyle/>
           <a:p>
-            <a:pPr algn="l" indent="0" marL="0">
+            <a:pPr marL="0" indent="0" algn="l">
               <a:lnSpc>
                 <a:spcPct val="104000"/>
               </a:lnSpc>
@@ -3441,7 +3074,7 @@
           </a:bodyPr>
           <a:lstStyle/>
           <a:p>
-            <a:pPr algn="l" indent="0" marL="0">
+            <a:pPr marL="0" indent="0" algn="l">
               <a:lnSpc>
                 <a:spcPct val="133000"/>
               </a:lnSpc>
@@ -3461,15 +3094,6 @@
               </a:rPr>
               <a:t>Challenge:</a:t>
             </a:r>
-            <a:pPr algn="l" indent="0" marL="0">
-              <a:lnSpc>
-                <a:spcPct val="133000"/>
-              </a:lnSpc>
-              <a:spcAft>
-                <a:spcPts val="850"/>
-              </a:spcAft>
-              <a:buNone/>
-            </a:pPr>
             <a:r>
               <a:rPr lang="en-US" sz="1450" dirty="0">
                 <a:solidFill>
@@ -3484,7 +3108,7 @@
             <a:endParaRPr lang="en-US" sz="1450" dirty="0"/>
           </a:p>
           <a:p>
-            <a:pPr algn="l" indent="0" marL="0">
+            <a:pPr marL="0" indent="0" algn="l">
               <a:lnSpc>
                 <a:spcPct val="133000"/>
               </a:lnSpc>
@@ -3501,12 +3125,6 @@
               </a:rPr>
               <a:t>Solution:</a:t>
             </a:r>
-            <a:pPr algn="l" indent="0" marL="0">
-              <a:lnSpc>
-                <a:spcPct val="133000"/>
-              </a:lnSpc>
-              <a:buNone/>
-            </a:pPr>
             <a:r>
               <a:rPr lang="en-US" sz="1450" dirty="0">
                 <a:solidFill>
@@ -3524,17 +3142,17 @@
       </p:sp>
       <p:pic>
         <p:nvPicPr>
-          <p:cNvPr id="11" name="Image 2" descr="preencoded.png">    </p:cNvPr>
+          <p:cNvPr id="11" name="Image 2" descr="preencoded.png"/>
           <p:cNvPicPr>
             <a:picLocks noChangeAspect="1"/>
           </p:cNvPicPr>
           <p:nvPr/>
         </p:nvPicPr>
         <p:blipFill>
-          <a:blip r:embed="rId5">
+          <a:blip>
             <a:extLst>
               <a:ext uri="{96DAC541-7B7A-43D3-8B79-37D633B846F1}">
-                <asvg:svgBlip xmlns:asvg="http://schemas.microsoft.com/office/drawing/2016/SVG/main" r:embed="rId6"/>
+                <asvg:svgBlip xmlns:asvg="http://schemas.microsoft.com/office/drawing/2016/SVG/main" r:embed="rId3"/>
               </a:ext>
             </a:extLst>
           </a:blip>
@@ -3573,7 +3191,7 @@
           <a:bodyPr wrap="none" lIns="0" tIns="0" rIns="0" bIns="0" rtlCol="0" anchor="ctr"/>
           <a:lstStyle/>
           <a:p>
-            <a:pPr algn="ctr" indent="0" marL="0">
+            <a:pPr marL="0" indent="0" algn="ctr">
               <a:lnSpc>
                 <a:spcPct val="100000"/>
               </a:lnSpc>
@@ -3615,7 +3233,7 @@
           <a:bodyPr wrap="none" lIns="0" tIns="0" rIns="0" bIns="0" rtlCol="0" anchor="t"/>
           <a:lstStyle/>
           <a:p>
-            <a:pPr algn="l" indent="0" marL="0">
+            <a:pPr marL="0" indent="0" algn="l">
               <a:lnSpc>
                 <a:spcPct val="104000"/>
               </a:lnSpc>
@@ -3659,7 +3277,7 @@
           </a:bodyPr>
           <a:lstStyle/>
           <a:p>
-            <a:pPr algn="l" marL="294640" indent="-294640">
+            <a:pPr marL="294640" indent="-294640" algn="l">
               <a:lnSpc>
                 <a:spcPct val="133000"/>
               </a:lnSpc>
@@ -3680,7 +3298,7 @@
             <a:endParaRPr lang="en-US" sz="1450" dirty="0"/>
           </a:p>
           <a:p>
-            <a:pPr algn="l" marL="294640" indent="-294640">
+            <a:pPr marL="294640" indent="-294640" algn="l">
               <a:lnSpc>
                 <a:spcPct val="133000"/>
               </a:lnSpc>
@@ -3701,7 +3319,7 @@
             <a:endParaRPr lang="en-US" sz="1450" dirty="0"/>
           </a:p>
           <a:p>
-            <a:pPr algn="l" marL="294640" indent="-294640">
+            <a:pPr marL="294640" indent="-294640" algn="l">
               <a:lnSpc>
                 <a:spcPct val="133000"/>
               </a:lnSpc>
@@ -3769,7 +3387,7 @@
           <a:bodyPr wrap="none" lIns="0" tIns="0" rIns="0" bIns="0" rtlCol="0" anchor="t"/>
           <a:lstStyle/>
           <a:p>
-            <a:pPr algn="l" indent="0" marL="0">
+            <a:pPr marL="0" indent="0" algn="l">
               <a:lnSpc>
                 <a:spcPct val="104000"/>
               </a:lnSpc>
@@ -3811,7 +3429,7 @@
           <a:bodyPr wrap="none" lIns="0" tIns="0" rIns="0" bIns="0" rtlCol="0" anchor="t"/>
           <a:lstStyle/>
           <a:p>
-            <a:pPr algn="l" indent="0" marL="0">
+            <a:pPr marL="0" indent="0" algn="l">
               <a:lnSpc>
                 <a:spcPct val="104000"/>
               </a:lnSpc>
@@ -3853,6 +3471,13 @@
           </a:solidFill>
           <a:ln/>
         </p:spPr>
+        <p:txBody>
+          <a:bodyPr/>
+          <a:lstStyle/>
+          <a:p>
+            <a:endParaRPr lang="en-US"/>
+          </a:p>
+        </p:txBody>
       </p:sp>
       <p:sp>
         <p:nvSpPr>
@@ -3875,7 +3500,7 @@
           <a:bodyPr wrap="none" lIns="0" tIns="0" rIns="0" bIns="0" rtlCol="0" anchor="t"/>
           <a:lstStyle/>
           <a:p>
-            <a:pPr algn="l" indent="0" marL="0">
+            <a:pPr marL="0" indent="0" algn="l">
               <a:lnSpc>
                 <a:spcPct val="104000"/>
               </a:lnSpc>
@@ -3919,7 +3544,7 @@
           </a:bodyPr>
           <a:lstStyle/>
           <a:p>
-            <a:pPr algn="l" indent="0" marL="0">
+            <a:pPr marL="0" indent="0" algn="l">
               <a:lnSpc>
                 <a:spcPct val="117000"/>
               </a:lnSpc>
@@ -3939,15 +3564,6 @@
               </a:rPr>
               <a:t>Solution 1:</a:t>
             </a:r>
-            <a:pPr algn="l" indent="0" marL="0">
-              <a:lnSpc>
-                <a:spcPct val="117000"/>
-              </a:lnSpc>
-              <a:spcAft>
-                <a:spcPts val="750"/>
-              </a:spcAft>
-              <a:buNone/>
-            </a:pPr>
             <a:r>
               <a:rPr lang="en-US" sz="1100" dirty="0">
                 <a:solidFill>
@@ -3962,7 +3578,7 @@
             <a:endParaRPr lang="en-US" sz="1100" dirty="0"/>
           </a:p>
           <a:p>
-            <a:pPr algn="l" indent="0" marL="0">
+            <a:pPr marL="0" indent="0" algn="l">
               <a:lnSpc>
                 <a:spcPct val="117000"/>
               </a:lnSpc>
@@ -3979,12 +3595,6 @@
               </a:rPr>
               <a:t>Solution 2:</a:t>
             </a:r>
-            <a:pPr algn="l" indent="0" marL="0">
-              <a:lnSpc>
-                <a:spcPct val="117000"/>
-              </a:lnSpc>
-              <a:buNone/>
-            </a:pPr>
             <a:r>
               <a:rPr lang="en-US" sz="1100" dirty="0">
                 <a:solidFill>
@@ -4021,7 +3631,7 @@
           <a:bodyPr wrap="none" lIns="0" tIns="0" rIns="0" bIns="0" rtlCol="0" anchor="t"/>
           <a:lstStyle/>
           <a:p>
-            <a:pPr algn="l" indent="0" marL="0">
+            <a:pPr marL="0" indent="0" algn="l">
               <a:lnSpc>
                 <a:spcPct val="104000"/>
               </a:lnSpc>
@@ -4065,7 +3675,7 @@
           </a:bodyPr>
           <a:lstStyle/>
           <a:p>
-            <a:pPr algn="l" indent="0" marL="0">
+            <a:pPr marL="0" indent="0" algn="l">
               <a:lnSpc>
                 <a:spcPct val="117000"/>
               </a:lnSpc>
@@ -4082,12 +3692,6 @@
               </a:rPr>
               <a:t>Solution:</a:t>
             </a:r>
-            <a:pPr algn="l" indent="0" marL="0">
-              <a:lnSpc>
-                <a:spcPct val="117000"/>
-              </a:lnSpc>
-              <a:buNone/>
-            </a:pPr>
             <a:r>
               <a:rPr lang="en-US" sz="1100" dirty="0">
                 <a:solidFill>
@@ -4099,12 +3703,6 @@
               </a:rPr>
               <a:t> Overcame Google API Rate limits (429 errors) via custom retry logic and lightweight </a:t>
             </a:r>
-            <a:pPr algn="l" indent="0" marL="0">
-              <a:lnSpc>
-                <a:spcPct val="117000"/>
-              </a:lnSpc>
-              <a:buNone/>
-            </a:pPr>
             <a:r>
               <a:rPr lang="en-US" sz="1100" dirty="0">
                 <a:solidFill>
@@ -4119,12 +3717,6 @@
               </a:rPr>
               <a:t>flash-lite</a:t>
             </a:r>
-            <a:pPr algn="l" indent="0" marL="0">
-              <a:lnSpc>
-                <a:spcPct val="117000"/>
-              </a:lnSpc>
-              <a:buNone/>
-            </a:pPr>
             <a:r>
               <a:rPr lang="en-US" sz="1100" dirty="0">
                 <a:solidFill>
@@ -4161,7 +3753,7 @@
           <a:bodyPr wrap="none" lIns="0" tIns="0" rIns="0" bIns="0" rtlCol="0" anchor="t"/>
           <a:lstStyle/>
           <a:p>
-            <a:pPr algn="ctr" indent="0" marL="0">
+            <a:pPr marL="0" indent="0" algn="ctr">
               <a:lnSpc>
                 <a:spcPct val="83000"/>
               </a:lnSpc>
@@ -4203,7 +3795,7 @@
           <a:bodyPr wrap="none" lIns="0" tIns="0" rIns="0" bIns="0" rtlCol="0" anchor="t"/>
           <a:lstStyle/>
           <a:p>
-            <a:pPr algn="ctr" indent="0" marL="0">
+            <a:pPr marL="0" indent="0" algn="ctr">
               <a:lnSpc>
                 <a:spcPct val="104000"/>
               </a:lnSpc>
@@ -4247,7 +3839,7 @@
           </a:bodyPr>
           <a:lstStyle/>
           <a:p>
-            <a:pPr algn="ctr" indent="0" marL="0">
+            <a:pPr marL="0" indent="0" algn="ctr">
               <a:lnSpc>
                 <a:spcPct val="117000"/>
               </a:lnSpc>
@@ -4289,7 +3881,7 @@
           <a:bodyPr wrap="none" lIns="0" tIns="0" rIns="0" bIns="0" rtlCol="0" anchor="t"/>
           <a:lstStyle/>
           <a:p>
-            <a:pPr algn="ctr" indent="0" marL="0">
+            <a:pPr marL="0" indent="0" algn="ctr">
               <a:lnSpc>
                 <a:spcPct val="83000"/>
               </a:lnSpc>
@@ -4331,7 +3923,7 @@
           <a:bodyPr wrap="none" lIns="0" tIns="0" rIns="0" bIns="0" rtlCol="0" anchor="t"/>
           <a:lstStyle/>
           <a:p>
-            <a:pPr algn="ctr" indent="0" marL="0">
+            <a:pPr marL="0" indent="0" algn="ctr">
               <a:lnSpc>
                 <a:spcPct val="104000"/>
               </a:lnSpc>
@@ -4375,7 +3967,7 @@
           </a:bodyPr>
           <a:lstStyle/>
           <a:p>
-            <a:pPr algn="ctr" indent="0" marL="0">
+            <a:pPr marL="0" indent="0" algn="ctr">
               <a:lnSpc>
                 <a:spcPct val="117000"/>
               </a:lnSpc>
@@ -4417,7 +4009,7 @@
           <a:bodyPr wrap="none" lIns="0" tIns="0" rIns="0" bIns="0" rtlCol="0" anchor="t"/>
           <a:lstStyle/>
           <a:p>
-            <a:pPr algn="ctr" indent="0" marL="0">
+            <a:pPr marL="0" indent="0" algn="ctr">
               <a:lnSpc>
                 <a:spcPct val="83000"/>
               </a:lnSpc>
@@ -4459,7 +4051,7 @@
           <a:bodyPr wrap="none" lIns="0" tIns="0" rIns="0" bIns="0" rtlCol="0" anchor="t"/>
           <a:lstStyle/>
           <a:p>
-            <a:pPr algn="ctr" indent="0" marL="0">
+            <a:pPr marL="0" indent="0" algn="ctr">
               <a:lnSpc>
                 <a:spcPct val="104000"/>
               </a:lnSpc>
@@ -4503,7 +4095,7 @@
           </a:bodyPr>
           <a:lstStyle/>
           <a:p>
-            <a:pPr algn="ctr" indent="0" marL="0">
+            <a:pPr marL="0" indent="0" algn="ctr">
               <a:lnSpc>
                 <a:spcPct val="117000"/>
               </a:lnSpc>
@@ -4545,7 +4137,7 @@
           <a:bodyPr wrap="none" lIns="0" tIns="0" rIns="0" bIns="0" rtlCol="0" anchor="t"/>
           <a:lstStyle/>
           <a:p>
-            <a:pPr algn="ctr" indent="0" marL="0">
+            <a:pPr marL="0" indent="0" algn="ctr">
               <a:lnSpc>
                 <a:spcPct val="83000"/>
               </a:lnSpc>
@@ -4587,7 +4179,7 @@
           <a:bodyPr wrap="none" lIns="0" tIns="0" rIns="0" bIns="0" rtlCol="0" anchor="t"/>
           <a:lstStyle/>
           <a:p>
-            <a:pPr algn="ctr" indent="0" marL="0">
+            <a:pPr marL="0" indent="0" algn="ctr">
               <a:lnSpc>
                 <a:spcPct val="104000"/>
               </a:lnSpc>
@@ -4629,7 +4221,7 @@
           <a:bodyPr wrap="none" lIns="0" tIns="0" rIns="0" bIns="0" rtlCol="0" anchor="t"/>
           <a:lstStyle/>
           <a:p>
-            <a:pPr algn="ctr" indent="0" marL="0">
+            <a:pPr marL="0" indent="0" algn="ctr">
               <a:lnSpc>
                 <a:spcPct val="117000"/>
               </a:lnSpc>
@@ -4696,7 +4288,7 @@
           <a:bodyPr wrap="none" lIns="0" tIns="0" rIns="0" bIns="0" rtlCol="0" anchor="t"/>
           <a:lstStyle/>
           <a:p>
-            <a:pPr algn="l" indent="0" marL="0">
+            <a:pPr marL="0" indent="0" algn="l">
               <a:lnSpc>
                 <a:spcPct val="104000"/>
               </a:lnSpc>
@@ -4740,10 +4332,34 @@
             <a:tbl>
               <a:tblPr/>
               <a:tblGrid>
-                <a:gridCol w="2391124"/>
-                <a:gridCol w="3043249"/>
-                <a:gridCol w="2608499"/>
-                <a:gridCol w="2825874"/>
+                <a:gridCol w="2391124">
+                  <a:extLst>
+                    <a:ext uri="{9D8B030D-6E8A-4147-A177-3AD203B41FA5}">
+                      <a16:colId xmlns:a16="http://schemas.microsoft.com/office/drawing/2014/main" val="20000"/>
+                    </a:ext>
+                  </a:extLst>
+                </a:gridCol>
+                <a:gridCol w="3043249">
+                  <a:extLst>
+                    <a:ext uri="{9D8B030D-6E8A-4147-A177-3AD203B41FA5}">
+                      <a16:colId xmlns:a16="http://schemas.microsoft.com/office/drawing/2014/main" val="20001"/>
+                    </a:ext>
+                  </a:extLst>
+                </a:gridCol>
+                <a:gridCol w="2608499">
+                  <a:extLst>
+                    <a:ext uri="{9D8B030D-6E8A-4147-A177-3AD203B41FA5}">
+                      <a16:colId xmlns:a16="http://schemas.microsoft.com/office/drawing/2014/main" val="20002"/>
+                    </a:ext>
+                  </a:extLst>
+                </a:gridCol>
+                <a:gridCol w="2825874">
+                  <a:extLst>
+                    <a:ext uri="{9D8B030D-6E8A-4147-A177-3AD203B41FA5}">
+                      <a16:colId xmlns:a16="http://schemas.microsoft.com/office/drawing/2014/main" val="20003"/>
+                    </a:ext>
+                  </a:extLst>
+                </a:gridCol>
               </a:tblGrid>
               <a:tr h="545094">
                 <a:tc>
@@ -4751,7 +4367,7 @@
                     <a:bodyPr/>
                     <a:lstStyle/>
                     <a:p>
-                      <a:pPr indent="0" marL="0">
+                      <a:pPr marL="0" indent="0">
                         <a:buNone/>
                       </a:pPr>
                       <a:r>
@@ -4819,7 +4435,7 @@
                     <a:bodyPr/>
                     <a:lstStyle/>
                     <a:p>
-                      <a:pPr indent="0" marL="0">
+                      <a:pPr marL="0" indent="0">
                         <a:buNone/>
                       </a:pPr>
                       <a:r>
@@ -4887,7 +4503,7 @@
                     <a:bodyPr/>
                     <a:lstStyle/>
                     <a:p>
-                      <a:pPr indent="0" marL="0">
+                      <a:pPr marL="0" indent="0">
                         <a:buNone/>
                       </a:pPr>
                       <a:r>
@@ -4955,7 +4571,7 @@
                     <a:bodyPr/>
                     <a:lstStyle/>
                     <a:p>
-                      <a:pPr indent="0" marL="0">
+                      <a:pPr marL="0" indent="0">
                         <a:buNone/>
                       </a:pPr>
                       <a:r>
@@ -5018,6 +4634,11 @@
                     </a:solidFill>
                   </a:tcPr>
                 </a:tc>
+                <a:extLst>
+                  <a:ext uri="{0D108BD9-81ED-4DB2-BD59-A6C34878D82A}">
+                    <a16:rowId xmlns:a16="http://schemas.microsoft.com/office/drawing/2014/main" val="10000"/>
+                  </a:ext>
+                </a:extLst>
               </a:tr>
               <a:tr h="850680">
                 <a:tc>
@@ -5025,7 +4646,7 @@
                     <a:bodyPr/>
                     <a:lstStyle/>
                     <a:p>
-                      <a:pPr indent="0" marL="0">
+                      <a:pPr marL="0" indent="0">
                         <a:buNone/>
                       </a:pPr>
                       <a:r>
@@ -5093,7 +4714,7 @@
                     <a:bodyPr/>
                     <a:lstStyle/>
                     <a:p>
-                      <a:pPr indent="0" marL="0">
+                      <a:pPr marL="0" indent="0">
                         <a:buNone/>
                       </a:pPr>
                       <a:r>
@@ -5161,7 +4782,7 @@
                     <a:bodyPr/>
                     <a:lstStyle/>
                     <a:p>
-                      <a:pPr indent="0" marL="0">
+                      <a:pPr marL="0" indent="0">
                         <a:buNone/>
                       </a:pPr>
                       <a:r>
@@ -5229,7 +4850,7 @@
                     <a:bodyPr/>
                     <a:lstStyle/>
                     <a:p>
-                      <a:pPr indent="0" marL="0">
+                      <a:pPr marL="0" indent="0">
                         <a:buNone/>
                       </a:pPr>
                       <a:r>
@@ -5292,6 +4913,11 @@
                     </a:solidFill>
                   </a:tcPr>
                 </a:tc>
+                <a:extLst>
+                  <a:ext uri="{0D108BD9-81ED-4DB2-BD59-A6C34878D82A}">
+                    <a16:rowId xmlns:a16="http://schemas.microsoft.com/office/drawing/2014/main" val="10001"/>
+                  </a:ext>
+                </a:extLst>
               </a:tr>
               <a:tr h="850680">
                 <a:tc>
@@ -5299,7 +4925,7 @@
                     <a:bodyPr/>
                     <a:lstStyle/>
                     <a:p>
-                      <a:pPr indent="0" marL="0">
+                      <a:pPr marL="0" indent="0">
                         <a:buNone/>
                       </a:pPr>
                       <a:r>
@@ -5367,7 +4993,7 @@
                     <a:bodyPr/>
                     <a:lstStyle/>
                     <a:p>
-                      <a:pPr indent="0" marL="0">
+                      <a:pPr marL="0" indent="0">
                         <a:buNone/>
                       </a:pPr>
                       <a:r>
@@ -5435,7 +5061,7 @@
                     <a:bodyPr/>
                     <a:lstStyle/>
                     <a:p>
-                      <a:pPr indent="0" marL="0">
+                      <a:pPr marL="0" indent="0">
                         <a:buNone/>
                       </a:pPr>
                       <a:r>
@@ -5503,7 +5129,7 @@
                     <a:bodyPr/>
                     <a:lstStyle/>
                     <a:p>
-                      <a:pPr indent="0" marL="0">
+                      <a:pPr marL="0" indent="0">
                         <a:buNone/>
                       </a:pPr>
                       <a:r>
@@ -5566,6 +5192,11 @@
                     </a:solidFill>
                   </a:tcPr>
                 </a:tc>
+                <a:extLst>
+                  <a:ext uri="{0D108BD9-81ED-4DB2-BD59-A6C34878D82A}">
+                    <a16:rowId xmlns:a16="http://schemas.microsoft.com/office/drawing/2014/main" val="10002"/>
+                  </a:ext>
+                </a:extLst>
               </a:tr>
               <a:tr h="850680">
                 <a:tc>
@@ -5573,7 +5204,7 @@
                     <a:bodyPr/>
                     <a:lstStyle/>
                     <a:p>
-                      <a:pPr indent="0" marL="0">
+                      <a:pPr marL="0" indent="0">
                         <a:buNone/>
                       </a:pPr>
                       <a:r>
@@ -5641,7 +5272,7 @@
                     <a:bodyPr/>
                     <a:lstStyle/>
                     <a:p>
-                      <a:pPr indent="0" marL="0">
+                      <a:pPr marL="0" indent="0">
                         <a:buNone/>
                       </a:pPr>
                       <a:r>
@@ -5709,7 +5340,7 @@
                     <a:bodyPr/>
                     <a:lstStyle/>
                     <a:p>
-                      <a:pPr indent="0" marL="0">
+                      <a:pPr marL="0" indent="0">
                         <a:buNone/>
                       </a:pPr>
                       <a:r>
@@ -5777,7 +5408,7 @@
                     <a:bodyPr/>
                     <a:lstStyle/>
                     <a:p>
-                      <a:pPr indent="0" marL="0">
+                      <a:pPr marL="0" indent="0">
                         <a:buNone/>
                       </a:pPr>
                       <a:r>
@@ -5840,6 +5471,11 @@
                     </a:solidFill>
                   </a:tcPr>
                 </a:tc>
+                <a:extLst>
+                  <a:ext uri="{0D108BD9-81ED-4DB2-BD59-A6C34878D82A}">
+                    <a16:rowId xmlns:a16="http://schemas.microsoft.com/office/drawing/2014/main" val="10003"/>
+                  </a:ext>
+                </a:extLst>
               </a:tr>
               <a:tr h="847505">
                 <a:tc>
@@ -5847,7 +5483,7 @@
                     <a:bodyPr/>
                     <a:lstStyle/>
                     <a:p>
-                      <a:pPr indent="0" marL="0">
+                      <a:pPr marL="0" indent="0">
                         <a:buNone/>
                       </a:pPr>
                       <a:r>
@@ -5915,7 +5551,7 @@
                     <a:bodyPr/>
                     <a:lstStyle/>
                     <a:p>
-                      <a:pPr indent="0" marL="0">
+                      <a:pPr marL="0" indent="0">
                         <a:buNone/>
                       </a:pPr>
                       <a:r>
@@ -5983,7 +5619,7 @@
                     <a:bodyPr/>
                     <a:lstStyle/>
                     <a:p>
-                      <a:pPr indent="0" marL="0">
+                      <a:pPr marL="0" indent="0">
                         <a:buNone/>
                       </a:pPr>
                       <a:r>
@@ -6051,7 +5687,7 @@
                     <a:bodyPr/>
                     <a:lstStyle/>
                     <a:p>
-                      <a:pPr indent="0" marL="0">
+                      <a:pPr marL="0" indent="0">
                         <a:buNone/>
                       </a:pPr>
                       <a:r>
@@ -6114,6 +5750,11 @@
                     </a:solidFill>
                   </a:tcPr>
                 </a:tc>
+                <a:extLst>
+                  <a:ext uri="{0D108BD9-81ED-4DB2-BD59-A6C34878D82A}">
+                    <a16:rowId xmlns:a16="http://schemas.microsoft.com/office/drawing/2014/main" val="10004"/>
+                  </a:ext>
+                </a:extLst>
               </a:tr>
             </a:tbl>
           </a:graphicData>
@@ -6146,14 +5787,14 @@
       </p:grpSpPr>
       <p:pic>
         <p:nvPicPr>
-          <p:cNvPr id="2" name="Image 0" descr="preencoded.png">    </p:cNvPr>
+          <p:cNvPr id="2" name="Image 0" descr="preencoded.png"/>
           <p:cNvPicPr>
             <a:picLocks noChangeAspect="1"/>
           </p:cNvPicPr>
           <p:nvPr/>
         </p:nvPicPr>
         <p:blipFill>
-          <a:blip r:embed="rId1"/>
+          <a:blip r:embed="rId3"/>
           <a:stretch>
             <a:fillRect/>
           </a:stretch>
@@ -6214,7 +5855,7 @@
           <a:bodyPr wrap="none" lIns="0" tIns="0" rIns="0" bIns="0" rtlCol="0" anchor="t"/>
           <a:lstStyle/>
           <a:p>
-            <a:pPr algn="l" indent="0" marL="0">
+            <a:pPr marL="0" indent="0" algn="l">
               <a:lnSpc>
                 <a:spcPct val="104000"/>
               </a:lnSpc>
@@ -6256,6 +5897,13 @@
           </a:solidFill>
           <a:ln/>
         </p:spPr>
+        <p:txBody>
+          <a:bodyPr/>
+          <a:lstStyle/>
+          <a:p>
+            <a:endParaRPr lang="en-US"/>
+          </a:p>
+        </p:txBody>
       </p:sp>
       <p:sp>
         <p:nvSpPr>
@@ -6278,6 +5926,13 @@
           </a:solidFill>
           <a:ln/>
         </p:spPr>
+        <p:txBody>
+          <a:bodyPr/>
+          <a:lstStyle/>
+          <a:p>
+            <a:endParaRPr lang="en-US"/>
+          </a:p>
+        </p:txBody>
       </p:sp>
       <p:sp>
         <p:nvSpPr>
@@ -6300,6 +5955,13 @@
           </a:solidFill>
           <a:ln/>
         </p:spPr>
+        <p:txBody>
+          <a:bodyPr/>
+          <a:lstStyle/>
+          <a:p>
+            <a:endParaRPr lang="en-US"/>
+          </a:p>
+        </p:txBody>
       </p:sp>
       <p:sp>
         <p:nvSpPr>
@@ -6322,7 +5984,7 @@
           <a:bodyPr wrap="none" lIns="0" tIns="0" rIns="0" bIns="0" rtlCol="0" anchor="ctr"/>
           <a:lstStyle/>
           <a:p>
-            <a:pPr algn="ctr" indent="0" marL="0">
+            <a:pPr marL="0" indent="0" algn="ctr">
               <a:lnSpc>
                 <a:spcPct val="100000"/>
               </a:lnSpc>
@@ -6364,7 +6026,7 @@
           <a:bodyPr wrap="none" lIns="0" tIns="0" rIns="0" bIns="0" rtlCol="0" anchor="t"/>
           <a:lstStyle/>
           <a:p>
-            <a:pPr algn="ctr" indent="0" marL="0">
+            <a:pPr marL="0" indent="0" algn="ctr">
               <a:lnSpc>
                 <a:spcPct val="104000"/>
               </a:lnSpc>
@@ -6408,7 +6070,7 @@
           </a:bodyPr>
           <a:lstStyle/>
           <a:p>
-            <a:pPr algn="ctr" indent="0" marL="0">
+            <a:pPr marL="0" indent="0" algn="ctr">
               <a:lnSpc>
                 <a:spcPct val="127000"/>
               </a:lnSpc>
@@ -6428,7 +6090,7 @@
             <a:endParaRPr lang="en-US" sz="1300" dirty="0"/>
           </a:p>
           <a:p>
-            <a:pPr algn="ctr" indent="0" marL="0">
+            <a:pPr marL="0" indent="0" algn="ctr">
               <a:lnSpc>
                 <a:spcPct val="127000"/>
               </a:lnSpc>
@@ -6470,6 +6132,13 @@
           </a:solidFill>
           <a:ln/>
         </p:spPr>
+        <p:txBody>
+          <a:bodyPr/>
+          <a:lstStyle/>
+          <a:p>
+            <a:endParaRPr lang="en-US"/>
+          </a:p>
+        </p:txBody>
       </p:sp>
       <p:sp>
         <p:nvSpPr>
@@ -6492,6 +6161,13 @@
           </a:solidFill>
           <a:ln/>
         </p:spPr>
+        <p:txBody>
+          <a:bodyPr/>
+          <a:lstStyle/>
+          <a:p>
+            <a:endParaRPr lang="en-US"/>
+          </a:p>
+        </p:txBody>
       </p:sp>
       <p:sp>
         <p:nvSpPr>
@@ -6514,7 +6190,7 @@
           <a:bodyPr wrap="none" lIns="0" tIns="0" rIns="0" bIns="0" rtlCol="0" anchor="ctr"/>
           <a:lstStyle/>
           <a:p>
-            <a:pPr algn="ctr" indent="0" marL="0">
+            <a:pPr marL="0" indent="0" algn="ctr">
               <a:lnSpc>
                 <a:spcPct val="100000"/>
               </a:lnSpc>
@@ -6556,7 +6232,7 @@
           <a:bodyPr wrap="none" lIns="0" tIns="0" rIns="0" bIns="0" rtlCol="0" anchor="t"/>
           <a:lstStyle/>
           <a:p>
-            <a:pPr algn="ctr" indent="0" marL="0">
+            <a:pPr marL="0" indent="0" algn="ctr">
               <a:lnSpc>
                 <a:spcPct val="104000"/>
               </a:lnSpc>
@@ -6600,7 +6276,7 @@
           </a:bodyPr>
           <a:lstStyle/>
           <a:p>
-            <a:pPr algn="ctr" indent="0" marL="0">
+            <a:pPr marL="0" indent="0" algn="ctr">
               <a:lnSpc>
                 <a:spcPct val="127000"/>
               </a:lnSpc>
@@ -6620,7 +6296,7 @@
             <a:endParaRPr lang="en-US" sz="1300" dirty="0"/>
           </a:p>
           <a:p>
-            <a:pPr algn="ctr" indent="0" marL="0">
+            <a:pPr marL="0" indent="0" algn="ctr">
               <a:lnSpc>
                 <a:spcPct val="127000"/>
               </a:lnSpc>
@@ -6662,6 +6338,13 @@
           </a:solidFill>
           <a:ln/>
         </p:spPr>
+        <p:txBody>
+          <a:bodyPr/>
+          <a:lstStyle/>
+          <a:p>
+            <a:endParaRPr lang="en-US"/>
+          </a:p>
+        </p:txBody>
       </p:sp>
       <p:sp>
         <p:nvSpPr>
@@ -6684,6 +6367,13 @@
           </a:solidFill>
           <a:ln/>
         </p:spPr>
+        <p:txBody>
+          <a:bodyPr/>
+          <a:lstStyle/>
+          <a:p>
+            <a:endParaRPr lang="en-US"/>
+          </a:p>
+        </p:txBody>
       </p:sp>
       <p:sp>
         <p:nvSpPr>
@@ -6706,7 +6396,7 @@
           <a:bodyPr wrap="none" lIns="0" tIns="0" rIns="0" bIns="0" rtlCol="0" anchor="ctr"/>
           <a:lstStyle/>
           <a:p>
-            <a:pPr algn="ctr" indent="0" marL="0">
+            <a:pPr marL="0" indent="0" algn="ctr">
               <a:lnSpc>
                 <a:spcPct val="100000"/>
               </a:lnSpc>
@@ -6748,7 +6438,7 @@
           <a:bodyPr wrap="none" lIns="0" tIns="0" rIns="0" bIns="0" rtlCol="0" anchor="t"/>
           <a:lstStyle/>
           <a:p>
-            <a:pPr algn="ctr" indent="0" marL="0">
+            <a:pPr marL="0" indent="0" algn="ctr">
               <a:lnSpc>
                 <a:spcPct val="104000"/>
               </a:lnSpc>
@@ -6792,7 +6482,7 @@
           </a:bodyPr>
           <a:lstStyle/>
           <a:p>
-            <a:pPr algn="ctr" indent="0" marL="0">
+            <a:pPr marL="0" indent="0" algn="ctr">
               <a:lnSpc>
                 <a:spcPct val="127000"/>
               </a:lnSpc>
@@ -6812,7 +6502,7 @@
             <a:endParaRPr lang="en-US" sz="1300" dirty="0"/>
           </a:p>
           <a:p>
-            <a:pPr algn="ctr" indent="0" marL="0">
+            <a:pPr marL="0" indent="0" algn="ctr">
               <a:lnSpc>
                 <a:spcPct val="127000"/>
               </a:lnSpc>
@@ -6854,6 +6544,13 @@
           </a:solidFill>
           <a:ln/>
         </p:spPr>
+        <p:txBody>
+          <a:bodyPr/>
+          <a:lstStyle/>
+          <a:p>
+            <a:endParaRPr lang="en-US"/>
+          </a:p>
+        </p:txBody>
       </p:sp>
       <p:sp>
         <p:nvSpPr>
@@ -6876,6 +6573,13 @@
           </a:solidFill>
           <a:ln/>
         </p:spPr>
+        <p:txBody>
+          <a:bodyPr/>
+          <a:lstStyle/>
+          <a:p>
+            <a:endParaRPr lang="en-US"/>
+          </a:p>
+        </p:txBody>
       </p:sp>
       <p:sp>
         <p:nvSpPr>
@@ -6898,7 +6602,7 @@
           <a:bodyPr wrap="none" lIns="0" tIns="0" rIns="0" bIns="0" rtlCol="0" anchor="ctr"/>
           <a:lstStyle/>
           <a:p>
-            <a:pPr algn="ctr" indent="0" marL="0">
+            <a:pPr marL="0" indent="0" algn="ctr">
               <a:lnSpc>
                 <a:spcPct val="100000"/>
               </a:lnSpc>
@@ -6940,7 +6644,7 @@
           <a:bodyPr wrap="none" lIns="0" tIns="0" rIns="0" bIns="0" rtlCol="0" anchor="t"/>
           <a:lstStyle/>
           <a:p>
-            <a:pPr algn="ctr" indent="0" marL="0">
+            <a:pPr marL="0" indent="0" algn="ctr">
               <a:lnSpc>
                 <a:spcPct val="104000"/>
               </a:lnSpc>
@@ -6984,7 +6688,7 @@
           </a:bodyPr>
           <a:lstStyle/>
           <a:p>
-            <a:pPr algn="ctr" indent="0" marL="0">
+            <a:pPr marL="0" indent="0" algn="ctr">
               <a:lnSpc>
                 <a:spcPct val="127000"/>
               </a:lnSpc>
@@ -7004,7 +6708,7 @@
             <a:endParaRPr lang="en-US" sz="1300" dirty="0"/>
           </a:p>
           <a:p>
-            <a:pPr algn="ctr" indent="0" marL="0">
+            <a:pPr marL="0" indent="0" algn="ctr">
               <a:lnSpc>
                 <a:spcPct val="127000"/>
               </a:lnSpc>
@@ -7046,6 +6750,13 @@
           </a:solidFill>
           <a:ln/>
         </p:spPr>
+        <p:txBody>
+          <a:bodyPr/>
+          <a:lstStyle/>
+          <a:p>
+            <a:endParaRPr lang="en-US"/>
+          </a:p>
+        </p:txBody>
       </p:sp>
       <p:sp>
         <p:nvSpPr>
@@ -7068,6 +6779,13 @@
           </a:solidFill>
           <a:ln/>
         </p:spPr>
+        <p:txBody>
+          <a:bodyPr/>
+          <a:lstStyle/>
+          <a:p>
+            <a:endParaRPr lang="en-US"/>
+          </a:p>
+        </p:txBody>
       </p:sp>
       <p:sp>
         <p:nvSpPr>
@@ -7090,7 +6808,7 @@
           <a:bodyPr wrap="none" lIns="0" tIns="0" rIns="0" bIns="0" rtlCol="0" anchor="ctr"/>
           <a:lstStyle/>
           <a:p>
-            <a:pPr algn="ctr" indent="0" marL="0">
+            <a:pPr marL="0" indent="0" algn="ctr">
               <a:lnSpc>
                 <a:spcPct val="100000"/>
               </a:lnSpc>
@@ -7132,7 +6850,7 @@
           <a:bodyPr wrap="none" lIns="0" tIns="0" rIns="0" bIns="0" rtlCol="0" anchor="t"/>
           <a:lstStyle/>
           <a:p>
-            <a:pPr algn="ctr" indent="0" marL="0">
+            <a:pPr marL="0" indent="0" algn="ctr">
               <a:lnSpc>
                 <a:spcPct val="104000"/>
               </a:lnSpc>
@@ -7176,7 +6894,7 @@
           </a:bodyPr>
           <a:lstStyle/>
           <a:p>
-            <a:pPr algn="ctr" indent="0" marL="0">
+            <a:pPr marL="0" indent="0" algn="ctr">
               <a:lnSpc>
                 <a:spcPct val="127000"/>
               </a:lnSpc>
@@ -7196,7 +6914,7 @@
             <a:endParaRPr lang="en-US" sz="1300" dirty="0"/>
           </a:p>
           <a:p>
-            <a:pPr algn="ctr" indent="0" marL="0">
+            <a:pPr marL="0" indent="0" algn="ctr">
               <a:lnSpc>
                 <a:spcPct val="127000"/>
               </a:lnSpc>
@@ -7238,6 +6956,13 @@
           </a:solidFill>
           <a:ln/>
         </p:spPr>
+        <p:txBody>
+          <a:bodyPr/>
+          <a:lstStyle/>
+          <a:p>
+            <a:endParaRPr lang="en-US"/>
+          </a:p>
+        </p:txBody>
       </p:sp>
       <p:sp>
         <p:nvSpPr>
@@ -7260,6 +6985,13 @@
           </a:solidFill>
           <a:ln/>
         </p:spPr>
+        <p:txBody>
+          <a:bodyPr/>
+          <a:lstStyle/>
+          <a:p>
+            <a:endParaRPr lang="en-US"/>
+          </a:p>
+        </p:txBody>
       </p:sp>
       <p:sp>
         <p:nvSpPr>
@@ -7282,7 +7014,7 @@
           <a:bodyPr wrap="none" lIns="0" tIns="0" rIns="0" bIns="0" rtlCol="0" anchor="ctr"/>
           <a:lstStyle/>
           <a:p>
-            <a:pPr algn="ctr" indent="0" marL="0">
+            <a:pPr marL="0" indent="0" algn="ctr">
               <a:lnSpc>
                 <a:spcPct val="100000"/>
               </a:lnSpc>
@@ -7324,7 +7056,7 @@
           <a:bodyPr wrap="none" lIns="0" tIns="0" rIns="0" bIns="0" rtlCol="0" anchor="t"/>
           <a:lstStyle/>
           <a:p>
-            <a:pPr algn="ctr" indent="0" marL="0">
+            <a:pPr marL="0" indent="0" algn="ctr">
               <a:lnSpc>
                 <a:spcPct val="104000"/>
               </a:lnSpc>
@@ -7368,7 +7100,7 @@
           </a:bodyPr>
           <a:lstStyle/>
           <a:p>
-            <a:pPr algn="ctr" indent="0" marL="0">
+            <a:pPr marL="0" indent="0" algn="ctr">
               <a:lnSpc>
                 <a:spcPct val="127000"/>
               </a:lnSpc>
@@ -7388,7 +7120,7 @@
             <a:endParaRPr lang="en-US" sz="1300" dirty="0"/>
           </a:p>
           <a:p>
-            <a:pPr algn="ctr" indent="0" marL="0">
+            <a:pPr marL="0" indent="0" algn="ctr">
               <a:lnSpc>
                 <a:spcPct val="127000"/>
               </a:lnSpc>
@@ -7430,6 +7162,13 @@
           </a:solidFill>
           <a:ln/>
         </p:spPr>
+        <p:txBody>
+          <a:bodyPr/>
+          <a:lstStyle/>
+          <a:p>
+            <a:endParaRPr lang="en-US"/>
+          </a:p>
+        </p:txBody>
       </p:sp>
       <p:sp>
         <p:nvSpPr>
@@ -7452,6 +7191,13 @@
           </a:solidFill>
           <a:ln/>
         </p:spPr>
+        <p:txBody>
+          <a:bodyPr/>
+          <a:lstStyle/>
+          <a:p>
+            <a:endParaRPr lang="en-US"/>
+          </a:p>
+        </p:txBody>
       </p:sp>
       <p:sp>
         <p:nvSpPr>
@@ -7474,7 +7220,7 @@
           <a:bodyPr wrap="none" lIns="0" tIns="0" rIns="0" bIns="0" rtlCol="0" anchor="ctr"/>
           <a:lstStyle/>
           <a:p>
-            <a:pPr algn="ctr" indent="0" marL="0">
+            <a:pPr marL="0" indent="0" algn="ctr">
               <a:lnSpc>
                 <a:spcPct val="100000"/>
               </a:lnSpc>
@@ -7516,7 +7262,7 @@
           <a:bodyPr wrap="none" lIns="0" tIns="0" rIns="0" bIns="0" rtlCol="0" anchor="t"/>
           <a:lstStyle/>
           <a:p>
-            <a:pPr algn="ctr" indent="0" marL="0">
+            <a:pPr marL="0" indent="0" algn="ctr">
               <a:lnSpc>
                 <a:spcPct val="104000"/>
               </a:lnSpc>
@@ -7560,7 +7306,7 @@
           </a:bodyPr>
           <a:lstStyle/>
           <a:p>
-            <a:pPr algn="ctr" indent="0" marL="0">
+            <a:pPr marL="0" indent="0" algn="ctr">
               <a:lnSpc>
                 <a:spcPct val="127000"/>
               </a:lnSpc>
@@ -7580,7 +7326,7 @@
             <a:endParaRPr lang="en-US" sz="1300" dirty="0"/>
           </a:p>
           <a:p>
-            <a:pPr algn="ctr" indent="0" marL="0">
+            <a:pPr marL="0" indent="0" algn="ctr">
               <a:lnSpc>
                 <a:spcPct val="127000"/>
               </a:lnSpc>
@@ -7622,6 +7368,13 @@
           </a:solidFill>
           <a:ln/>
         </p:spPr>
+        <p:txBody>
+          <a:bodyPr/>
+          <a:lstStyle/>
+          <a:p>
+            <a:endParaRPr lang="en-US"/>
+          </a:p>
+        </p:txBody>
       </p:sp>
       <p:sp>
         <p:nvSpPr>
@@ -7644,6 +7397,13 @@
           </a:solidFill>
           <a:ln/>
         </p:spPr>
+        <p:txBody>
+          <a:bodyPr/>
+          <a:lstStyle/>
+          <a:p>
+            <a:endParaRPr lang="en-US"/>
+          </a:p>
+        </p:txBody>
       </p:sp>
       <p:sp>
         <p:nvSpPr>
@@ -7666,7 +7426,7 @@
           <a:bodyPr wrap="none" lIns="0" tIns="0" rIns="0" bIns="0" rtlCol="0" anchor="ctr"/>
           <a:lstStyle/>
           <a:p>
-            <a:pPr algn="ctr" indent="0" marL="0">
+            <a:pPr marL="0" indent="0" algn="ctr">
               <a:lnSpc>
                 <a:spcPct val="100000"/>
               </a:lnSpc>
@@ -7708,7 +7468,7 @@
           <a:bodyPr wrap="none" lIns="0" tIns="0" rIns="0" bIns="0" rtlCol="0" anchor="t"/>
           <a:lstStyle/>
           <a:p>
-            <a:pPr algn="ctr" indent="0" marL="0">
+            <a:pPr marL="0" indent="0" algn="ctr">
               <a:lnSpc>
                 <a:spcPct val="104000"/>
               </a:lnSpc>
@@ -7752,7 +7512,7 @@
           </a:bodyPr>
           <a:lstStyle/>
           <a:p>
-            <a:pPr algn="ctr" indent="0" marL="0">
+            <a:pPr marL="0" indent="0" algn="ctr">
               <a:lnSpc>
                 <a:spcPct val="127000"/>
               </a:lnSpc>
@@ -7772,7 +7532,7 @@
             <a:endParaRPr lang="en-US" sz="1300" dirty="0"/>
           </a:p>
           <a:p>
-            <a:pPr algn="ctr" indent="0" marL="0">
+            <a:pPr marL="0" indent="0" algn="ctr">
               <a:lnSpc>
                 <a:spcPct val="127000"/>
               </a:lnSpc>
@@ -7814,6 +7574,13 @@
           </a:solidFill>
           <a:ln/>
         </p:spPr>
+        <p:txBody>
+          <a:bodyPr/>
+          <a:lstStyle/>
+          <a:p>
+            <a:endParaRPr lang="en-US"/>
+          </a:p>
+        </p:txBody>
       </p:sp>
       <p:sp>
         <p:nvSpPr>
@@ -7836,6 +7603,13 @@
           </a:solidFill>
           <a:ln/>
         </p:spPr>
+        <p:txBody>
+          <a:bodyPr/>
+          <a:lstStyle/>
+          <a:p>
+            <a:endParaRPr lang="en-US"/>
+          </a:p>
+        </p:txBody>
       </p:sp>
       <p:sp>
         <p:nvSpPr>
@@ -7858,7 +7632,7 @@
           <a:bodyPr wrap="none" lIns="0" tIns="0" rIns="0" bIns="0" rtlCol="0" anchor="ctr"/>
           <a:lstStyle/>
           <a:p>
-            <a:pPr algn="ctr" indent="0" marL="0">
+            <a:pPr marL="0" indent="0" algn="ctr">
               <a:lnSpc>
                 <a:spcPct val="100000"/>
               </a:lnSpc>
@@ -7900,7 +7674,7 @@
           <a:bodyPr wrap="none" lIns="0" tIns="0" rIns="0" bIns="0" rtlCol="0" anchor="t"/>
           <a:lstStyle/>
           <a:p>
-            <a:pPr algn="ctr" indent="0" marL="0">
+            <a:pPr marL="0" indent="0" algn="ctr">
               <a:lnSpc>
                 <a:spcPct val="104000"/>
               </a:lnSpc>
@@ -7944,7 +7718,7 @@
           </a:bodyPr>
           <a:lstStyle/>
           <a:p>
-            <a:pPr algn="ctr" indent="0" marL="0">
+            <a:pPr marL="0" indent="0" algn="ctr">
               <a:lnSpc>
                 <a:spcPct val="127000"/>
               </a:lnSpc>
@@ -7964,7 +7738,7 @@
             <a:endParaRPr lang="en-US" sz="1300" dirty="0"/>
           </a:p>
           <a:p>
-            <a:pPr algn="ctr" indent="0" marL="0">
+            <a:pPr marL="0" indent="0" algn="ctr">
               <a:lnSpc>
                 <a:spcPct val="127000"/>
               </a:lnSpc>
@@ -8006,6 +7780,13 @@
           </a:solidFill>
           <a:ln/>
         </p:spPr>
+        <p:txBody>
+          <a:bodyPr/>
+          <a:lstStyle/>
+          <a:p>
+            <a:endParaRPr lang="en-US"/>
+          </a:p>
+        </p:txBody>
       </p:sp>
       <p:sp>
         <p:nvSpPr>
@@ -8028,6 +7809,13 @@
           </a:solidFill>
           <a:ln/>
         </p:spPr>
+        <p:txBody>
+          <a:bodyPr/>
+          <a:lstStyle/>
+          <a:p>
+            <a:endParaRPr lang="en-US"/>
+          </a:p>
+        </p:txBody>
       </p:sp>
       <p:sp>
         <p:nvSpPr>
@@ -8050,7 +7838,7 @@
           <a:bodyPr wrap="none" lIns="0" tIns="0" rIns="0" bIns="0" rtlCol="0" anchor="ctr"/>
           <a:lstStyle/>
           <a:p>
-            <a:pPr algn="ctr" indent="0" marL="0">
+            <a:pPr marL="0" indent="0" algn="ctr">
               <a:lnSpc>
                 <a:spcPct val="100000"/>
               </a:lnSpc>
@@ -8092,7 +7880,7 @@
           <a:bodyPr wrap="none" lIns="0" tIns="0" rIns="0" bIns="0" rtlCol="0" anchor="t"/>
           <a:lstStyle/>
           <a:p>
-            <a:pPr algn="ctr" indent="0" marL="0">
+            <a:pPr marL="0" indent="0" algn="ctr">
               <a:lnSpc>
                 <a:spcPct val="104000"/>
               </a:lnSpc>
@@ -8136,7 +7924,7 @@
           </a:bodyPr>
           <a:lstStyle/>
           <a:p>
-            <a:pPr algn="ctr" indent="0" marL="0">
+            <a:pPr marL="0" indent="0" algn="ctr">
               <a:lnSpc>
                 <a:spcPct val="127000"/>
               </a:lnSpc>
@@ -8156,7 +7944,7 @@
             <a:endParaRPr lang="en-US" sz="1300" dirty="0"/>
           </a:p>
           <a:p>
-            <a:pPr algn="ctr" indent="0" marL="0">
+            <a:pPr marL="0" indent="0" algn="ctr">
               <a:lnSpc>
                 <a:spcPct val="127000"/>
               </a:lnSpc>
@@ -8223,7 +8011,7 @@
           <a:bodyPr wrap="none" lIns="0" tIns="0" rIns="0" bIns="0" rtlCol="0" anchor="t"/>
           <a:lstStyle/>
           <a:p>
-            <a:pPr algn="l" indent="0" marL="0">
+            <a:pPr marL="0" indent="0" algn="l">
               <a:lnSpc>
                 <a:spcPct val="104000"/>
               </a:lnSpc>
@@ -8265,7 +8053,7 @@
           <a:bodyPr wrap="none" lIns="0" tIns="0" rIns="0" bIns="0" rtlCol="0" anchor="t"/>
           <a:lstStyle/>
           <a:p>
-            <a:pPr algn="l" indent="0" marL="0">
+            <a:pPr marL="0" indent="0" algn="l">
               <a:lnSpc>
                 <a:spcPct val="133000"/>
               </a:lnSpc>
@@ -8307,6 +8095,13 @@
           </a:solidFill>
           <a:ln/>
         </p:spPr>
+        <p:txBody>
+          <a:bodyPr/>
+          <a:lstStyle/>
+          <a:p>
+            <a:endParaRPr lang="en-US"/>
+          </a:p>
+        </p:txBody>
       </p:sp>
       <p:sp>
         <p:nvSpPr>
@@ -8327,20 +8122,27 @@
           </a:solidFill>
           <a:ln/>
         </p:spPr>
+        <p:txBody>
+          <a:bodyPr/>
+          <a:lstStyle/>
+          <a:p>
+            <a:endParaRPr lang="en-US"/>
+          </a:p>
+        </p:txBody>
       </p:sp>
       <p:pic>
         <p:nvPicPr>
-          <p:cNvPr id="6" name="Image 0" descr="preencoded.png">    </p:cNvPr>
+          <p:cNvPr id="6" name="Image 0" descr="preencoded.png"/>
           <p:cNvPicPr>
             <a:picLocks noChangeAspect="1"/>
           </p:cNvPicPr>
           <p:nvPr/>
         </p:nvPicPr>
         <p:blipFill>
-          <a:blip r:embed="rId1">
+          <a:blip>
             <a:extLst>
               <a:ext uri="{96DAC541-7B7A-43D3-8B79-37D633B846F1}">
-                <asvg:svgBlip xmlns:asvg="http://schemas.microsoft.com/office/drawing/2016/SVG/main" r:embed="rId2"/>
+                <asvg:svgBlip xmlns:asvg="http://schemas.microsoft.com/office/drawing/2016/SVG/main" r:embed="rId3"/>
               </a:ext>
             </a:extLst>
           </a:blip>
@@ -8379,7 +8181,7 @@
           <a:bodyPr wrap="none" lIns="0" tIns="0" rIns="0" bIns="0" rtlCol="0" anchor="t"/>
           <a:lstStyle/>
           <a:p>
-            <a:pPr algn="l" indent="0" marL="0">
+            <a:pPr marL="0" indent="0" algn="l">
               <a:lnSpc>
                 <a:spcPct val="104000"/>
               </a:lnSpc>
@@ -8423,7 +8225,7 @@
           </a:bodyPr>
           <a:lstStyle/>
           <a:p>
-            <a:pPr algn="l" indent="0" marL="0">
+            <a:pPr marL="0" indent="0" algn="l">
               <a:lnSpc>
                 <a:spcPct val="133000"/>
               </a:lnSpc>
@@ -8440,12 +8242,6 @@
               </a:rPr>
               <a:t>U-Net successfully fixed </a:t>
             </a:r>
-            <a:pPr algn="l" indent="0" marL="0">
-              <a:lnSpc>
-                <a:spcPct val="133000"/>
-              </a:lnSpc>
-              <a:buNone/>
-            </a:pPr>
             <a:r>
               <a:rPr lang="en-US" sz="1450" b="1" dirty="0">
                 <a:solidFill>
@@ -8457,12 +8253,6 @@
               </a:rPr>
               <a:t>Building Damage Count (BDC) degradation</a:t>
             </a:r>
-            <a:pPr algn="l" indent="0" marL="0">
-              <a:lnSpc>
-                <a:spcPct val="133000"/>
-              </a:lnSpc>
-              <a:buNone/>
-            </a:pPr>
             <a:r>
               <a:rPr lang="en-US" sz="1450" dirty="0">
                 <a:solidFill>
@@ -8499,6 +8289,13 @@
           </a:solidFill>
           <a:ln/>
         </p:spPr>
+        <p:txBody>
+          <a:bodyPr/>
+          <a:lstStyle/>
+          <a:p>
+            <a:endParaRPr lang="en-US"/>
+          </a:p>
+        </p:txBody>
       </p:sp>
       <p:sp>
         <p:nvSpPr>
@@ -8519,17 +8316,24 @@
           </a:solidFill>
           <a:ln/>
         </p:spPr>
+        <p:txBody>
+          <a:bodyPr/>
+          <a:lstStyle/>
+          <a:p>
+            <a:endParaRPr lang="en-US"/>
+          </a:p>
+        </p:txBody>
       </p:sp>
       <p:pic>
         <p:nvPicPr>
-          <p:cNvPr id="11" name="Image 1" descr="preencoded.png">    </p:cNvPr>
+          <p:cNvPr id="11" name="Image 1" descr="preencoded.png"/>
           <p:cNvPicPr>
             <a:picLocks noChangeAspect="1"/>
           </p:cNvPicPr>
           <p:nvPr/>
         </p:nvPicPr>
         <p:blipFill>
-          <a:blip r:embed="rId3">
+          <a:blip>
             <a:extLst>
               <a:ext uri="{96DAC541-7B7A-43D3-8B79-37D633B846F1}">
                 <asvg:svgBlip xmlns:asvg="http://schemas.microsoft.com/office/drawing/2016/SVG/main" r:embed="rId4"/>
@@ -8571,7 +8375,7 @@
           <a:bodyPr wrap="none" lIns="0" tIns="0" rIns="0" bIns="0" rtlCol="0" anchor="t"/>
           <a:lstStyle/>
           <a:p>
-            <a:pPr algn="l" indent="0" marL="0">
+            <a:pPr marL="0" indent="0" algn="l">
               <a:lnSpc>
                 <a:spcPct val="104000"/>
               </a:lnSpc>
@@ -8615,7 +8419,7 @@
           </a:bodyPr>
           <a:lstStyle/>
           <a:p>
-            <a:pPr algn="l" indent="0" marL="0">
+            <a:pPr marL="0" indent="0" algn="l">
               <a:lnSpc>
                 <a:spcPct val="133000"/>
               </a:lnSpc>
@@ -8632,12 +8436,6 @@
               </a:rPr>
               <a:t>Fine-tuned </a:t>
             </a:r>
-            <a:pPr algn="l" indent="0" marL="0">
-              <a:lnSpc>
-                <a:spcPct val="133000"/>
-              </a:lnSpc>
-              <a:buNone/>
-            </a:pPr>
             <a:r>
               <a:rPr lang="en-US" sz="1450" b="1" dirty="0">
                 <a:solidFill>
@@ -8649,12 +8447,6 @@
               </a:rPr>
               <a:t>Qwen2.5-VL</a:t>
             </a:r>
-            <a:pPr algn="l" indent="0" marL="0">
-              <a:lnSpc>
-                <a:spcPct val="133000"/>
-              </a:lnSpc>
-              <a:buNone/>
-            </a:pPr>
             <a:r>
               <a:rPr lang="en-US" sz="1450" dirty="0">
                 <a:solidFill>
@@ -8691,6 +8483,13 @@
           </a:solidFill>
           <a:ln/>
         </p:spPr>
+        <p:txBody>
+          <a:bodyPr/>
+          <a:lstStyle/>
+          <a:p>
+            <a:endParaRPr lang="en-US"/>
+          </a:p>
+        </p:txBody>
       </p:sp>
       <p:sp>
         <p:nvSpPr>
@@ -8711,20 +8510,27 @@
           </a:solidFill>
           <a:ln/>
         </p:spPr>
+        <p:txBody>
+          <a:bodyPr/>
+          <a:lstStyle/>
+          <a:p>
+            <a:endParaRPr lang="en-US"/>
+          </a:p>
+        </p:txBody>
       </p:sp>
       <p:pic>
         <p:nvPicPr>
-          <p:cNvPr id="16" name="Image 2" descr="preencoded.png">    </p:cNvPr>
+          <p:cNvPr id="16" name="Image 2" descr="preencoded.png"/>
           <p:cNvPicPr>
             <a:picLocks noChangeAspect="1"/>
           </p:cNvPicPr>
           <p:nvPr/>
         </p:nvPicPr>
         <p:blipFill>
-          <a:blip r:embed="rId5">
+          <a:blip>
             <a:extLst>
               <a:ext uri="{96DAC541-7B7A-43D3-8B79-37D633B846F1}">
-                <asvg:svgBlip xmlns:asvg="http://schemas.microsoft.com/office/drawing/2016/SVG/main" r:embed="rId6"/>
+                <asvg:svgBlip xmlns:asvg="http://schemas.microsoft.com/office/drawing/2016/SVG/main" r:embed="rId5"/>
               </a:ext>
             </a:extLst>
           </a:blip>
@@ -8763,7 +8569,7 @@
           <a:bodyPr wrap="none" lIns="0" tIns="0" rIns="0" bIns="0" rtlCol="0" anchor="t"/>
           <a:lstStyle/>
           <a:p>
-            <a:pPr algn="l" indent="0" marL="0">
+            <a:pPr marL="0" indent="0" algn="l">
               <a:lnSpc>
                 <a:spcPct val="104000"/>
               </a:lnSpc>
@@ -8807,7 +8613,7 @@
           </a:bodyPr>
           <a:lstStyle/>
           <a:p>
-            <a:pPr algn="l" indent="0" marL="0">
+            <a:pPr marL="0" indent="0" algn="l">
               <a:lnSpc>
                 <a:spcPct val="133000"/>
               </a:lnSpc>
@@ -8824,12 +8630,6 @@
               </a:rPr>
               <a:t>The </a:t>
             </a:r>
-            <a:pPr algn="l" indent="0" marL="0">
-              <a:lnSpc>
-                <a:spcPct val="133000"/>
-              </a:lnSpc>
-              <a:buNone/>
-            </a:pPr>
             <a:r>
               <a:rPr lang="en-US" sz="1450" b="1" dirty="0">
                 <a:solidFill>
@@ -8841,12 +8641,6 @@
               </a:rPr>
               <a:t>DisasTeller</a:t>
             </a:r>
-            <a:pPr algn="l" indent="0" marL="0">
-              <a:lnSpc>
-                <a:spcPct val="133000"/>
-              </a:lnSpc>
-              <a:buNone/>
-            </a:pPr>
             <a:r>
               <a:rPr lang="en-US" sz="1450" dirty="0">
                 <a:solidFill>
@@ -8908,7 +8702,7 @@
           <a:bodyPr wrap="none" lIns="0" tIns="0" rIns="0" bIns="0" rtlCol="0" anchor="t"/>
           <a:lstStyle/>
           <a:p>
-            <a:pPr algn="l" indent="0" marL="0">
+            <a:pPr marL="0" indent="0" algn="l">
               <a:lnSpc>
                 <a:spcPct val="104000"/>
               </a:lnSpc>
@@ -8950,6 +8744,13 @@
           </a:solidFill>
           <a:ln/>
         </p:spPr>
+        <p:txBody>
+          <a:bodyPr/>
+          <a:lstStyle/>
+          <a:p>
+            <a:endParaRPr lang="en-US"/>
+          </a:p>
+        </p:txBody>
       </p:sp>
       <p:sp>
         <p:nvSpPr>
@@ -8972,6 +8773,13 @@
           </a:solidFill>
           <a:ln/>
         </p:spPr>
+        <p:txBody>
+          <a:bodyPr/>
+          <a:lstStyle/>
+          <a:p>
+            <a:endParaRPr lang="en-US"/>
+          </a:p>
+        </p:txBody>
       </p:sp>
       <p:sp>
         <p:nvSpPr>
@@ -8994,7 +8802,7 @@
           <a:bodyPr wrap="none" lIns="0" tIns="0" rIns="0" bIns="0" rtlCol="0" anchor="t"/>
           <a:lstStyle/>
           <a:p>
-            <a:pPr algn="l" indent="0" marL="0">
+            <a:pPr marL="0" indent="0" algn="l">
               <a:lnSpc>
                 <a:spcPct val="96000"/>
               </a:lnSpc>
@@ -9017,17 +8825,17 @@
       </p:sp>
       <p:pic>
         <p:nvPicPr>
-          <p:cNvPr id="6" name="Image 0" descr="preencoded.png">    </p:cNvPr>
+          <p:cNvPr id="6" name="Image 0" descr="preencoded.png"/>
           <p:cNvPicPr>
             <a:picLocks noChangeAspect="1"/>
           </p:cNvPicPr>
           <p:nvPr/>
         </p:nvPicPr>
         <p:blipFill>
-          <a:blip r:embed="rId1">
+          <a:blip>
             <a:extLst>
               <a:ext uri="{96DAC541-7B7A-43D3-8B79-37D633B846F1}">
-                <asvg:svgBlip xmlns:asvg="http://schemas.microsoft.com/office/drawing/2016/SVG/main" r:embed="rId2"/>
+                <asvg:svgBlip xmlns:asvg="http://schemas.microsoft.com/office/drawing/2016/SVG/main" r:embed="rId3"/>
               </a:ext>
             </a:extLst>
           </a:blip>
@@ -9068,7 +8876,7 @@
           </a:bodyPr>
           <a:lstStyle/>
           <a:p>
-            <a:pPr algn="l" indent="0" marL="0">
+            <a:pPr marL="0" indent="0" algn="l">
               <a:lnSpc>
                 <a:spcPct val="104000"/>
               </a:lnSpc>
@@ -9112,7 +8920,7 @@
           </a:bodyPr>
           <a:lstStyle/>
           <a:p>
-            <a:pPr algn="l" indent="0" marL="0">
+            <a:pPr marL="0" indent="0" algn="l">
               <a:lnSpc>
                 <a:spcPct val="123000"/>
               </a:lnSpc>
@@ -9135,14 +8943,14 @@
       </p:sp>
       <p:pic>
         <p:nvPicPr>
-          <p:cNvPr id="9" name="Image 1" descr="preencoded.png">    </p:cNvPr>
+          <p:cNvPr id="9" name="Image 1" descr="preencoded.png"/>
           <p:cNvPicPr>
             <a:picLocks noChangeAspect="1"/>
           </p:cNvPicPr>
           <p:nvPr/>
         </p:nvPicPr>
         <p:blipFill>
-          <a:blip r:embed="rId3">
+          <a:blip>
             <a:extLst>
               <a:ext uri="{96DAC541-7B7A-43D3-8B79-37D633B846F1}">
                 <asvg:svgBlip xmlns:asvg="http://schemas.microsoft.com/office/drawing/2016/SVG/main" r:embed="rId4"/>
@@ -9186,7 +8994,7 @@
           </a:bodyPr>
           <a:lstStyle/>
           <a:p>
-            <a:pPr algn="l" indent="0" marL="0">
+            <a:pPr marL="0" indent="0" algn="l">
               <a:lnSpc>
                 <a:spcPct val="104000"/>
               </a:lnSpc>
@@ -9230,7 +9038,7 @@
           </a:bodyPr>
           <a:lstStyle/>
           <a:p>
-            <a:pPr algn="l" indent="0" marL="0">
+            <a:pPr marL="0" indent="0" algn="l">
               <a:lnSpc>
                 <a:spcPct val="123000"/>
               </a:lnSpc>
@@ -9253,14 +9061,132 @@
       </p:sp>
       <p:pic>
         <p:nvPicPr>
-          <p:cNvPr id="12" name="Image 2" descr="preencoded.png">    </p:cNvPr>
+          <p:cNvPr id="12" name="Image 2" descr="preencoded.png"/>
           <p:cNvPicPr>
             <a:picLocks noChangeAspect="1"/>
           </p:cNvPicPr>
           <p:nvPr/>
         </p:nvPicPr>
         <p:blipFill>
-          <a:blip r:embed="rId5">
+          <a:blip>
+            <a:extLst>
+              <a:ext uri="{96DAC541-7B7A-43D3-8B79-37D633B846F1}">
+                <asvg:svgBlip xmlns:asvg="http://schemas.microsoft.com/office/drawing/2016/SVG/main" r:embed="rId5"/>
+              </a:ext>
+            </a:extLst>
+          </a:blip>
+          <a:stretch>
+            <a:fillRect/>
+          </a:stretch>
+        </p:blipFill>
+        <p:spPr>
+          <a:xfrm>
+            <a:off x="706420" y="3804146"/>
+            <a:ext cx="2506004" cy="1948855"/>
+          </a:xfrm>
+          <a:prstGeom prst="rect">
+            <a:avLst/>
+          </a:prstGeom>
+        </p:spPr>
+      </p:pic>
+      <p:sp>
+        <p:nvSpPr>
+          <p:cNvPr id="13" name="Text 8"/>
+          <p:cNvSpPr/>
+          <p:nvPr/>
+        </p:nvSpPr>
+        <p:spPr>
+          <a:xfrm>
+            <a:off x="962299" y="3983831"/>
+            <a:ext cx="2070445" cy="502047"/>
+          </a:xfrm>
+          <a:prstGeom prst="rect">
+            <a:avLst/>
+          </a:prstGeom>
+          <a:noFill/>
+          <a:ln/>
+        </p:spPr>
+        <p:txBody>
+          <a:bodyPr wrap="square" lIns="0" tIns="0" rIns="0" bIns="0" rtlCol="0" anchor="t">
+            <a:normAutofit/>
+          </a:bodyPr>
+          <a:lstStyle/>
+          <a:p>
+            <a:pPr marL="0" indent="0" algn="l">
+              <a:lnSpc>
+                <a:spcPct val="104000"/>
+              </a:lnSpc>
+              <a:buNone/>
+            </a:pPr>
+            <a:r>
+              <a:rPr lang="en-US" sz="1550" b="1" dirty="0">
+                <a:solidFill>
+                  <a:srgbClr val="000000"/>
+                </a:solidFill>
+                <a:latin typeface="Outfit Bold" pitchFamily="34" charset="0"/>
+                <a:ea typeface="Outfit Bold" pitchFamily="34" charset="-122"/>
+                <a:cs typeface="Outfit Bold" pitchFamily="34" charset="-120"/>
+              </a:rPr>
+              <a:t>Accurate Multimodal VQA</a:t>
+            </a:r>
+            <a:endParaRPr lang="en-US" sz="1550" dirty="0"/>
+          </a:p>
+        </p:txBody>
+      </p:sp>
+      <p:sp>
+        <p:nvSpPr>
+          <p:cNvPr id="14" name="Text 9"/>
+          <p:cNvSpPr/>
+          <p:nvPr/>
+        </p:nvSpPr>
+        <p:spPr>
+          <a:xfrm>
+            <a:off x="962299" y="4622403"/>
+            <a:ext cx="2070445" cy="713184"/>
+          </a:xfrm>
+          <a:prstGeom prst="rect">
+            <a:avLst/>
+          </a:prstGeom>
+          <a:noFill/>
+          <a:ln/>
+        </p:spPr>
+        <p:txBody>
+          <a:bodyPr wrap="square" lIns="0" tIns="0" rIns="0" bIns="0" rtlCol="0" anchor="t">
+            <a:normAutofit/>
+          </a:bodyPr>
+          <a:lstStyle/>
+          <a:p>
+            <a:pPr marL="0" indent="0" algn="l">
+              <a:lnSpc>
+                <a:spcPct val="123000"/>
+              </a:lnSpc>
+              <a:buNone/>
+            </a:pPr>
+            <a:r>
+              <a:rPr lang="en-US" sz="1250" dirty="0">
+                <a:solidFill>
+                  <a:srgbClr val="000000"/>
+                </a:solidFill>
+                <a:latin typeface="Bitter" pitchFamily="34" charset="0"/>
+                <a:ea typeface="Bitter" pitchFamily="34" charset="-122"/>
+                <a:cs typeface="Bitter" pitchFamily="34" charset="-120"/>
+              </a:rPr>
+              <a:t>&gt;95% benchmark accuracy on disaster visual question answering Qwen2.5-VL</a:t>
+            </a:r>
+            <a:endParaRPr lang="en-US" sz="1250" dirty="0"/>
+          </a:p>
+        </p:txBody>
+      </p:sp>
+      <p:pic>
+        <p:nvPicPr>
+          <p:cNvPr id="15" name="Image 3" descr="preencoded.png"/>
+          <p:cNvPicPr>
+            <a:picLocks noChangeAspect="1"/>
+          </p:cNvPicPr>
+          <p:nvPr/>
+        </p:nvPicPr>
+        <p:blipFill>
+          <a:blip>
             <a:extLst>
               <a:ext uri="{96DAC541-7B7A-43D3-8B79-37D633B846F1}">
                 <asvg:svgBlip xmlns:asvg="http://schemas.microsoft.com/office/drawing/2016/SVG/main" r:embed="rId6"/>
@@ -9273,7 +9199,7 @@
         </p:blipFill>
         <p:spPr>
           <a:xfrm>
-            <a:off x="706420" y="3804146"/>
+            <a:off x="3348946" y="3804146"/>
             <a:ext cx="2506004" cy="1948855"/>
           </a:xfrm>
           <a:prstGeom prst="rect">
@@ -9283,13 +9209,13 @@
       </p:pic>
       <p:sp>
         <p:nvSpPr>
-          <p:cNvPr id="13" name="Text 8"/>
-          <p:cNvSpPr/>
-          <p:nvPr/>
-        </p:nvSpPr>
-        <p:spPr>
-          <a:xfrm>
-            <a:off x="962299" y="3983831"/>
+          <p:cNvPr id="16" name="Text 10"/>
+          <p:cNvSpPr/>
+          <p:nvPr/>
+        </p:nvSpPr>
+        <p:spPr>
+          <a:xfrm>
+            <a:off x="3604825" y="3983831"/>
             <a:ext cx="2070445" cy="502047"/>
           </a:xfrm>
           <a:prstGeom prst="rect">
@@ -9304,7 +9230,7 @@
           </a:bodyPr>
           <a:lstStyle/>
           <a:p>
-            <a:pPr algn="l" indent="0" marL="0">
+            <a:pPr marL="0" indent="0" algn="l">
               <a:lnSpc>
                 <a:spcPct val="104000"/>
               </a:lnSpc>
@@ -9319,7 +9245,7 @@
                 <a:ea typeface="Outfit Bold" pitchFamily="34" charset="-122"/>
                 <a:cs typeface="Outfit Bold" pitchFamily="34" charset="-120"/>
               </a:rPr>
-              <a:t>Accurate Multimodal VQA</a:t>
+              <a:t>Low-Latency Coordination</a:t>
             </a:r>
             <a:endParaRPr lang="en-US" sz="1550" dirty="0"/>
           </a:p>
@@ -9327,14 +9253,14 @@
       </p:sp>
       <p:sp>
         <p:nvSpPr>
-          <p:cNvPr id="14" name="Text 9"/>
-          <p:cNvSpPr/>
-          <p:nvPr/>
-        </p:nvSpPr>
-        <p:spPr>
-          <a:xfrm>
-            <a:off x="962299" y="4622403"/>
-            <a:ext cx="2070445" cy="713184"/>
+          <p:cNvPr id="17" name="Text 11"/>
+          <p:cNvSpPr/>
+          <p:nvPr/>
+        </p:nvSpPr>
+        <p:spPr>
+          <a:xfrm>
+            <a:off x="3604825" y="4622403"/>
+            <a:ext cx="2070445" cy="950912"/>
           </a:xfrm>
           <a:prstGeom prst="rect">
             <a:avLst/>
@@ -9348,7 +9274,7 @@
           </a:bodyPr>
           <a:lstStyle/>
           <a:p>
-            <a:pPr algn="l" indent="0" marL="0">
+            <a:pPr marL="0" indent="0" algn="l">
               <a:lnSpc>
                 <a:spcPct val="123000"/>
               </a:lnSpc>
@@ -9363,22 +9289,240 @@
                 <a:ea typeface="Bitter" pitchFamily="34" charset="-122"/>
                 <a:cs typeface="Bitter" pitchFamily="34" charset="-120"/>
               </a:rPr>
-              <a:t>&gt;95% benchmark accuracy on disaster visual question answering Qwen2.5-VL</a:t>
+              <a:t>Automated reasoning and multi-agent synthesis running within operational constraints</a:t>
             </a:r>
             <a:endParaRPr lang="en-US" sz="1250" dirty="0"/>
+          </a:p>
+        </p:txBody>
+      </p:sp>
+      <p:sp>
+        <p:nvSpPr>
+          <p:cNvPr id="18" name="Shape 12"/>
+          <p:cNvSpPr/>
+          <p:nvPr/>
+        </p:nvSpPr>
+        <p:spPr>
+          <a:xfrm>
+            <a:off x="6182463" y="1405334"/>
+            <a:ext cx="5469793" cy="4501257"/>
+          </a:xfrm>
+          <a:prstGeom prst="roundRect">
+            <a:avLst>
+              <a:gd name="adj" fmla="val 535"/>
+            </a:avLst>
+          </a:prstGeom>
+          <a:solidFill>
+            <a:srgbClr val="EAF9EE"/>
+          </a:solidFill>
+          <a:ln/>
+        </p:spPr>
+        <p:txBody>
+          <a:bodyPr/>
+          <a:lstStyle/>
+          <a:p>
+            <a:endParaRPr lang="en-US"/>
+          </a:p>
+        </p:txBody>
+      </p:sp>
+      <p:sp>
+        <p:nvSpPr>
+          <p:cNvPr id="19" name="Shape 13"/>
+          <p:cNvSpPr/>
+          <p:nvPr/>
+        </p:nvSpPr>
+        <p:spPr>
+          <a:xfrm>
+            <a:off x="6343094" y="1558925"/>
+            <a:ext cx="1942853" cy="243979"/>
+          </a:xfrm>
+          <a:prstGeom prst="roundRect">
+            <a:avLst>
+              <a:gd name="adj" fmla="val 7902"/>
+            </a:avLst>
+          </a:prstGeom>
+          <a:solidFill>
+            <a:srgbClr val="E8EAE1"/>
+          </a:solidFill>
+          <a:ln/>
+        </p:spPr>
+        <p:txBody>
+          <a:bodyPr/>
+          <a:lstStyle/>
+          <a:p>
+            <a:endParaRPr lang="en-US"/>
+          </a:p>
+        </p:txBody>
+      </p:sp>
+      <p:sp>
+        <p:nvSpPr>
+          <p:cNvPr id="20" name="Text 14"/>
+          <p:cNvSpPr/>
+          <p:nvPr/>
+        </p:nvSpPr>
+        <p:spPr>
+          <a:xfrm>
+            <a:off x="6439433" y="1607046"/>
+            <a:ext cx="2359760" cy="147737"/>
+          </a:xfrm>
+          <a:prstGeom prst="rect">
+            <a:avLst/>
+          </a:prstGeom>
+          <a:noFill/>
+          <a:ln/>
+        </p:spPr>
+        <p:txBody>
+          <a:bodyPr wrap="none" lIns="0" tIns="0" rIns="0" bIns="0" rtlCol="0" anchor="t"/>
+          <a:lstStyle/>
+          <a:p>
+            <a:pPr marL="0" indent="0" algn="l">
+              <a:lnSpc>
+                <a:spcPct val="96000"/>
+              </a:lnSpc>
+              <a:buNone/>
+            </a:pPr>
+            <a:r>
+              <a:rPr lang="en-US" sz="1000" dirty="0">
+                <a:solidFill>
+                  <a:srgbClr val="000000"/>
+                </a:solidFill>
+                <a:latin typeface="Bitter" pitchFamily="34" charset="0"/>
+                <a:ea typeface="Bitter" pitchFamily="34" charset="-122"/>
+                <a:cs typeface="Bitter" pitchFamily="34" charset="-120"/>
+              </a:rPr>
+              <a:t>KEY PROJECT DELIVERABLES</a:t>
+            </a:r>
+            <a:endParaRPr lang="en-US" sz="1000" dirty="0"/>
           </a:p>
         </p:txBody>
       </p:sp>
       <p:pic>
         <p:nvPicPr>
-          <p:cNvPr id="15" name="Image 3" descr="preencoded.png">    </p:cNvPr>
+          <p:cNvPr id="21" name="Image 4" descr="preencoded.png"/>
           <p:cNvPicPr>
             <a:picLocks noChangeAspect="1"/>
           </p:cNvPicPr>
           <p:nvPr/>
         </p:nvPicPr>
         <p:blipFill>
-          <a:blip r:embed="rId7">
+          <a:blip>
+            <a:extLst>
+              <a:ext uri="{96DAC541-7B7A-43D3-8B79-37D633B846F1}">
+                <asvg:svgBlip xmlns:asvg="http://schemas.microsoft.com/office/drawing/2016/SVG/main" r:embed="rId7"/>
+              </a:ext>
+            </a:extLst>
+          </a:blip>
+          <a:stretch>
+            <a:fillRect/>
+          </a:stretch>
+        </p:blipFill>
+        <p:spPr>
+          <a:xfrm>
+            <a:off x="6343094" y="1956495"/>
+            <a:ext cx="2506004" cy="1711127"/>
+          </a:xfrm>
+          <a:prstGeom prst="rect">
+            <a:avLst/>
+          </a:prstGeom>
+        </p:spPr>
+      </p:pic>
+      <p:sp>
+        <p:nvSpPr>
+          <p:cNvPr id="22" name="Text 15"/>
+          <p:cNvSpPr/>
+          <p:nvPr/>
+        </p:nvSpPr>
+        <p:spPr>
+          <a:xfrm>
+            <a:off x="6598973" y="2136180"/>
+            <a:ext cx="2070445" cy="502047"/>
+          </a:xfrm>
+          <a:prstGeom prst="rect">
+            <a:avLst/>
+          </a:prstGeom>
+          <a:noFill/>
+          <a:ln/>
+        </p:spPr>
+        <p:txBody>
+          <a:bodyPr wrap="square" lIns="0" tIns="0" rIns="0" bIns="0" rtlCol="0" anchor="t">
+            <a:normAutofit/>
+          </a:bodyPr>
+          <a:lstStyle/>
+          <a:p>
+            <a:pPr marL="0" indent="0" algn="l">
+              <a:lnSpc>
+                <a:spcPct val="104000"/>
+              </a:lnSpc>
+              <a:buNone/>
+            </a:pPr>
+            <a:r>
+              <a:rPr lang="en-US" sz="1550" b="1" dirty="0">
+                <a:solidFill>
+                  <a:srgbClr val="000000"/>
+                </a:solidFill>
+                <a:latin typeface="Outfit Bold" pitchFamily="34" charset="0"/>
+                <a:ea typeface="Outfit Bold" pitchFamily="34" charset="-122"/>
+                <a:cs typeface="Outfit Bold" pitchFamily="34" charset="-120"/>
+              </a:rPr>
+              <a:t>End-to-End Pipeline Codebase</a:t>
+            </a:r>
+            <a:endParaRPr lang="en-US" sz="1550" dirty="0"/>
+          </a:p>
+        </p:txBody>
+      </p:sp>
+      <p:sp>
+        <p:nvSpPr>
+          <p:cNvPr id="23" name="Text 16"/>
+          <p:cNvSpPr/>
+          <p:nvPr/>
+        </p:nvSpPr>
+        <p:spPr>
+          <a:xfrm>
+            <a:off x="6598973" y="2774752"/>
+            <a:ext cx="2070445" cy="713184"/>
+          </a:xfrm>
+          <a:prstGeom prst="rect">
+            <a:avLst/>
+          </a:prstGeom>
+          <a:noFill/>
+          <a:ln/>
+        </p:spPr>
+        <p:txBody>
+          <a:bodyPr wrap="square" lIns="0" tIns="0" rIns="0" bIns="0" rtlCol="0" anchor="t">
+            <a:normAutofit/>
+          </a:bodyPr>
+          <a:lstStyle/>
+          <a:p>
+            <a:pPr marL="0" indent="0" algn="l">
+              <a:lnSpc>
+                <a:spcPct val="123000"/>
+              </a:lnSpc>
+              <a:buNone/>
+            </a:pPr>
+            <a:r>
+              <a:rPr lang="en-US" sz="1250" dirty="0">
+                <a:solidFill>
+                  <a:srgbClr val="000000"/>
+                </a:solidFill>
+                <a:latin typeface="Bitter" pitchFamily="34" charset="0"/>
+                <a:ea typeface="Bitter" pitchFamily="34" charset="-122"/>
+                <a:cs typeface="Bitter" pitchFamily="34" charset="-120"/>
+              </a:rPr>
+              <a:t>Modular Python repository integrating VRT, ResNet34 U-Net, and CrewAI</a:t>
+            </a:r>
+            <a:endParaRPr lang="en-US" sz="1250" dirty="0"/>
+          </a:p>
+        </p:txBody>
+      </p:sp>
+      <p:pic>
+        <p:nvPicPr>
+          <p:cNvPr id="24" name="Image 5" descr="preencoded.png"/>
+          <p:cNvPicPr>
+            <a:picLocks noChangeAspect="1"/>
+          </p:cNvPicPr>
+          <p:nvPr/>
+        </p:nvPicPr>
+        <p:blipFill>
+          <a:blip>
             <a:extLst>
               <a:ext uri="{96DAC541-7B7A-43D3-8B79-37D633B846F1}">
                 <asvg:svgBlip xmlns:asvg="http://schemas.microsoft.com/office/drawing/2016/SVG/main" r:embed="rId8"/>
@@ -9391,8 +9535,8 @@
         </p:blipFill>
         <p:spPr>
           <a:xfrm>
-            <a:off x="3348946" y="3804146"/>
-            <a:ext cx="2506004" cy="1948855"/>
+            <a:off x="8985621" y="1956495"/>
+            <a:ext cx="2506004" cy="1711127"/>
           </a:xfrm>
           <a:prstGeom prst="rect">
             <a:avLst/>
@@ -9401,13 +9545,13 @@
       </p:pic>
       <p:sp>
         <p:nvSpPr>
-          <p:cNvPr id="16" name="Text 10"/>
-          <p:cNvSpPr/>
-          <p:nvPr/>
-        </p:nvSpPr>
-        <p:spPr>
-          <a:xfrm>
-            <a:off x="3604825" y="3983831"/>
+          <p:cNvPr id="25" name="Text 17"/>
+          <p:cNvSpPr/>
+          <p:nvPr/>
+        </p:nvSpPr>
+        <p:spPr>
+          <a:xfrm>
+            <a:off x="9241499" y="2136180"/>
             <a:ext cx="2070445" cy="502047"/>
           </a:xfrm>
           <a:prstGeom prst="rect">
@@ -9422,7 +9566,7 @@
           </a:bodyPr>
           <a:lstStyle/>
           <a:p>
-            <a:pPr algn="l" indent="0" marL="0">
+            <a:pPr marL="0" indent="0" algn="l">
               <a:lnSpc>
                 <a:spcPct val="104000"/>
               </a:lnSpc>
@@ -9437,7 +9581,7 @@
                 <a:ea typeface="Outfit Bold" pitchFamily="34" charset="-122"/>
                 <a:cs typeface="Outfit Bold" pitchFamily="34" charset="-120"/>
               </a:rPr>
-              <a:t>Low-Latency Coordination</a:t>
+              <a:t>Fine-Tuned VLM Weights</a:t>
             </a:r>
             <a:endParaRPr lang="en-US" sz="1550" dirty="0"/>
           </a:p>
@@ -9445,14 +9589,14 @@
       </p:sp>
       <p:sp>
         <p:nvSpPr>
-          <p:cNvPr id="17" name="Text 11"/>
-          <p:cNvSpPr/>
-          <p:nvPr/>
-        </p:nvSpPr>
-        <p:spPr>
-          <a:xfrm>
-            <a:off x="3604825" y="4622403"/>
-            <a:ext cx="2070445" cy="950912"/>
+          <p:cNvPr id="26" name="Text 18"/>
+          <p:cNvSpPr/>
+          <p:nvPr/>
+        </p:nvSpPr>
+        <p:spPr>
+          <a:xfrm>
+            <a:off x="9241499" y="2774752"/>
+            <a:ext cx="2070445" cy="713184"/>
           </a:xfrm>
           <a:prstGeom prst="rect">
             <a:avLst/>
@@ -9466,7 +9610,7 @@
           </a:bodyPr>
           <a:lstStyle/>
           <a:p>
-            <a:pPr algn="l" indent="0" marL="0">
+            <a:pPr marL="0" indent="0" algn="l">
               <a:lnSpc>
                 <a:spcPct val="123000"/>
               </a:lnSpc>
@@ -9481,85 +9625,117 @@
                 <a:ea typeface="Bitter" pitchFamily="34" charset="-122"/>
                 <a:cs typeface="Bitter" pitchFamily="34" charset="-120"/>
               </a:rPr>
-              <a:t>Automated reasoning and multi-agent synthesis running within operational constraints</a:t>
+              <a:t>Specialized Qwen2.5-VL model weights optimized for disaster reasoning</a:t>
             </a:r>
             <a:endParaRPr lang="en-US" sz="1250" dirty="0"/>
           </a:p>
         </p:txBody>
       </p:sp>
-      <p:sp>
-        <p:nvSpPr>
-          <p:cNvPr id="18" name="Shape 12"/>
-          <p:cNvSpPr/>
-          <p:nvPr/>
-        </p:nvSpPr>
-        <p:spPr>
-          <a:xfrm>
-            <a:off x="6182463" y="1405334"/>
-            <a:ext cx="5469793" cy="4501257"/>
-          </a:xfrm>
-          <a:prstGeom prst="roundRect">
-            <a:avLst>
-              <a:gd name="adj" fmla="val 535"/>
-            </a:avLst>
-          </a:prstGeom>
-          <a:solidFill>
-            <a:srgbClr val="EAF9EE"/>
-          </a:solidFill>
-          <a:ln/>
-        </p:spPr>
-      </p:sp>
-      <p:sp>
-        <p:nvSpPr>
-          <p:cNvPr id="19" name="Shape 13"/>
-          <p:cNvSpPr/>
-          <p:nvPr/>
-        </p:nvSpPr>
-        <p:spPr>
-          <a:xfrm>
-            <a:off x="6343094" y="1558925"/>
-            <a:ext cx="1942853" cy="243979"/>
-          </a:xfrm>
-          <a:prstGeom prst="roundRect">
-            <a:avLst>
-              <a:gd name="adj" fmla="val 7902"/>
-            </a:avLst>
-          </a:prstGeom>
-          <a:solidFill>
-            <a:srgbClr val="E8EAE1"/>
-          </a:solidFill>
-          <a:ln/>
-        </p:spPr>
-      </p:sp>
-      <p:sp>
-        <p:nvSpPr>
-          <p:cNvPr id="20" name="Text 14"/>
-          <p:cNvSpPr/>
-          <p:nvPr/>
-        </p:nvSpPr>
-        <p:spPr>
-          <a:xfrm>
-            <a:off x="6439433" y="1607046"/>
-            <a:ext cx="2359760" cy="147737"/>
-          </a:xfrm>
-          <a:prstGeom prst="rect">
-            <a:avLst/>
-          </a:prstGeom>
-          <a:noFill/>
-          <a:ln/>
-        </p:spPr>
-        <p:txBody>
-          <a:bodyPr wrap="none" lIns="0" tIns="0" rIns="0" bIns="0" rtlCol="0" anchor="t"/>
-          <a:lstStyle/>
-          <a:p>
-            <a:pPr algn="l" indent="0" marL="0">
-              <a:lnSpc>
-                <a:spcPct val="96000"/>
-              </a:lnSpc>
-              <a:buNone/>
-            </a:pPr>
-            <a:r>
-              <a:rPr lang="en-US" sz="1000" dirty="0">
+      <p:pic>
+        <p:nvPicPr>
+          <p:cNvPr id="27" name="Image 6" descr="preencoded.png"/>
+          <p:cNvPicPr>
+            <a:picLocks noChangeAspect="1"/>
+          </p:cNvPicPr>
+          <p:nvPr/>
+        </p:nvPicPr>
+        <p:blipFill>
+          <a:blip>
+            <a:extLst>
+              <a:ext uri="{96DAC541-7B7A-43D3-8B79-37D633B846F1}">
+                <asvg:svgBlip xmlns:asvg="http://schemas.microsoft.com/office/drawing/2016/SVG/main" r:embed="rId9"/>
+              </a:ext>
+            </a:extLst>
+          </a:blip>
+          <a:stretch>
+            <a:fillRect/>
+          </a:stretch>
+        </p:blipFill>
+        <p:spPr>
+          <a:xfrm>
+            <a:off x="6343094" y="3804146"/>
+            <a:ext cx="2506004" cy="1948855"/>
+          </a:xfrm>
+          <a:prstGeom prst="rect">
+            <a:avLst/>
+          </a:prstGeom>
+        </p:spPr>
+      </p:pic>
+      <p:sp>
+        <p:nvSpPr>
+          <p:cNvPr id="28" name="Text 19"/>
+          <p:cNvSpPr/>
+          <p:nvPr/>
+        </p:nvSpPr>
+        <p:spPr>
+          <a:xfrm>
+            <a:off x="6598973" y="3983831"/>
+            <a:ext cx="2070445" cy="502047"/>
+          </a:xfrm>
+          <a:prstGeom prst="rect">
+            <a:avLst/>
+          </a:prstGeom>
+          <a:noFill/>
+          <a:ln/>
+        </p:spPr>
+        <p:txBody>
+          <a:bodyPr wrap="square" lIns="0" tIns="0" rIns="0" bIns="0" rtlCol="0" anchor="t">
+            <a:normAutofit/>
+          </a:bodyPr>
+          <a:lstStyle/>
+          <a:p>
+            <a:pPr marL="0" indent="0" algn="l">
+              <a:lnSpc>
+                <a:spcPct val="104000"/>
+              </a:lnSpc>
+              <a:buNone/>
+            </a:pPr>
+            <a:r>
+              <a:rPr lang="en-US" sz="1550" b="1" dirty="0">
+                <a:solidFill>
+                  <a:srgbClr val="000000"/>
+                </a:solidFill>
+                <a:latin typeface="Outfit Bold" pitchFamily="34" charset="0"/>
+                <a:ea typeface="Outfit Bold" pitchFamily="34" charset="-122"/>
+                <a:cs typeface="Outfit Bold" pitchFamily="34" charset="-120"/>
+              </a:rPr>
+              <a:t>Interactive Triage Dashboard</a:t>
+            </a:r>
+            <a:endParaRPr lang="en-US" sz="1550" dirty="0"/>
+          </a:p>
+        </p:txBody>
+      </p:sp>
+      <p:sp>
+        <p:nvSpPr>
+          <p:cNvPr id="29" name="Text 20"/>
+          <p:cNvSpPr/>
+          <p:nvPr/>
+        </p:nvSpPr>
+        <p:spPr>
+          <a:xfrm>
+            <a:off x="6598973" y="4622403"/>
+            <a:ext cx="2070445" cy="950912"/>
+          </a:xfrm>
+          <a:prstGeom prst="rect">
+            <a:avLst/>
+          </a:prstGeom>
+          <a:noFill/>
+          <a:ln/>
+        </p:spPr>
+        <p:txBody>
+          <a:bodyPr wrap="square" lIns="0" tIns="0" rIns="0" bIns="0" rtlCol="0" anchor="t">
+            <a:normAutofit/>
+          </a:bodyPr>
+          <a:lstStyle/>
+          <a:p>
+            <a:pPr marL="0" indent="0" algn="l">
+              <a:lnSpc>
+                <a:spcPct val="123000"/>
+              </a:lnSpc>
+              <a:buNone/>
+            </a:pPr>
+            <a:r>
+              <a:rPr lang="en-US" sz="1250" dirty="0">
                 <a:solidFill>
                   <a:srgbClr val="000000"/>
                 </a:solidFill>
@@ -9567,22 +9743,22 @@
                 <a:ea typeface="Bitter" pitchFamily="34" charset="-122"/>
                 <a:cs typeface="Bitter" pitchFamily="34" charset="-120"/>
               </a:rPr>
-              <a:t>KEY PROJECT DELIVERABLES</a:t>
-            </a:r>
-            <a:endParaRPr lang="en-US" sz="1000" dirty="0"/>
+              <a:t>User interface for rescue personnel to upload disaster imagery and get real time guidance.</a:t>
+            </a:r>
+            <a:endParaRPr lang="en-US" sz="1250" dirty="0"/>
           </a:p>
         </p:txBody>
       </p:sp>
       <p:pic>
         <p:nvPicPr>
-          <p:cNvPr id="21" name="Image 4" descr="preencoded.png">    </p:cNvPr>
+          <p:cNvPr id="30" name="Image 7" descr="preencoded.png"/>
           <p:cNvPicPr>
             <a:picLocks noChangeAspect="1"/>
           </p:cNvPicPr>
           <p:nvPr/>
         </p:nvPicPr>
         <p:blipFill>
-          <a:blip r:embed="rId9">
+          <a:blip>
             <a:extLst>
               <a:ext uri="{96DAC541-7B7A-43D3-8B79-37D633B846F1}">
                 <asvg:svgBlip xmlns:asvg="http://schemas.microsoft.com/office/drawing/2016/SVG/main" r:embed="rId10"/>
@@ -9595,8 +9771,8 @@
         </p:blipFill>
         <p:spPr>
           <a:xfrm>
-            <a:off x="6343094" y="1956495"/>
-            <a:ext cx="2506004" cy="1711127"/>
+            <a:off x="8985621" y="3804146"/>
+            <a:ext cx="2506004" cy="1948855"/>
           </a:xfrm>
           <a:prstGeom prst="rect">
             <a:avLst/>
@@ -9605,13 +9781,13 @@
       </p:pic>
       <p:sp>
         <p:nvSpPr>
-          <p:cNvPr id="22" name="Text 15"/>
-          <p:cNvSpPr/>
-          <p:nvPr/>
-        </p:nvSpPr>
-        <p:spPr>
-          <a:xfrm>
-            <a:off x="6598973" y="2136180"/>
+          <p:cNvPr id="31" name="Text 21"/>
+          <p:cNvSpPr/>
+          <p:nvPr/>
+        </p:nvSpPr>
+        <p:spPr>
+          <a:xfrm>
+            <a:off x="9241499" y="3983831"/>
             <a:ext cx="2070445" cy="502047"/>
           </a:xfrm>
           <a:prstGeom prst="rect">
@@ -9626,7 +9802,7 @@
           </a:bodyPr>
           <a:lstStyle/>
           <a:p>
-            <a:pPr algn="l" indent="0" marL="0">
+            <a:pPr marL="0" indent="0" algn="l">
               <a:lnSpc>
                 <a:spcPct val="104000"/>
               </a:lnSpc>
@@ -9641,7 +9817,7 @@
                 <a:ea typeface="Outfit Bold" pitchFamily="34" charset="-122"/>
                 <a:cs typeface="Outfit Bold" pitchFamily="34" charset="-120"/>
               </a:rPr>
-              <a:t>End-to-End Pipeline Codebase</a:t>
+              <a:t>Comprehensive Technical Report</a:t>
             </a:r>
             <a:endParaRPr lang="en-US" sz="1550" dirty="0"/>
           </a:p>
@@ -9649,14 +9825,14 @@
       </p:sp>
       <p:sp>
         <p:nvSpPr>
-          <p:cNvPr id="23" name="Text 16"/>
-          <p:cNvSpPr/>
-          <p:nvPr/>
-        </p:nvSpPr>
-        <p:spPr>
-          <a:xfrm>
-            <a:off x="6598973" y="2774752"/>
-            <a:ext cx="2070445" cy="713184"/>
+          <p:cNvPr id="32" name="Text 22"/>
+          <p:cNvSpPr/>
+          <p:nvPr/>
+        </p:nvSpPr>
+        <p:spPr>
+          <a:xfrm>
+            <a:off x="9241499" y="4622403"/>
+            <a:ext cx="2070445" cy="950912"/>
           </a:xfrm>
           <a:prstGeom prst="rect">
             <a:avLst/>
@@ -9670,361 +9846,7 @@
           </a:bodyPr>
           <a:lstStyle/>
           <a:p>
-            <a:pPr algn="l" indent="0" marL="0">
-              <a:lnSpc>
-                <a:spcPct val="123000"/>
-              </a:lnSpc>
-              <a:buNone/>
-            </a:pPr>
-            <a:r>
-              <a:rPr lang="en-US" sz="1250" dirty="0">
-                <a:solidFill>
-                  <a:srgbClr val="000000"/>
-                </a:solidFill>
-                <a:latin typeface="Bitter" pitchFamily="34" charset="0"/>
-                <a:ea typeface="Bitter" pitchFamily="34" charset="-122"/>
-                <a:cs typeface="Bitter" pitchFamily="34" charset="-120"/>
-              </a:rPr>
-              <a:t>Modular Python repository integrating VRT, ResNet34 U-Net, and CrewAI</a:t>
-            </a:r>
-            <a:endParaRPr lang="en-US" sz="1250" dirty="0"/>
-          </a:p>
-        </p:txBody>
-      </p:sp>
-      <p:pic>
-        <p:nvPicPr>
-          <p:cNvPr id="24" name="Image 5" descr="preencoded.png">    </p:cNvPr>
-          <p:cNvPicPr>
-            <a:picLocks noChangeAspect="1"/>
-          </p:cNvPicPr>
-          <p:nvPr/>
-        </p:nvPicPr>
-        <p:blipFill>
-          <a:blip r:embed="rId11">
-            <a:extLst>
-              <a:ext uri="{96DAC541-7B7A-43D3-8B79-37D633B846F1}">
-                <asvg:svgBlip xmlns:asvg="http://schemas.microsoft.com/office/drawing/2016/SVG/main" r:embed="rId12"/>
-              </a:ext>
-            </a:extLst>
-          </a:blip>
-          <a:stretch>
-            <a:fillRect/>
-          </a:stretch>
-        </p:blipFill>
-        <p:spPr>
-          <a:xfrm>
-            <a:off x="8985621" y="1956495"/>
-            <a:ext cx="2506004" cy="1711127"/>
-          </a:xfrm>
-          <a:prstGeom prst="rect">
-            <a:avLst/>
-          </a:prstGeom>
-        </p:spPr>
-      </p:pic>
-      <p:sp>
-        <p:nvSpPr>
-          <p:cNvPr id="25" name="Text 17"/>
-          <p:cNvSpPr/>
-          <p:nvPr/>
-        </p:nvSpPr>
-        <p:spPr>
-          <a:xfrm>
-            <a:off x="9241499" y="2136180"/>
-            <a:ext cx="2070445" cy="502047"/>
-          </a:xfrm>
-          <a:prstGeom prst="rect">
-            <a:avLst/>
-          </a:prstGeom>
-          <a:noFill/>
-          <a:ln/>
-        </p:spPr>
-        <p:txBody>
-          <a:bodyPr wrap="square" lIns="0" tIns="0" rIns="0" bIns="0" rtlCol="0" anchor="t">
-            <a:normAutofit/>
-          </a:bodyPr>
-          <a:lstStyle/>
-          <a:p>
-            <a:pPr algn="l" indent="0" marL="0">
-              <a:lnSpc>
-                <a:spcPct val="104000"/>
-              </a:lnSpc>
-              <a:buNone/>
-            </a:pPr>
-            <a:r>
-              <a:rPr lang="en-US" sz="1550" b="1" dirty="0">
-                <a:solidFill>
-                  <a:srgbClr val="000000"/>
-                </a:solidFill>
-                <a:latin typeface="Outfit Bold" pitchFamily="34" charset="0"/>
-                <a:ea typeface="Outfit Bold" pitchFamily="34" charset="-122"/>
-                <a:cs typeface="Outfit Bold" pitchFamily="34" charset="-120"/>
-              </a:rPr>
-              <a:t>Fine-Tuned VLM Weights</a:t>
-            </a:r>
-            <a:endParaRPr lang="en-US" sz="1550" dirty="0"/>
-          </a:p>
-        </p:txBody>
-      </p:sp>
-      <p:sp>
-        <p:nvSpPr>
-          <p:cNvPr id="26" name="Text 18"/>
-          <p:cNvSpPr/>
-          <p:nvPr/>
-        </p:nvSpPr>
-        <p:spPr>
-          <a:xfrm>
-            <a:off x="9241499" y="2774752"/>
-            <a:ext cx="2070445" cy="713184"/>
-          </a:xfrm>
-          <a:prstGeom prst="rect">
-            <a:avLst/>
-          </a:prstGeom>
-          <a:noFill/>
-          <a:ln/>
-        </p:spPr>
-        <p:txBody>
-          <a:bodyPr wrap="square" lIns="0" tIns="0" rIns="0" bIns="0" rtlCol="0" anchor="t">
-            <a:normAutofit/>
-          </a:bodyPr>
-          <a:lstStyle/>
-          <a:p>
-            <a:pPr algn="l" indent="0" marL="0">
-              <a:lnSpc>
-                <a:spcPct val="123000"/>
-              </a:lnSpc>
-              <a:buNone/>
-            </a:pPr>
-            <a:r>
-              <a:rPr lang="en-US" sz="1250" dirty="0">
-                <a:solidFill>
-                  <a:srgbClr val="000000"/>
-                </a:solidFill>
-                <a:latin typeface="Bitter" pitchFamily="34" charset="0"/>
-                <a:ea typeface="Bitter" pitchFamily="34" charset="-122"/>
-                <a:cs typeface="Bitter" pitchFamily="34" charset="-120"/>
-              </a:rPr>
-              <a:t>Specialized Qwen2.5-VL model weights optimized for disaster reasoning</a:t>
-            </a:r>
-            <a:endParaRPr lang="en-US" sz="1250" dirty="0"/>
-          </a:p>
-        </p:txBody>
-      </p:sp>
-      <p:pic>
-        <p:nvPicPr>
-          <p:cNvPr id="27" name="Image 6" descr="preencoded.png">    </p:cNvPr>
-          <p:cNvPicPr>
-            <a:picLocks noChangeAspect="1"/>
-          </p:cNvPicPr>
-          <p:nvPr/>
-        </p:nvPicPr>
-        <p:blipFill>
-          <a:blip r:embed="rId13">
-            <a:extLst>
-              <a:ext uri="{96DAC541-7B7A-43D3-8B79-37D633B846F1}">
-                <asvg:svgBlip xmlns:asvg="http://schemas.microsoft.com/office/drawing/2016/SVG/main" r:embed="rId14"/>
-              </a:ext>
-            </a:extLst>
-          </a:blip>
-          <a:stretch>
-            <a:fillRect/>
-          </a:stretch>
-        </p:blipFill>
-        <p:spPr>
-          <a:xfrm>
-            <a:off x="6343094" y="3804146"/>
-            <a:ext cx="2506004" cy="1948855"/>
-          </a:xfrm>
-          <a:prstGeom prst="rect">
-            <a:avLst/>
-          </a:prstGeom>
-        </p:spPr>
-      </p:pic>
-      <p:sp>
-        <p:nvSpPr>
-          <p:cNvPr id="28" name="Text 19"/>
-          <p:cNvSpPr/>
-          <p:nvPr/>
-        </p:nvSpPr>
-        <p:spPr>
-          <a:xfrm>
-            <a:off x="6598973" y="3983831"/>
-            <a:ext cx="2070445" cy="502047"/>
-          </a:xfrm>
-          <a:prstGeom prst="rect">
-            <a:avLst/>
-          </a:prstGeom>
-          <a:noFill/>
-          <a:ln/>
-        </p:spPr>
-        <p:txBody>
-          <a:bodyPr wrap="square" lIns="0" tIns="0" rIns="0" bIns="0" rtlCol="0" anchor="t">
-            <a:normAutofit/>
-          </a:bodyPr>
-          <a:lstStyle/>
-          <a:p>
-            <a:pPr algn="l" indent="0" marL="0">
-              <a:lnSpc>
-                <a:spcPct val="104000"/>
-              </a:lnSpc>
-              <a:buNone/>
-            </a:pPr>
-            <a:r>
-              <a:rPr lang="en-US" sz="1550" b="1" dirty="0">
-                <a:solidFill>
-                  <a:srgbClr val="000000"/>
-                </a:solidFill>
-                <a:latin typeface="Outfit Bold" pitchFamily="34" charset="0"/>
-                <a:ea typeface="Outfit Bold" pitchFamily="34" charset="-122"/>
-                <a:cs typeface="Outfit Bold" pitchFamily="34" charset="-120"/>
-              </a:rPr>
-              <a:t>Interactive Triage Dashboard</a:t>
-            </a:r>
-            <a:endParaRPr lang="en-US" sz="1550" dirty="0"/>
-          </a:p>
-        </p:txBody>
-      </p:sp>
-      <p:sp>
-        <p:nvSpPr>
-          <p:cNvPr id="29" name="Text 20"/>
-          <p:cNvSpPr/>
-          <p:nvPr/>
-        </p:nvSpPr>
-        <p:spPr>
-          <a:xfrm>
-            <a:off x="6598973" y="4622403"/>
-            <a:ext cx="2070445" cy="950912"/>
-          </a:xfrm>
-          <a:prstGeom prst="rect">
-            <a:avLst/>
-          </a:prstGeom>
-          <a:noFill/>
-          <a:ln/>
-        </p:spPr>
-        <p:txBody>
-          <a:bodyPr wrap="square" lIns="0" tIns="0" rIns="0" bIns="0" rtlCol="0" anchor="t">
-            <a:normAutofit/>
-          </a:bodyPr>
-          <a:lstStyle/>
-          <a:p>
-            <a:pPr algn="l" indent="0" marL="0">
-              <a:lnSpc>
-                <a:spcPct val="123000"/>
-              </a:lnSpc>
-              <a:buNone/>
-            </a:pPr>
-            <a:r>
-              <a:rPr lang="en-US" sz="1250" dirty="0">
-                <a:solidFill>
-                  <a:srgbClr val="000000"/>
-                </a:solidFill>
-                <a:latin typeface="Bitter" pitchFamily="34" charset="0"/>
-                <a:ea typeface="Bitter" pitchFamily="34" charset="-122"/>
-                <a:cs typeface="Bitter" pitchFamily="34" charset="-120"/>
-              </a:rPr>
-              <a:t>User interface for rescue personnel to upload disaster imagery and get real time guidance.</a:t>
-            </a:r>
-            <a:endParaRPr lang="en-US" sz="1250" dirty="0"/>
-          </a:p>
-        </p:txBody>
-      </p:sp>
-      <p:pic>
-        <p:nvPicPr>
-          <p:cNvPr id="30" name="Image 7" descr="preencoded.png">    </p:cNvPr>
-          <p:cNvPicPr>
-            <a:picLocks noChangeAspect="1"/>
-          </p:cNvPicPr>
-          <p:nvPr/>
-        </p:nvPicPr>
-        <p:blipFill>
-          <a:blip r:embed="rId15">
-            <a:extLst>
-              <a:ext uri="{96DAC541-7B7A-43D3-8B79-37D633B846F1}">
-                <asvg:svgBlip xmlns:asvg="http://schemas.microsoft.com/office/drawing/2016/SVG/main" r:embed="rId16"/>
-              </a:ext>
-            </a:extLst>
-          </a:blip>
-          <a:stretch>
-            <a:fillRect/>
-          </a:stretch>
-        </p:blipFill>
-        <p:spPr>
-          <a:xfrm>
-            <a:off x="8985621" y="3804146"/>
-            <a:ext cx="2506004" cy="1948855"/>
-          </a:xfrm>
-          <a:prstGeom prst="rect">
-            <a:avLst/>
-          </a:prstGeom>
-        </p:spPr>
-      </p:pic>
-      <p:sp>
-        <p:nvSpPr>
-          <p:cNvPr id="31" name="Text 21"/>
-          <p:cNvSpPr/>
-          <p:nvPr/>
-        </p:nvSpPr>
-        <p:spPr>
-          <a:xfrm>
-            <a:off x="9241499" y="3983831"/>
-            <a:ext cx="2070445" cy="502047"/>
-          </a:xfrm>
-          <a:prstGeom prst="rect">
-            <a:avLst/>
-          </a:prstGeom>
-          <a:noFill/>
-          <a:ln/>
-        </p:spPr>
-        <p:txBody>
-          <a:bodyPr wrap="square" lIns="0" tIns="0" rIns="0" bIns="0" rtlCol="0" anchor="t">
-            <a:normAutofit/>
-          </a:bodyPr>
-          <a:lstStyle/>
-          <a:p>
-            <a:pPr algn="l" indent="0" marL="0">
-              <a:lnSpc>
-                <a:spcPct val="104000"/>
-              </a:lnSpc>
-              <a:buNone/>
-            </a:pPr>
-            <a:r>
-              <a:rPr lang="en-US" sz="1550" b="1" dirty="0">
-                <a:solidFill>
-                  <a:srgbClr val="000000"/>
-                </a:solidFill>
-                <a:latin typeface="Outfit Bold" pitchFamily="34" charset="0"/>
-                <a:ea typeface="Outfit Bold" pitchFamily="34" charset="-122"/>
-                <a:cs typeface="Outfit Bold" pitchFamily="34" charset="-120"/>
-              </a:rPr>
-              <a:t>Comprehensive Technical Report</a:t>
-            </a:r>
-            <a:endParaRPr lang="en-US" sz="1550" dirty="0"/>
-          </a:p>
-        </p:txBody>
-      </p:sp>
-      <p:sp>
-        <p:nvSpPr>
-          <p:cNvPr id="32" name="Text 22"/>
-          <p:cNvSpPr/>
-          <p:nvPr/>
-        </p:nvSpPr>
-        <p:spPr>
-          <a:xfrm>
-            <a:off x="9241499" y="4622403"/>
-            <a:ext cx="2070445" cy="950912"/>
-          </a:xfrm>
-          <a:prstGeom prst="rect">
-            <a:avLst/>
-          </a:prstGeom>
-          <a:noFill/>
-          <a:ln/>
-        </p:spPr>
-        <p:txBody>
-          <a:bodyPr wrap="square" lIns="0" tIns="0" rIns="0" bIns="0" rtlCol="0" anchor="t">
-            <a:normAutofit/>
-          </a:bodyPr>
-          <a:lstStyle/>
-          <a:p>
-            <a:pPr algn="l" indent="0" marL="0">
+            <a:pPr marL="0" indent="0" algn="l">
               <a:lnSpc>
                 <a:spcPct val="123000"/>
               </a:lnSpc>
@@ -10068,6 +9890,13 @@
           </a:solidFill>
           <a:ln/>
         </p:spPr>
+        <p:txBody>
+          <a:bodyPr/>
+          <a:lstStyle/>
+          <a:p>
+            <a:endParaRPr lang="en-US"/>
+          </a:p>
+        </p:txBody>
       </p:sp>
     </p:spTree>
   </p:cSld>
@@ -10115,7 +9944,7 @@
           <a:bodyPr wrap="none" lIns="0" tIns="0" rIns="0" bIns="0" rtlCol="0" anchor="t"/>
           <a:lstStyle/>
           <a:p>
-            <a:pPr algn="l" indent="0" marL="0">
+            <a:pPr marL="0" indent="0" algn="l">
               <a:lnSpc>
                 <a:spcPct val="104000"/>
               </a:lnSpc>
@@ -10157,6 +9986,13 @@
           </a:solidFill>
           <a:ln/>
         </p:spPr>
+        <p:txBody>
+          <a:bodyPr/>
+          <a:lstStyle/>
+          <a:p>
+            <a:endParaRPr lang="en-US"/>
+          </a:p>
+        </p:txBody>
       </p:sp>
       <p:sp>
         <p:nvSpPr>
@@ -10179,6 +10015,13 @@
           </a:solidFill>
           <a:ln/>
         </p:spPr>
+        <p:txBody>
+          <a:bodyPr/>
+          <a:lstStyle/>
+          <a:p>
+            <a:endParaRPr lang="en-US"/>
+          </a:p>
+        </p:txBody>
       </p:sp>
       <p:sp>
         <p:nvSpPr>
@@ -10201,6 +10044,13 @@
           </a:solidFill>
           <a:ln/>
         </p:spPr>
+        <p:txBody>
+          <a:bodyPr/>
+          <a:lstStyle/>
+          <a:p>
+            <a:endParaRPr lang="en-US"/>
+          </a:p>
+        </p:txBody>
       </p:sp>
       <p:sp>
         <p:nvSpPr>
@@ -10223,7 +10073,7 @@
           <a:bodyPr wrap="none" lIns="0" tIns="0" rIns="0" bIns="0" rtlCol="0" anchor="ctr"/>
           <a:lstStyle/>
           <a:p>
-            <a:pPr algn="ctr" indent="0" marL="0">
+            <a:pPr marL="0" indent="0" algn="ctr">
               <a:lnSpc>
                 <a:spcPct val="100000"/>
               </a:lnSpc>
@@ -10265,7 +10115,7 @@
           <a:bodyPr wrap="none" lIns="0" tIns="0" rIns="0" bIns="0" rtlCol="0" anchor="t"/>
           <a:lstStyle/>
           <a:p>
-            <a:pPr algn="ctr" indent="0" marL="0">
+            <a:pPr marL="0" indent="0" algn="ctr">
               <a:lnSpc>
                 <a:spcPct val="104000"/>
               </a:lnSpc>
@@ -10307,7 +10157,7 @@
           <a:bodyPr wrap="none" lIns="0" tIns="0" rIns="0" bIns="0" rtlCol="0" anchor="t"/>
           <a:lstStyle/>
           <a:p>
-            <a:pPr algn="ctr" indent="0" marL="0">
+            <a:pPr marL="0" indent="0" algn="ctr">
               <a:lnSpc>
                 <a:spcPct val="117000"/>
               </a:lnSpc>
@@ -10351,7 +10201,7 @@
           </a:bodyPr>
           <a:lstStyle/>
           <a:p>
-            <a:pPr algn="l" marL="223520" indent="-223520">
+            <a:pPr marL="223520" indent="-223520" algn="l">
               <a:lnSpc>
                 <a:spcPct val="117000"/>
               </a:lnSpc>
@@ -10372,7 +10222,7 @@
             <a:endParaRPr lang="en-US" sz="1100" dirty="0"/>
           </a:p>
           <a:p>
-            <a:pPr algn="l" marL="223520" indent="-223520">
+            <a:pPr marL="223520" indent="-223520" algn="l">
               <a:lnSpc>
                 <a:spcPct val="117000"/>
               </a:lnSpc>
@@ -10393,7 +10243,7 @@
             <a:endParaRPr lang="en-US" sz="1100" dirty="0"/>
           </a:p>
           <a:p>
-            <a:pPr algn="l" marL="223520" indent="-223520">
+            <a:pPr marL="223520" indent="-223520" algn="l">
               <a:lnSpc>
                 <a:spcPct val="117000"/>
               </a:lnSpc>
@@ -10436,6 +10286,13 @@
           </a:solidFill>
           <a:ln/>
         </p:spPr>
+        <p:txBody>
+          <a:bodyPr/>
+          <a:lstStyle/>
+          <a:p>
+            <a:endParaRPr lang="en-US"/>
+          </a:p>
+        </p:txBody>
       </p:sp>
       <p:sp>
         <p:nvSpPr>
@@ -10458,6 +10315,13 @@
           </a:solidFill>
           <a:ln/>
         </p:spPr>
+        <p:txBody>
+          <a:bodyPr/>
+          <a:lstStyle/>
+          <a:p>
+            <a:endParaRPr lang="en-US"/>
+          </a:p>
+        </p:txBody>
       </p:sp>
       <p:sp>
         <p:nvSpPr>
@@ -10480,7 +10344,7 @@
           <a:bodyPr wrap="none" lIns="0" tIns="0" rIns="0" bIns="0" rtlCol="0" anchor="ctr"/>
           <a:lstStyle/>
           <a:p>
-            <a:pPr algn="ctr" indent="0" marL="0">
+            <a:pPr marL="0" indent="0" algn="ctr">
               <a:lnSpc>
                 <a:spcPct val="100000"/>
               </a:lnSpc>
@@ -10522,7 +10386,7 @@
           <a:bodyPr wrap="none" lIns="0" tIns="0" rIns="0" bIns="0" rtlCol="0" anchor="t"/>
           <a:lstStyle/>
           <a:p>
-            <a:pPr algn="ctr" indent="0" marL="0">
+            <a:pPr marL="0" indent="0" algn="ctr">
               <a:lnSpc>
                 <a:spcPct val="104000"/>
               </a:lnSpc>
@@ -10564,7 +10428,7 @@
           <a:bodyPr wrap="none" lIns="0" tIns="0" rIns="0" bIns="0" rtlCol="0" anchor="t"/>
           <a:lstStyle/>
           <a:p>
-            <a:pPr algn="ctr" indent="0" marL="0">
+            <a:pPr marL="0" indent="0" algn="ctr">
               <a:lnSpc>
                 <a:spcPct val="117000"/>
               </a:lnSpc>
@@ -10608,7 +10472,7 @@
           </a:bodyPr>
           <a:lstStyle/>
           <a:p>
-            <a:pPr algn="l" marL="223520" indent="-223520">
+            <a:pPr marL="223520" indent="-223520" algn="l">
               <a:lnSpc>
                 <a:spcPct val="117000"/>
               </a:lnSpc>
@@ -10629,7 +10493,7 @@
             <a:endParaRPr lang="en-US" sz="1100" dirty="0"/>
           </a:p>
           <a:p>
-            <a:pPr algn="l" marL="223520" indent="-223520">
+            <a:pPr marL="223520" indent="-223520" algn="l">
               <a:lnSpc>
                 <a:spcPct val="117000"/>
               </a:lnSpc>
@@ -10650,7 +10514,7 @@
             <a:endParaRPr lang="en-US" sz="1100" dirty="0"/>
           </a:p>
           <a:p>
-            <a:pPr algn="l" marL="223520" indent="-223520">
+            <a:pPr marL="223520" indent="-223520" algn="l">
               <a:lnSpc>
                 <a:spcPct val="117000"/>
               </a:lnSpc>
@@ -10693,6 +10557,13 @@
           </a:solidFill>
           <a:ln/>
         </p:spPr>
+        <p:txBody>
+          <a:bodyPr/>
+          <a:lstStyle/>
+          <a:p>
+            <a:endParaRPr lang="en-US"/>
+          </a:p>
+        </p:txBody>
       </p:sp>
       <p:sp>
         <p:nvSpPr>
@@ -10715,6 +10586,13 @@
           </a:solidFill>
           <a:ln/>
         </p:spPr>
+        <p:txBody>
+          <a:bodyPr/>
+          <a:lstStyle/>
+          <a:p>
+            <a:endParaRPr lang="en-US"/>
+          </a:p>
+        </p:txBody>
       </p:sp>
       <p:sp>
         <p:nvSpPr>
@@ -10737,7 +10615,7 @@
           <a:bodyPr wrap="none" lIns="0" tIns="0" rIns="0" bIns="0" rtlCol="0" anchor="ctr"/>
           <a:lstStyle/>
           <a:p>
-            <a:pPr algn="ctr" indent="0" marL="0">
+            <a:pPr marL="0" indent="0" algn="ctr">
               <a:lnSpc>
                 <a:spcPct val="100000"/>
               </a:lnSpc>
@@ -10779,7 +10657,7 @@
           <a:bodyPr wrap="none" lIns="0" tIns="0" rIns="0" bIns="0" rtlCol="0" anchor="t"/>
           <a:lstStyle/>
           <a:p>
-            <a:pPr algn="ctr" indent="0" marL="0">
+            <a:pPr marL="0" indent="0" algn="ctr">
               <a:lnSpc>
                 <a:spcPct val="104000"/>
               </a:lnSpc>
@@ -10821,7 +10699,7 @@
           <a:bodyPr wrap="none" lIns="0" tIns="0" rIns="0" bIns="0" rtlCol="0" anchor="t"/>
           <a:lstStyle/>
           <a:p>
-            <a:pPr algn="ctr" indent="0" marL="0">
+            <a:pPr marL="0" indent="0" algn="ctr">
               <a:lnSpc>
                 <a:spcPct val="117000"/>
               </a:lnSpc>
@@ -10865,7 +10743,7 @@
           </a:bodyPr>
           <a:lstStyle/>
           <a:p>
-            <a:pPr algn="l" marL="223520" indent="-223520">
+            <a:pPr marL="223520" indent="-223520" algn="l">
               <a:lnSpc>
                 <a:spcPct val="117000"/>
               </a:lnSpc>
@@ -10886,7 +10764,7 @@
             <a:endParaRPr lang="en-US" sz="1100" dirty="0"/>
           </a:p>
           <a:p>
-            <a:pPr algn="l" marL="223520" indent="-223520">
+            <a:pPr marL="223520" indent="-223520" algn="l">
               <a:lnSpc>
                 <a:spcPct val="117000"/>
               </a:lnSpc>
@@ -10907,7 +10785,7 @@
             <a:endParaRPr lang="en-US" sz="1100" dirty="0"/>
           </a:p>
           <a:p>
-            <a:pPr algn="l" marL="223520" indent="-223520">
+            <a:pPr marL="223520" indent="-223520" algn="l">
               <a:lnSpc>
                 <a:spcPct val="117000"/>
               </a:lnSpc>
@@ -10950,6 +10828,13 @@
           </a:solidFill>
           <a:ln/>
         </p:spPr>
+        <p:txBody>
+          <a:bodyPr/>
+          <a:lstStyle/>
+          <a:p>
+            <a:endParaRPr lang="en-US"/>
+          </a:p>
+        </p:txBody>
       </p:sp>
       <p:sp>
         <p:nvSpPr>
@@ -10972,6 +10857,13 @@
           </a:solidFill>
           <a:ln/>
         </p:spPr>
+        <p:txBody>
+          <a:bodyPr/>
+          <a:lstStyle/>
+          <a:p>
+            <a:endParaRPr lang="en-US"/>
+          </a:p>
+        </p:txBody>
       </p:sp>
       <p:sp>
         <p:nvSpPr>
@@ -10994,7 +10886,7 @@
           <a:bodyPr wrap="none" lIns="0" tIns="0" rIns="0" bIns="0" rtlCol="0" anchor="ctr"/>
           <a:lstStyle/>
           <a:p>
-            <a:pPr algn="ctr" indent="0" marL="0">
+            <a:pPr marL="0" indent="0" algn="ctr">
               <a:lnSpc>
                 <a:spcPct val="100000"/>
               </a:lnSpc>
@@ -11036,7 +10928,7 @@
           <a:bodyPr wrap="none" lIns="0" tIns="0" rIns="0" bIns="0" rtlCol="0" anchor="t"/>
           <a:lstStyle/>
           <a:p>
-            <a:pPr algn="ctr" indent="0" marL="0">
+            <a:pPr marL="0" indent="0" algn="ctr">
               <a:lnSpc>
                 <a:spcPct val="104000"/>
               </a:lnSpc>
@@ -11078,7 +10970,7 @@
           <a:bodyPr wrap="none" lIns="0" tIns="0" rIns="0" bIns="0" rtlCol="0" anchor="t"/>
           <a:lstStyle/>
           <a:p>
-            <a:pPr algn="ctr" indent="0" marL="0">
+            <a:pPr marL="0" indent="0" algn="ctr">
               <a:lnSpc>
                 <a:spcPct val="117000"/>
               </a:lnSpc>
@@ -11122,7 +11014,7 @@
           </a:bodyPr>
           <a:lstStyle/>
           <a:p>
-            <a:pPr algn="l" marL="223520" indent="-223520">
+            <a:pPr marL="223520" indent="-223520" algn="l">
               <a:lnSpc>
                 <a:spcPct val="117000"/>
               </a:lnSpc>
@@ -11143,7 +11035,7 @@
             <a:endParaRPr lang="en-US" sz="1100" dirty="0"/>
           </a:p>
           <a:p>
-            <a:pPr algn="l" marL="223520" indent="-223520">
+            <a:pPr marL="223520" indent="-223520" algn="l">
               <a:lnSpc>
                 <a:spcPct val="117000"/>
               </a:lnSpc>
@@ -11164,7 +11056,7 @@
             <a:endParaRPr lang="en-US" sz="1100" dirty="0"/>
           </a:p>
           <a:p>
-            <a:pPr algn="l" marL="223520" indent="-223520">
+            <a:pPr marL="223520" indent="-223520" algn="l">
               <a:lnSpc>
                 <a:spcPct val="117000"/>
               </a:lnSpc>
@@ -11186,1340 +11078,6 @@
           </a:p>
         </p:txBody>
       </p:sp>
-    </p:spTree>
-  </p:cSld>
-  <p:clrMapOvr>
-    <a:masterClrMapping/>
-  </p:clrMapOvr>
-</p:sld>
-</file>
-
-<file path=ppt/slides/slide18.xml><?xml version="1.0" encoding="utf-8"?>
-<p:sld xmlns:a="http://schemas.openxmlformats.org/drawingml/2006/main" xmlns:r="http://schemas.openxmlformats.org/officeDocument/2006/relationships" xmlns:p="http://schemas.openxmlformats.org/presentationml/2006/main">
-  <p:cSld name="Slide 18">
-    <p:spTree>
-      <p:nvGrpSpPr>
-        <p:cNvPr id="1" name=""/>
-        <p:cNvGrpSpPr/>
-        <p:nvPr/>
-      </p:nvGrpSpPr>
-      <p:grpSpPr>
-        <a:xfrm>
-          <a:off x="0" y="0"/>
-          <a:ext cx="0" cy="0"/>
-          <a:chOff x="0" y="0"/>
-          <a:chExt cx="0" cy="0"/>
-        </a:xfrm>
-      </p:grpSpPr>
-      <p:sp>
-        <p:nvSpPr>
-          <p:cNvPr id="2" name="Text 0"/>
-          <p:cNvSpPr/>
-          <p:nvPr/>
-        </p:nvSpPr>
-        <p:spPr>
-          <a:xfrm>
-            <a:off x="661475" y="1296591"/>
-            <a:ext cx="10868745" cy="590649"/>
-          </a:xfrm>
-          <a:prstGeom prst="rect">
-            <a:avLst/>
-          </a:prstGeom>
-          <a:noFill/>
-          <a:ln/>
-        </p:spPr>
-        <p:txBody>
-          <a:bodyPr wrap="none" lIns="0" tIns="0" rIns="0" bIns="0" rtlCol="0" anchor="t"/>
-          <a:lstStyle/>
-          <a:p>
-            <a:pPr algn="l" indent="0" marL="0">
-              <a:lnSpc>
-                <a:spcPct val="104000"/>
-              </a:lnSpc>
-              <a:buNone/>
-            </a:pPr>
-            <a:r>
-              <a:rPr lang="en-US" sz="3700" b="1" dirty="0">
-                <a:solidFill>
-                  <a:srgbClr val="E1E5CD"/>
-                </a:solidFill>
-                <a:latin typeface="Outfit Bold" pitchFamily="34" charset="0"/>
-                <a:ea typeface="Outfit Bold" pitchFamily="34" charset="-122"/>
-                <a:cs typeface="Outfit Bold" pitchFamily="34" charset="-120"/>
-              </a:rPr>
-              <a:t>Team Contributions</a:t>
-            </a:r>
-            <a:endParaRPr lang="en-US" sz="3700" dirty="0"/>
-          </a:p>
-        </p:txBody>
-      </p:sp>
-      <p:graphicFrame>
-        <p:nvGraphicFramePr>
-          <p:cNvPr id="19" name="Table 0"/>
-          <p:cNvGraphicFramePr>
-            <a:graphicFrameLocks noGrp="1"/>
-          </p:cNvGraphicFramePr>
-          <p:nvPr>
-            <p:extLst>
-              <p:ext uri="{D42A27DB-BD31-4B8C-83A1-F6EECF244321}">
-                <p14:modId xmlns:p14="http://schemas.microsoft.com/office/powerpoint/2010/main" val="1579011935"/>
-              </p:ext>
-            </p:extLst>
-          </p:nvPr>
-        </p:nvGraphicFramePr>
-        <p:xfrm>
-          <a:off x="661475" y="2265263"/>
-          <a:ext cx="9143771" cy="914400"/>
-        </p:xfrm>
-        <a:graphic>
-          <a:graphicData uri="http://schemas.openxmlformats.org/drawingml/2006/table">
-            <a:tbl>
-              <a:tblPr/>
-              <a:tblGrid>
-                <a:gridCol w="4782248"/>
-                <a:gridCol w="2391124"/>
-                <a:gridCol w="3695373"/>
-              </a:tblGrid>
-              <a:tr h="545094">
-                <a:tc>
-                  <a:txBody>
-                    <a:bodyPr/>
-                    <a:lstStyle/>
-                    <a:p>
-                      <a:pPr indent="0" marL="0">
-                        <a:buNone/>
-                      </a:pPr>
-                      <a:r>
-                        <a:rPr lang="en-US" sz="1450" b="1" dirty="0">
-                          <a:solidFill>
-                            <a:srgbClr val="C2C4B5"/>
-                          </a:solidFill>
-                          <a:latin typeface="Bitter" pitchFamily="34" charset="0"/>
-                          <a:ea typeface="Bitter" pitchFamily="34" charset="-122"/>
-                          <a:cs typeface="Bitter" pitchFamily="34" charset="-120"/>
-                        </a:rPr>
-                        <a:t>Name</a:t>
-                      </a:r>
-                      <a:endParaRPr lang="en-US" sz="1450" dirty="0">
-                        <a:latin typeface="Bitter" charset="0"/>
-                        <a:ea typeface="Bitter" charset="0"/>
-                        <a:cs typeface="Bitter" charset="0"/>
-                      </a:endParaRPr>
-                    </a:p>
-                  </a:txBody>
-                  <a:tcPr marL="189018" marR="189018" marT="6350" marB="6350" anchor="ctr">
-                    <a:lnL w="12700" cap="flat" cmpd="sng" algn="ctr">
-                      <a:solidFill>
-                        <a:srgbClr val="525355"/>
-                      </a:solidFill>
-                      <a:prstDash val="solid"/>
-                      <a:round/>
-                      <a:headEnd type="none" w="med" len="med"/>
-                      <a:tailEnd type="none" w="med" len="med"/>
-                    </a:lnL>
-                    <a:lnR w="12700" cap="flat" cmpd="sng" algn="ctr">
-                      <a:solidFill>
-                        <a:srgbClr val="525355"/>
-                      </a:solidFill>
-                      <a:prstDash val="solid"/>
-                      <a:round/>
-                      <a:headEnd type="none" w="med" len="med"/>
-                      <a:tailEnd type="none" w="med" len="med"/>
-                    </a:lnR>
-                    <a:lnT w="12700" cap="flat" cmpd="sng" algn="ctr">
-                      <a:solidFill>
-                        <a:srgbClr val="525355"/>
-                      </a:solidFill>
-                      <a:prstDash val="solid"/>
-                      <a:round/>
-                      <a:headEnd type="none" w="med" len="med"/>
-                      <a:tailEnd type="none" w="med" len="med"/>
-                    </a:lnT>
-                    <a:lnB w="12700" cap="flat" cmpd="sng" algn="ctr">
-                      <a:solidFill>
-                        <a:srgbClr val="525355"/>
-                      </a:solidFill>
-                      <a:prstDash val="solid"/>
-                      <a:round/>
-                      <a:headEnd type="none" w="med" len="med"/>
-                      <a:tailEnd type="none" w="med" len="med"/>
-                    </a:lnB>
-                    <a:solidFill>
-                      <a:srgbClr val="1C1D1F"/>
-                    </a:solidFill>
-                  </a:tcPr>
-                </a:tc>
-                <a:tc>
-                  <a:txBody>
-                    <a:bodyPr/>
-                    <a:lstStyle/>
-                    <a:p>
-                      <a:pPr indent="0" marL="0">
-                        <a:buNone/>
-                      </a:pPr>
-                      <a:r>
-                        <a:rPr lang="en-US" sz="1450" b="1" dirty="0">
-                          <a:solidFill>
-                            <a:srgbClr val="C2C4B5"/>
-                          </a:solidFill>
-                          <a:latin typeface="Bitter" pitchFamily="34" charset="0"/>
-                          <a:ea typeface="Bitter" pitchFamily="34" charset="-122"/>
-                          <a:cs typeface="Bitter" pitchFamily="34" charset="-120"/>
-                        </a:rPr>
-                        <a:t>ID</a:t>
-                      </a:r>
-                      <a:endParaRPr lang="en-US" sz="1450" dirty="0">
-                        <a:latin typeface="Bitter" charset="0"/>
-                        <a:ea typeface="Bitter" charset="0"/>
-                        <a:cs typeface="Bitter" charset="0"/>
-                      </a:endParaRPr>
-                    </a:p>
-                  </a:txBody>
-                  <a:tcPr marL="189018" marR="189018" marT="6350" marB="6350" anchor="ctr">
-                    <a:lnL w="12700" cap="flat" cmpd="sng" algn="ctr">
-                      <a:solidFill>
-                        <a:srgbClr val="525355"/>
-                      </a:solidFill>
-                      <a:prstDash val="solid"/>
-                      <a:round/>
-                      <a:headEnd type="none" w="med" len="med"/>
-                      <a:tailEnd type="none" w="med" len="med"/>
-                    </a:lnL>
-                    <a:lnR w="12700" cap="flat" cmpd="sng" algn="ctr">
-                      <a:solidFill>
-                        <a:srgbClr val="525355"/>
-                      </a:solidFill>
-                      <a:prstDash val="solid"/>
-                      <a:round/>
-                      <a:headEnd type="none" w="med" len="med"/>
-                      <a:tailEnd type="none" w="med" len="med"/>
-                    </a:lnR>
-                    <a:lnT w="12700" cap="flat" cmpd="sng" algn="ctr">
-                      <a:solidFill>
-                        <a:srgbClr val="525355"/>
-                      </a:solidFill>
-                      <a:prstDash val="solid"/>
-                      <a:round/>
-                      <a:headEnd type="none" w="med" len="med"/>
-                      <a:tailEnd type="none" w="med" len="med"/>
-                    </a:lnT>
-                    <a:lnB w="12700" cap="flat" cmpd="sng" algn="ctr">
-                      <a:solidFill>
-                        <a:srgbClr val="525355"/>
-                      </a:solidFill>
-                      <a:prstDash val="solid"/>
-                      <a:round/>
-                      <a:headEnd type="none" w="med" len="med"/>
-                      <a:tailEnd type="none" w="med" len="med"/>
-                    </a:lnB>
-                    <a:solidFill>
-                      <a:srgbClr val="1C1D1F"/>
-                    </a:solidFill>
-                  </a:tcPr>
-                </a:tc>
-                <a:tc>
-                  <a:txBody>
-                    <a:bodyPr/>
-                    <a:lstStyle/>
-                    <a:p>
-                      <a:pPr indent="0" marL="0">
-                        <a:buNone/>
-                      </a:pPr>
-                      <a:r>
-                        <a:rPr lang="en-US" sz="1450" b="1" dirty="0">
-                          <a:solidFill>
-                            <a:srgbClr val="C2C4B5"/>
-                          </a:solidFill>
-                          <a:latin typeface="Bitter" pitchFamily="34" charset="0"/>
-                          <a:ea typeface="Bitter" pitchFamily="34" charset="-122"/>
-                          <a:cs typeface="Bitter" pitchFamily="34" charset="-120"/>
-                        </a:rPr>
-                        <a:t>Role/Contribution</a:t>
-                      </a:r>
-                      <a:endParaRPr lang="en-US" sz="1450" dirty="0">
-                        <a:latin typeface="Bitter" charset="0"/>
-                        <a:ea typeface="Bitter" charset="0"/>
-                        <a:cs typeface="Bitter" charset="0"/>
-                      </a:endParaRPr>
-                    </a:p>
-                  </a:txBody>
-                  <a:tcPr marL="189018" marR="189018" marT="6350" marB="6350" anchor="ctr">
-                    <a:lnL w="12700" cap="flat" cmpd="sng" algn="ctr">
-                      <a:solidFill>
-                        <a:srgbClr val="525355"/>
-                      </a:solidFill>
-                      <a:prstDash val="solid"/>
-                      <a:round/>
-                      <a:headEnd type="none" w="med" len="med"/>
-                      <a:tailEnd type="none" w="med" len="med"/>
-                    </a:lnL>
-                    <a:lnR w="12700" cap="flat" cmpd="sng" algn="ctr">
-                      <a:solidFill>
-                        <a:srgbClr val="525355"/>
-                      </a:solidFill>
-                      <a:prstDash val="solid"/>
-                      <a:round/>
-                      <a:headEnd type="none" w="med" len="med"/>
-                      <a:tailEnd type="none" w="med" len="med"/>
-                    </a:lnR>
-                    <a:lnT w="12700" cap="flat" cmpd="sng" algn="ctr">
-                      <a:solidFill>
-                        <a:srgbClr val="525355"/>
-                      </a:solidFill>
-                      <a:prstDash val="solid"/>
-                      <a:round/>
-                      <a:headEnd type="none" w="med" len="med"/>
-                      <a:tailEnd type="none" w="med" len="med"/>
-                    </a:lnT>
-                    <a:lnB w="12700" cap="flat" cmpd="sng" algn="ctr">
-                      <a:solidFill>
-                        <a:srgbClr val="525355"/>
-                      </a:solidFill>
-                      <a:prstDash val="solid"/>
-                      <a:round/>
-                      <a:headEnd type="none" w="med" len="med"/>
-                      <a:tailEnd type="none" w="med" len="med"/>
-                    </a:lnB>
-                    <a:solidFill>
-                      <a:srgbClr val="1C1D1F"/>
-                    </a:solidFill>
-                  </a:tcPr>
-                </a:tc>
-              </a:tr>
-              <a:tr h="548269">
-                <a:tc>
-                  <a:txBody>
-                    <a:bodyPr/>
-                    <a:lstStyle/>
-                    <a:p>
-                      <a:pPr indent="0" marL="0">
-                        <a:buNone/>
-                      </a:pPr>
-                      <a:r>
-                        <a:rPr lang="en-US" sz="1450" b="1" dirty="0">
-                          <a:solidFill>
-                            <a:srgbClr val="C2C4B5"/>
-                          </a:solidFill>
-                          <a:latin typeface="Bitter" pitchFamily="34" charset="0"/>
-                          <a:ea typeface="Bitter" pitchFamily="34" charset="-122"/>
-                          <a:cs typeface="Bitter" pitchFamily="34" charset="-120"/>
-                        </a:rPr>
-                        <a:t>Abdullah Al Noman</a:t>
-                      </a:r>
-                      <a:endParaRPr lang="en-US" sz="1450" dirty="0">
-                        <a:latin typeface="Bitter" charset="0"/>
-                        <a:ea typeface="Bitter" charset="0"/>
-                        <a:cs typeface="Bitter" charset="0"/>
-                      </a:endParaRPr>
-                    </a:p>
-                  </a:txBody>
-                  <a:tcPr marL="189018" marR="189018" marT="6350" marB="6350" anchor="ctr">
-                    <a:lnL w="12700" cap="flat" cmpd="sng" algn="ctr">
-                      <a:solidFill>
-                        <a:srgbClr val="525355"/>
-                      </a:solidFill>
-                      <a:prstDash val="solid"/>
-                      <a:round/>
-                      <a:headEnd type="none" w="med" len="med"/>
-                      <a:tailEnd type="none" w="med" len="med"/>
-                    </a:lnL>
-                    <a:lnR w="12700" cap="flat" cmpd="sng" algn="ctr">
-                      <a:solidFill>
-                        <a:srgbClr val="525355"/>
-                      </a:solidFill>
-                      <a:prstDash val="solid"/>
-                      <a:round/>
-                      <a:headEnd type="none" w="med" len="med"/>
-                      <a:tailEnd type="none" w="med" len="med"/>
-                    </a:lnR>
-                    <a:lnT w="12700" cap="flat" cmpd="sng" algn="ctr">
-                      <a:solidFill>
-                        <a:srgbClr val="525355"/>
-                      </a:solidFill>
-                      <a:prstDash val="solid"/>
-                      <a:round/>
-                      <a:headEnd type="none" w="med" len="med"/>
-                      <a:tailEnd type="none" w="med" len="med"/>
-                    </a:lnT>
-                    <a:lnB w="12700" cap="flat" cmpd="sng" algn="ctr">
-                      <a:solidFill>
-                        <a:srgbClr val="525355"/>
-                      </a:solidFill>
-                      <a:prstDash val="solid"/>
-                      <a:round/>
-                      <a:headEnd type="none" w="med" len="med"/>
-                      <a:tailEnd type="none" w="med" len="med"/>
-                    </a:lnB>
-                    <a:solidFill>
-                      <a:srgbClr val="1C1D1F"/>
-                    </a:solidFill>
-                  </a:tcPr>
-                </a:tc>
-                <a:tc>
-                  <a:txBody>
-                    <a:bodyPr/>
-                    <a:lstStyle/>
-                    <a:p>
-                      <a:pPr indent="0" marL="0">
-                        <a:buNone/>
-                      </a:pPr>
-                      <a:r>
-                        <a:rPr lang="en-US" sz="1450" dirty="0">
-                          <a:solidFill>
-                            <a:srgbClr val="C2C4B5"/>
-                          </a:solidFill>
-                          <a:latin typeface="Bitter" pitchFamily="34" charset="0"/>
-                          <a:ea typeface="Bitter" pitchFamily="34" charset="-122"/>
-                          <a:cs typeface="Bitter" pitchFamily="34" charset="-120"/>
-                        </a:rPr>
-                        <a:t>2022095042</a:t>
-                      </a:r>
-                      <a:endParaRPr lang="en-US" sz="1450" dirty="0">
-                        <a:latin typeface="Bitter" charset="0"/>
-                        <a:ea typeface="Bitter" charset="0"/>
-                        <a:cs typeface="Bitter" charset="0"/>
-                      </a:endParaRPr>
-                    </a:p>
-                  </a:txBody>
-                  <a:tcPr marL="189018" marR="189018" marT="6350" marB="6350" anchor="ctr">
-                    <a:lnL w="12700" cap="flat" cmpd="sng" algn="ctr">
-                      <a:solidFill>
-                        <a:srgbClr val="525355"/>
-                      </a:solidFill>
-                      <a:prstDash val="solid"/>
-                      <a:round/>
-                      <a:headEnd type="none" w="med" len="med"/>
-                      <a:tailEnd type="none" w="med" len="med"/>
-                    </a:lnL>
-                    <a:lnR w="12700" cap="flat" cmpd="sng" algn="ctr">
-                      <a:solidFill>
-                        <a:srgbClr val="525355"/>
-                      </a:solidFill>
-                      <a:prstDash val="solid"/>
-                      <a:round/>
-                      <a:headEnd type="none" w="med" len="med"/>
-                      <a:tailEnd type="none" w="med" len="med"/>
-                    </a:lnR>
-                    <a:lnT w="12700" cap="flat" cmpd="sng" algn="ctr">
-                      <a:solidFill>
-                        <a:srgbClr val="525355"/>
-                      </a:solidFill>
-                      <a:prstDash val="solid"/>
-                      <a:round/>
-                      <a:headEnd type="none" w="med" len="med"/>
-                      <a:tailEnd type="none" w="med" len="med"/>
-                    </a:lnT>
-                    <a:lnB w="12700" cap="flat" cmpd="sng" algn="ctr">
-                      <a:solidFill>
-                        <a:srgbClr val="525355"/>
-                      </a:solidFill>
-                      <a:prstDash val="solid"/>
-                      <a:round/>
-                      <a:headEnd type="none" w="med" len="med"/>
-                      <a:tailEnd type="none" w="med" len="med"/>
-                    </a:lnB>
-                    <a:solidFill>
-                      <a:srgbClr val="1C1D1F"/>
-                    </a:solidFill>
-                  </a:tcPr>
-                </a:tc>
-                <a:tc>
-                  <a:txBody>
-                    <a:bodyPr/>
-                    <a:lstStyle/>
-                    <a:p>
-                      <a:pPr indent="0" marL="0">
-                        <a:buNone/>
-                      </a:pPr>
-                      <a:r>
-                        <a:rPr lang="en-US" sz="1450" dirty="0">
-                          <a:solidFill>
-                            <a:srgbClr val="C2C4B5"/>
-                          </a:solidFill>
-                          <a:latin typeface="Bitter" pitchFamily="34" charset="0"/>
-                          <a:ea typeface="Bitter" pitchFamily="34" charset="-122"/>
-                          <a:cs typeface="Bitter" pitchFamily="34" charset="-120"/>
-                        </a:rPr>
-                        <a:t>—</a:t>
-                      </a:r>
-                      <a:endParaRPr lang="en-US" sz="1450" dirty="0">
-                        <a:latin typeface="Bitter" charset="0"/>
-                        <a:ea typeface="Bitter" charset="0"/>
-                        <a:cs typeface="Bitter" charset="0"/>
-                      </a:endParaRPr>
-                    </a:p>
-                  </a:txBody>
-                  <a:tcPr marL="189018" marR="189018" marT="6350" marB="6350" anchor="ctr">
-                    <a:lnL w="12700" cap="flat" cmpd="sng" algn="ctr">
-                      <a:solidFill>
-                        <a:srgbClr val="525355"/>
-                      </a:solidFill>
-                      <a:prstDash val="solid"/>
-                      <a:round/>
-                      <a:headEnd type="none" w="med" len="med"/>
-                      <a:tailEnd type="none" w="med" len="med"/>
-                    </a:lnL>
-                    <a:lnR w="12700" cap="flat" cmpd="sng" algn="ctr">
-                      <a:solidFill>
-                        <a:srgbClr val="525355"/>
-                      </a:solidFill>
-                      <a:prstDash val="solid"/>
-                      <a:round/>
-                      <a:headEnd type="none" w="med" len="med"/>
-                      <a:tailEnd type="none" w="med" len="med"/>
-                    </a:lnR>
-                    <a:lnT w="12700" cap="flat" cmpd="sng" algn="ctr">
-                      <a:solidFill>
-                        <a:srgbClr val="525355"/>
-                      </a:solidFill>
-                      <a:prstDash val="solid"/>
-                      <a:round/>
-                      <a:headEnd type="none" w="med" len="med"/>
-                      <a:tailEnd type="none" w="med" len="med"/>
-                    </a:lnT>
-                    <a:lnB w="12700" cap="flat" cmpd="sng" algn="ctr">
-                      <a:solidFill>
-                        <a:srgbClr val="525355"/>
-                      </a:solidFill>
-                      <a:prstDash val="solid"/>
-                      <a:round/>
-                      <a:headEnd type="none" w="med" len="med"/>
-                      <a:tailEnd type="none" w="med" len="med"/>
-                    </a:lnB>
-                    <a:solidFill>
-                      <a:srgbClr val="1C1D1F"/>
-                    </a:solidFill>
-                  </a:tcPr>
-                </a:tc>
-              </a:tr>
-              <a:tr h="548269">
-                <a:tc>
-                  <a:txBody>
-                    <a:bodyPr/>
-                    <a:lstStyle/>
-                    <a:p>
-                      <a:pPr indent="0" marL="0">
-                        <a:buNone/>
-                      </a:pPr>
-                      <a:r>
-                        <a:rPr lang="en-US" sz="1450" b="1" dirty="0">
-                          <a:solidFill>
-                            <a:srgbClr val="C2C4B5"/>
-                          </a:solidFill>
-                          <a:latin typeface="Bitter" pitchFamily="34" charset="0"/>
-                          <a:ea typeface="Bitter" pitchFamily="34" charset="-122"/>
-                          <a:cs typeface="Bitter" pitchFamily="34" charset="-120"/>
-                        </a:rPr>
-                        <a:t>Tamanna Akter Mou</a:t>
-                      </a:r>
-                      <a:endParaRPr lang="en-US" sz="1450" dirty="0">
-                        <a:latin typeface="Bitter" charset="0"/>
-                        <a:ea typeface="Bitter" charset="0"/>
-                        <a:cs typeface="Bitter" charset="0"/>
-                      </a:endParaRPr>
-                    </a:p>
-                  </a:txBody>
-                  <a:tcPr marL="189018" marR="189018" marT="6350" marB="6350" anchor="ctr">
-                    <a:lnL w="12700" cap="flat" cmpd="sng" algn="ctr">
-                      <a:solidFill>
-                        <a:srgbClr val="525355"/>
-                      </a:solidFill>
-                      <a:prstDash val="solid"/>
-                      <a:round/>
-                      <a:headEnd type="none" w="med" len="med"/>
-                      <a:tailEnd type="none" w="med" len="med"/>
-                    </a:lnL>
-                    <a:lnR w="12700" cap="flat" cmpd="sng" algn="ctr">
-                      <a:solidFill>
-                        <a:srgbClr val="525355"/>
-                      </a:solidFill>
-                      <a:prstDash val="solid"/>
-                      <a:round/>
-                      <a:headEnd type="none" w="med" len="med"/>
-                      <a:tailEnd type="none" w="med" len="med"/>
-                    </a:lnR>
-                    <a:lnT w="12700" cap="flat" cmpd="sng" algn="ctr">
-                      <a:solidFill>
-                        <a:srgbClr val="525355"/>
-                      </a:solidFill>
-                      <a:prstDash val="solid"/>
-                      <a:round/>
-                      <a:headEnd type="none" w="med" len="med"/>
-                      <a:tailEnd type="none" w="med" len="med"/>
-                    </a:lnT>
-                    <a:lnB w="12700" cap="flat" cmpd="sng" algn="ctr">
-                      <a:solidFill>
-                        <a:srgbClr val="525355"/>
-                      </a:solidFill>
-                      <a:prstDash val="solid"/>
-                      <a:round/>
-                      <a:headEnd type="none" w="med" len="med"/>
-                      <a:tailEnd type="none" w="med" len="med"/>
-                    </a:lnB>
-                    <a:solidFill>
-                      <a:srgbClr val="1C1D1F"/>
-                    </a:solidFill>
-                  </a:tcPr>
-                </a:tc>
-                <a:tc>
-                  <a:txBody>
-                    <a:bodyPr/>
-                    <a:lstStyle/>
-                    <a:p>
-                      <a:pPr indent="0" marL="0">
-                        <a:buNone/>
-                      </a:pPr>
-                      <a:r>
-                        <a:rPr lang="en-US" sz="1450" dirty="0">
-                          <a:solidFill>
-                            <a:srgbClr val="C2C4B5"/>
-                          </a:solidFill>
-                          <a:latin typeface="Bitter" pitchFamily="34" charset="0"/>
-                          <a:ea typeface="Bitter" pitchFamily="34" charset="-122"/>
-                          <a:cs typeface="Bitter" pitchFamily="34" charset="-120"/>
-                        </a:rPr>
-                        <a:t>2211951042</a:t>
-                      </a:r>
-                      <a:endParaRPr lang="en-US" sz="1450" dirty="0">
-                        <a:latin typeface="Bitter" charset="0"/>
-                        <a:ea typeface="Bitter" charset="0"/>
-                        <a:cs typeface="Bitter" charset="0"/>
-                      </a:endParaRPr>
-                    </a:p>
-                  </a:txBody>
-                  <a:tcPr marL="189018" marR="189018" marT="6350" marB="6350" anchor="ctr">
-                    <a:lnL w="12700" cap="flat" cmpd="sng" algn="ctr">
-                      <a:solidFill>
-                        <a:srgbClr val="525355"/>
-                      </a:solidFill>
-                      <a:prstDash val="solid"/>
-                      <a:round/>
-                      <a:headEnd type="none" w="med" len="med"/>
-                      <a:tailEnd type="none" w="med" len="med"/>
-                    </a:lnL>
-                    <a:lnR w="12700" cap="flat" cmpd="sng" algn="ctr">
-                      <a:solidFill>
-                        <a:srgbClr val="525355"/>
-                      </a:solidFill>
-                      <a:prstDash val="solid"/>
-                      <a:round/>
-                      <a:headEnd type="none" w="med" len="med"/>
-                      <a:tailEnd type="none" w="med" len="med"/>
-                    </a:lnR>
-                    <a:lnT w="12700" cap="flat" cmpd="sng" algn="ctr">
-                      <a:solidFill>
-                        <a:srgbClr val="525355"/>
-                      </a:solidFill>
-                      <a:prstDash val="solid"/>
-                      <a:round/>
-                      <a:headEnd type="none" w="med" len="med"/>
-                      <a:tailEnd type="none" w="med" len="med"/>
-                    </a:lnT>
-                    <a:lnB w="12700" cap="flat" cmpd="sng" algn="ctr">
-                      <a:solidFill>
-                        <a:srgbClr val="525355"/>
-                      </a:solidFill>
-                      <a:prstDash val="solid"/>
-                      <a:round/>
-                      <a:headEnd type="none" w="med" len="med"/>
-                      <a:tailEnd type="none" w="med" len="med"/>
-                    </a:lnB>
-                    <a:solidFill>
-                      <a:srgbClr val="1C1D1F"/>
-                    </a:solidFill>
-                  </a:tcPr>
-                </a:tc>
-                <a:tc>
-                  <a:txBody>
-                    <a:bodyPr/>
-                    <a:lstStyle/>
-                    <a:p>
-                      <a:pPr indent="0" marL="0">
-                        <a:buNone/>
-                      </a:pPr>
-                      <a:r>
-                        <a:rPr lang="en-US" sz="1450" dirty="0">
-                          <a:solidFill>
-                            <a:srgbClr val="C2C4B5"/>
-                          </a:solidFill>
-                          <a:latin typeface="Bitter" pitchFamily="34" charset="0"/>
-                          <a:ea typeface="Bitter" pitchFamily="34" charset="-122"/>
-                          <a:cs typeface="Bitter" pitchFamily="34" charset="-120"/>
-                        </a:rPr>
-                        <a:t>Model Accuracy Measurement</a:t>
-                      </a:r>
-                      <a:endParaRPr lang="en-US" sz="1450" dirty="0">
-                        <a:latin typeface="Bitter" charset="0"/>
-                        <a:ea typeface="Bitter" charset="0"/>
-                        <a:cs typeface="Bitter" charset="0"/>
-                      </a:endParaRPr>
-                    </a:p>
-                  </a:txBody>
-                  <a:tcPr marL="189018" marR="189018" marT="6350" marB="6350" anchor="ctr">
-                    <a:lnL w="12700" cap="flat" cmpd="sng" algn="ctr">
-                      <a:solidFill>
-                        <a:srgbClr val="525355"/>
-                      </a:solidFill>
-                      <a:prstDash val="solid"/>
-                      <a:round/>
-                      <a:headEnd type="none" w="med" len="med"/>
-                      <a:tailEnd type="none" w="med" len="med"/>
-                    </a:lnL>
-                    <a:lnR w="12700" cap="flat" cmpd="sng" algn="ctr">
-                      <a:solidFill>
-                        <a:srgbClr val="525355"/>
-                      </a:solidFill>
-                      <a:prstDash val="solid"/>
-                      <a:round/>
-                      <a:headEnd type="none" w="med" len="med"/>
-                      <a:tailEnd type="none" w="med" len="med"/>
-                    </a:lnR>
-                    <a:lnT w="12700" cap="flat" cmpd="sng" algn="ctr">
-                      <a:solidFill>
-                        <a:srgbClr val="525355"/>
-                      </a:solidFill>
-                      <a:prstDash val="solid"/>
-                      <a:round/>
-                      <a:headEnd type="none" w="med" len="med"/>
-                      <a:tailEnd type="none" w="med" len="med"/>
-                    </a:lnT>
-                    <a:lnB w="12700" cap="flat" cmpd="sng" algn="ctr">
-                      <a:solidFill>
-                        <a:srgbClr val="525355"/>
-                      </a:solidFill>
-                      <a:prstDash val="solid"/>
-                      <a:round/>
-                      <a:headEnd type="none" w="med" len="med"/>
-                      <a:tailEnd type="none" w="med" len="med"/>
-                    </a:lnB>
-                    <a:solidFill>
-                      <a:srgbClr val="1C1D1F"/>
-                    </a:solidFill>
-                  </a:tcPr>
-                </a:tc>
-              </a:tr>
-              <a:tr h="548269">
-                <a:tc>
-                  <a:txBody>
-                    <a:bodyPr/>
-                    <a:lstStyle/>
-                    <a:p>
-                      <a:pPr indent="0" marL="0">
-                        <a:buNone/>
-                      </a:pPr>
-                      <a:r>
-                        <a:rPr lang="en-US" sz="1450" b="1" dirty="0">
-                          <a:solidFill>
-                            <a:srgbClr val="C2C4B5"/>
-                          </a:solidFill>
-                          <a:latin typeface="Bitter" pitchFamily="34" charset="0"/>
-                          <a:ea typeface="Bitter" pitchFamily="34" charset="-122"/>
-                          <a:cs typeface="Bitter" pitchFamily="34" charset="-120"/>
-                        </a:rPr>
-                        <a:t>Aryan Sami</a:t>
-                      </a:r>
-                      <a:endParaRPr lang="en-US" sz="1450" dirty="0">
-                        <a:latin typeface="Bitter" charset="0"/>
-                        <a:ea typeface="Bitter" charset="0"/>
-                        <a:cs typeface="Bitter" charset="0"/>
-                      </a:endParaRPr>
-                    </a:p>
-                  </a:txBody>
-                  <a:tcPr marL="189018" marR="189018" marT="6350" marB="6350" anchor="ctr">
-                    <a:lnL w="12700" cap="flat" cmpd="sng" algn="ctr">
-                      <a:solidFill>
-                        <a:srgbClr val="525355"/>
-                      </a:solidFill>
-                      <a:prstDash val="solid"/>
-                      <a:round/>
-                      <a:headEnd type="none" w="med" len="med"/>
-                      <a:tailEnd type="none" w="med" len="med"/>
-                    </a:lnL>
-                    <a:lnR w="12700" cap="flat" cmpd="sng" algn="ctr">
-                      <a:solidFill>
-                        <a:srgbClr val="525355"/>
-                      </a:solidFill>
-                      <a:prstDash val="solid"/>
-                      <a:round/>
-                      <a:headEnd type="none" w="med" len="med"/>
-                      <a:tailEnd type="none" w="med" len="med"/>
-                    </a:lnR>
-                    <a:lnT w="12700" cap="flat" cmpd="sng" algn="ctr">
-                      <a:solidFill>
-                        <a:srgbClr val="525355"/>
-                      </a:solidFill>
-                      <a:prstDash val="solid"/>
-                      <a:round/>
-                      <a:headEnd type="none" w="med" len="med"/>
-                      <a:tailEnd type="none" w="med" len="med"/>
-                    </a:lnT>
-                    <a:lnB w="12700" cap="flat" cmpd="sng" algn="ctr">
-                      <a:solidFill>
-                        <a:srgbClr val="525355"/>
-                      </a:solidFill>
-                      <a:prstDash val="solid"/>
-                      <a:round/>
-                      <a:headEnd type="none" w="med" len="med"/>
-                      <a:tailEnd type="none" w="med" len="med"/>
-                    </a:lnB>
-                    <a:solidFill>
-                      <a:srgbClr val="1C1D1F"/>
-                    </a:solidFill>
-                  </a:tcPr>
-                </a:tc>
-                <a:tc>
-                  <a:txBody>
-                    <a:bodyPr/>
-                    <a:lstStyle/>
-                    <a:p>
-                      <a:pPr indent="0" marL="0">
-                        <a:buNone/>
-                      </a:pPr>
-                      <a:r>
-                        <a:rPr lang="en-US" sz="1450" dirty="0">
-                          <a:solidFill>
-                            <a:srgbClr val="C2C4B5"/>
-                          </a:solidFill>
-                          <a:latin typeface="Bitter" pitchFamily="34" charset="0"/>
-                          <a:ea typeface="Bitter" pitchFamily="34" charset="-122"/>
-                          <a:cs typeface="Bitter" pitchFamily="34" charset="-120"/>
-                        </a:rPr>
-                        <a:t>2231407042</a:t>
-                      </a:r>
-                      <a:endParaRPr lang="en-US" sz="1450" dirty="0">
-                        <a:latin typeface="Bitter" charset="0"/>
-                        <a:ea typeface="Bitter" charset="0"/>
-                        <a:cs typeface="Bitter" charset="0"/>
-                      </a:endParaRPr>
-                    </a:p>
-                  </a:txBody>
-                  <a:tcPr marL="189018" marR="189018" marT="6350" marB="6350" anchor="ctr">
-                    <a:lnL w="12700" cap="flat" cmpd="sng" algn="ctr">
-                      <a:solidFill>
-                        <a:srgbClr val="525355"/>
-                      </a:solidFill>
-                      <a:prstDash val="solid"/>
-                      <a:round/>
-                      <a:headEnd type="none" w="med" len="med"/>
-                      <a:tailEnd type="none" w="med" len="med"/>
-                    </a:lnL>
-                    <a:lnR w="12700" cap="flat" cmpd="sng" algn="ctr">
-                      <a:solidFill>
-                        <a:srgbClr val="525355"/>
-                      </a:solidFill>
-                      <a:prstDash val="solid"/>
-                      <a:round/>
-                      <a:headEnd type="none" w="med" len="med"/>
-                      <a:tailEnd type="none" w="med" len="med"/>
-                    </a:lnR>
-                    <a:lnT w="12700" cap="flat" cmpd="sng" algn="ctr">
-                      <a:solidFill>
-                        <a:srgbClr val="525355"/>
-                      </a:solidFill>
-                      <a:prstDash val="solid"/>
-                      <a:round/>
-                      <a:headEnd type="none" w="med" len="med"/>
-                      <a:tailEnd type="none" w="med" len="med"/>
-                    </a:lnT>
-                    <a:lnB w="12700" cap="flat" cmpd="sng" algn="ctr">
-                      <a:solidFill>
-                        <a:srgbClr val="525355"/>
-                      </a:solidFill>
-                      <a:prstDash val="solid"/>
-                      <a:round/>
-                      <a:headEnd type="none" w="med" len="med"/>
-                      <a:tailEnd type="none" w="med" len="med"/>
-                    </a:lnB>
-                    <a:solidFill>
-                      <a:srgbClr val="1C1D1F"/>
-                    </a:solidFill>
-                  </a:tcPr>
-                </a:tc>
-                <a:tc>
-                  <a:txBody>
-                    <a:bodyPr/>
-                    <a:lstStyle/>
-                    <a:p>
-                      <a:pPr indent="0" marL="0">
-                        <a:buNone/>
-                      </a:pPr>
-                      <a:r>
-                        <a:rPr lang="en-US" sz="1450" dirty="0">
-                          <a:solidFill>
-                            <a:srgbClr val="C2C4B5"/>
-                          </a:solidFill>
-                          <a:latin typeface="Bitter" pitchFamily="34" charset="0"/>
-                          <a:ea typeface="Bitter" pitchFamily="34" charset="-122"/>
-                          <a:cs typeface="Bitter" pitchFamily="34" charset="-120"/>
-                        </a:rPr>
-                        <a:t>U-Net Spatial Extraction</a:t>
-                      </a:r>
-                      <a:endParaRPr lang="en-US" sz="1450" dirty="0">
-                        <a:latin typeface="Bitter" charset="0"/>
-                        <a:ea typeface="Bitter" charset="0"/>
-                        <a:cs typeface="Bitter" charset="0"/>
-                      </a:endParaRPr>
-                    </a:p>
-                  </a:txBody>
-                  <a:tcPr marL="189018" marR="189018" marT="6350" marB="6350" anchor="ctr">
-                    <a:lnL w="12700" cap="flat" cmpd="sng" algn="ctr">
-                      <a:solidFill>
-                        <a:srgbClr val="525355"/>
-                      </a:solidFill>
-                      <a:prstDash val="solid"/>
-                      <a:round/>
-                      <a:headEnd type="none" w="med" len="med"/>
-                      <a:tailEnd type="none" w="med" len="med"/>
-                    </a:lnL>
-                    <a:lnR w="12700" cap="flat" cmpd="sng" algn="ctr">
-                      <a:solidFill>
-                        <a:srgbClr val="525355"/>
-                      </a:solidFill>
-                      <a:prstDash val="solid"/>
-                      <a:round/>
-                      <a:headEnd type="none" w="med" len="med"/>
-                      <a:tailEnd type="none" w="med" len="med"/>
-                    </a:lnR>
-                    <a:lnT w="12700" cap="flat" cmpd="sng" algn="ctr">
-                      <a:solidFill>
-                        <a:srgbClr val="525355"/>
-                      </a:solidFill>
-                      <a:prstDash val="solid"/>
-                      <a:round/>
-                      <a:headEnd type="none" w="med" len="med"/>
-                      <a:tailEnd type="none" w="med" len="med"/>
-                    </a:lnT>
-                    <a:lnB w="12700" cap="flat" cmpd="sng" algn="ctr">
-                      <a:solidFill>
-                        <a:srgbClr val="525355"/>
-                      </a:solidFill>
-                      <a:prstDash val="solid"/>
-                      <a:round/>
-                      <a:headEnd type="none" w="med" len="med"/>
-                      <a:tailEnd type="none" w="med" len="med"/>
-                    </a:lnB>
-                    <a:solidFill>
-                      <a:srgbClr val="1C1D1F"/>
-                    </a:solidFill>
-                  </a:tcPr>
-                </a:tc>
-              </a:tr>
-              <a:tr h="548269">
-                <a:tc>
-                  <a:txBody>
-                    <a:bodyPr/>
-                    <a:lstStyle/>
-                    <a:p>
-                      <a:pPr indent="0" marL="0">
-                        <a:buNone/>
-                      </a:pPr>
-                      <a:r>
-                        <a:rPr lang="en-US" sz="1450" b="1" dirty="0">
-                          <a:solidFill>
-                            <a:srgbClr val="C2C4B5"/>
-                          </a:solidFill>
-                          <a:latin typeface="Bitter" pitchFamily="34" charset="0"/>
-                          <a:ea typeface="Bitter" pitchFamily="34" charset="-122"/>
-                          <a:cs typeface="Bitter" pitchFamily="34" charset="-120"/>
-                        </a:rPr>
-                        <a:t>Ridita Afrin Riya</a:t>
-                      </a:r>
-                      <a:endParaRPr lang="en-US" sz="1450" dirty="0">
-                        <a:latin typeface="Bitter" charset="0"/>
-                        <a:ea typeface="Bitter" charset="0"/>
-                        <a:cs typeface="Bitter" charset="0"/>
-                      </a:endParaRPr>
-                    </a:p>
-                  </a:txBody>
-                  <a:tcPr marL="189018" marR="189018" marT="6350" marB="6350" anchor="ctr">
-                    <a:lnL w="12700" cap="flat" cmpd="sng" algn="ctr">
-                      <a:solidFill>
-                        <a:srgbClr val="525355"/>
-                      </a:solidFill>
-                      <a:prstDash val="solid"/>
-                      <a:round/>
-                      <a:headEnd type="none" w="med" len="med"/>
-                      <a:tailEnd type="none" w="med" len="med"/>
-                    </a:lnL>
-                    <a:lnR w="12700" cap="flat" cmpd="sng" algn="ctr">
-                      <a:solidFill>
-                        <a:srgbClr val="525355"/>
-                      </a:solidFill>
-                      <a:prstDash val="solid"/>
-                      <a:round/>
-                      <a:headEnd type="none" w="med" len="med"/>
-                      <a:tailEnd type="none" w="med" len="med"/>
-                    </a:lnR>
-                    <a:lnT w="12700" cap="flat" cmpd="sng" algn="ctr">
-                      <a:solidFill>
-                        <a:srgbClr val="525355"/>
-                      </a:solidFill>
-                      <a:prstDash val="solid"/>
-                      <a:round/>
-                      <a:headEnd type="none" w="med" len="med"/>
-                      <a:tailEnd type="none" w="med" len="med"/>
-                    </a:lnT>
-                    <a:lnB w="12700" cap="flat" cmpd="sng" algn="ctr">
-                      <a:solidFill>
-                        <a:srgbClr val="525355"/>
-                      </a:solidFill>
-                      <a:prstDash val="solid"/>
-                      <a:round/>
-                      <a:headEnd type="none" w="med" len="med"/>
-                      <a:tailEnd type="none" w="med" len="med"/>
-                    </a:lnB>
-                    <a:solidFill>
-                      <a:srgbClr val="1C1D1F"/>
-                    </a:solidFill>
-                  </a:tcPr>
-                </a:tc>
-                <a:tc>
-                  <a:txBody>
-                    <a:bodyPr/>
-                    <a:lstStyle/>
-                    <a:p>
-                      <a:pPr indent="0" marL="0">
-                        <a:buNone/>
-                      </a:pPr>
-                      <a:r>
-                        <a:rPr lang="en-US" sz="1450" dirty="0">
-                          <a:solidFill>
-                            <a:srgbClr val="C2C4B5"/>
-                          </a:solidFill>
-                          <a:latin typeface="Bitter" pitchFamily="34" charset="0"/>
-                          <a:ea typeface="Bitter" pitchFamily="34" charset="-122"/>
-                          <a:cs typeface="Bitter" pitchFamily="34" charset="-120"/>
-                        </a:rPr>
-                        <a:t>2211622042</a:t>
-                      </a:r>
-                      <a:endParaRPr lang="en-US" sz="1450" dirty="0">
-                        <a:latin typeface="Bitter" charset="0"/>
-                        <a:ea typeface="Bitter" charset="0"/>
-                        <a:cs typeface="Bitter" charset="0"/>
-                      </a:endParaRPr>
-                    </a:p>
-                  </a:txBody>
-                  <a:tcPr marL="189018" marR="189018" marT="6350" marB="6350" anchor="ctr">
-                    <a:lnL w="12700" cap="flat" cmpd="sng" algn="ctr">
-                      <a:solidFill>
-                        <a:srgbClr val="525355"/>
-                      </a:solidFill>
-                      <a:prstDash val="solid"/>
-                      <a:round/>
-                      <a:headEnd type="none" w="med" len="med"/>
-                      <a:tailEnd type="none" w="med" len="med"/>
-                    </a:lnL>
-                    <a:lnR w="12700" cap="flat" cmpd="sng" algn="ctr">
-                      <a:solidFill>
-                        <a:srgbClr val="525355"/>
-                      </a:solidFill>
-                      <a:prstDash val="solid"/>
-                      <a:round/>
-                      <a:headEnd type="none" w="med" len="med"/>
-                      <a:tailEnd type="none" w="med" len="med"/>
-                    </a:lnR>
-                    <a:lnT w="12700" cap="flat" cmpd="sng" algn="ctr">
-                      <a:solidFill>
-                        <a:srgbClr val="525355"/>
-                      </a:solidFill>
-                      <a:prstDash val="solid"/>
-                      <a:round/>
-                      <a:headEnd type="none" w="med" len="med"/>
-                      <a:tailEnd type="none" w="med" len="med"/>
-                    </a:lnT>
-                    <a:lnB w="12700" cap="flat" cmpd="sng" algn="ctr">
-                      <a:solidFill>
-                        <a:srgbClr val="525355"/>
-                      </a:solidFill>
-                      <a:prstDash val="solid"/>
-                      <a:round/>
-                      <a:headEnd type="none" w="med" len="med"/>
-                      <a:tailEnd type="none" w="med" len="med"/>
-                    </a:lnB>
-                    <a:solidFill>
-                      <a:srgbClr val="1C1D1F"/>
-                    </a:solidFill>
-                  </a:tcPr>
-                </a:tc>
-                <a:tc>
-                  <a:txBody>
-                    <a:bodyPr/>
-                    <a:lstStyle/>
-                    <a:p>
-                      <a:pPr indent="0" marL="0">
-                        <a:buNone/>
-                      </a:pPr>
-                      <a:r>
-                        <a:rPr lang="en-US" sz="1450" dirty="0">
-                          <a:solidFill>
-                            <a:srgbClr val="C2C4B5"/>
-                          </a:solidFill>
-                          <a:latin typeface="Bitter" pitchFamily="34" charset="0"/>
-                          <a:ea typeface="Bitter" pitchFamily="34" charset="-122"/>
-                          <a:cs typeface="Bitter" pitchFamily="34" charset="-120"/>
-                        </a:rPr>
-                        <a:t>Multi-Agent Orchestration(CrewAI)</a:t>
-                      </a:r>
-                      <a:endParaRPr lang="en-US" sz="1450" dirty="0">
-                        <a:latin typeface="Bitter" charset="0"/>
-                        <a:ea typeface="Bitter" charset="0"/>
-                        <a:cs typeface="Bitter" charset="0"/>
-                      </a:endParaRPr>
-                    </a:p>
-                  </a:txBody>
-                  <a:tcPr marL="189018" marR="189018" marT="6350" marB="6350" anchor="ctr">
-                    <a:lnL w="12700" cap="flat" cmpd="sng" algn="ctr">
-                      <a:solidFill>
-                        <a:srgbClr val="525355"/>
-                      </a:solidFill>
-                      <a:prstDash val="solid"/>
-                      <a:round/>
-                      <a:headEnd type="none" w="med" len="med"/>
-                      <a:tailEnd type="none" w="med" len="med"/>
-                    </a:lnL>
-                    <a:lnR w="12700" cap="flat" cmpd="sng" algn="ctr">
-                      <a:solidFill>
-                        <a:srgbClr val="525355"/>
-                      </a:solidFill>
-                      <a:prstDash val="solid"/>
-                      <a:round/>
-                      <a:headEnd type="none" w="med" len="med"/>
-                      <a:tailEnd type="none" w="med" len="med"/>
-                    </a:lnR>
-                    <a:lnT w="12700" cap="flat" cmpd="sng" algn="ctr">
-                      <a:solidFill>
-                        <a:srgbClr val="525355"/>
-                      </a:solidFill>
-                      <a:prstDash val="solid"/>
-                      <a:round/>
-                      <a:headEnd type="none" w="med" len="med"/>
-                      <a:tailEnd type="none" w="med" len="med"/>
-                    </a:lnT>
-                    <a:lnB w="12700" cap="flat" cmpd="sng" algn="ctr">
-                      <a:solidFill>
-                        <a:srgbClr val="525355"/>
-                      </a:solidFill>
-                      <a:prstDash val="solid"/>
-                      <a:round/>
-                      <a:headEnd type="none" w="med" len="med"/>
-                      <a:tailEnd type="none" w="med" len="med"/>
-                    </a:lnB>
-                    <a:solidFill>
-                      <a:srgbClr val="1C1D1F"/>
-                    </a:solidFill>
-                  </a:tcPr>
-                </a:tc>
-              </a:tr>
-              <a:tr h="545094">
-                <a:tc>
-                  <a:txBody>
-                    <a:bodyPr/>
-                    <a:lstStyle/>
-                    <a:p>
-                      <a:pPr indent="0" marL="0">
-                        <a:buNone/>
-                      </a:pPr>
-                      <a:r>
-                        <a:rPr lang="en-US" sz="1450" b="1" dirty="0">
-                          <a:solidFill>
-                            <a:srgbClr val="C2C4B5"/>
-                          </a:solidFill>
-                          <a:latin typeface="Bitter" pitchFamily="34" charset="0"/>
-                          <a:ea typeface="Bitter" pitchFamily="34" charset="-122"/>
-                          <a:cs typeface="Bitter" pitchFamily="34" charset="-120"/>
-                        </a:rPr>
-                        <a:t>Abrar Mohammed Tanzim Alam</a:t>
-                      </a:r>
-                      <a:endParaRPr lang="en-US" sz="1450" dirty="0">
-                        <a:latin typeface="Bitter" charset="0"/>
-                        <a:ea typeface="Bitter" charset="0"/>
-                        <a:cs typeface="Bitter" charset="0"/>
-                      </a:endParaRPr>
-                    </a:p>
-                  </a:txBody>
-                  <a:tcPr marL="189018" marR="189018" marT="6350" marB="6350" anchor="ctr">
-                    <a:lnL w="12700" cap="flat" cmpd="sng" algn="ctr">
-                      <a:solidFill>
-                        <a:srgbClr val="525355"/>
-                      </a:solidFill>
-                      <a:prstDash val="solid"/>
-                      <a:round/>
-                      <a:headEnd type="none" w="med" len="med"/>
-                      <a:tailEnd type="none" w="med" len="med"/>
-                    </a:lnL>
-                    <a:lnR w="12700" cap="flat" cmpd="sng" algn="ctr">
-                      <a:solidFill>
-                        <a:srgbClr val="525355"/>
-                      </a:solidFill>
-                      <a:prstDash val="solid"/>
-                      <a:round/>
-                      <a:headEnd type="none" w="med" len="med"/>
-                      <a:tailEnd type="none" w="med" len="med"/>
-                    </a:lnR>
-                    <a:lnT w="12700" cap="flat" cmpd="sng" algn="ctr">
-                      <a:solidFill>
-                        <a:srgbClr val="525355"/>
-                      </a:solidFill>
-                      <a:prstDash val="solid"/>
-                      <a:round/>
-                      <a:headEnd type="none" w="med" len="med"/>
-                      <a:tailEnd type="none" w="med" len="med"/>
-                    </a:lnT>
-                    <a:lnB w="12700" cap="flat" cmpd="sng" algn="ctr">
-                      <a:solidFill>
-                        <a:srgbClr val="525355"/>
-                      </a:solidFill>
-                      <a:prstDash val="solid"/>
-                      <a:round/>
-                      <a:headEnd type="none" w="med" len="med"/>
-                      <a:tailEnd type="none" w="med" len="med"/>
-                    </a:lnB>
-                    <a:solidFill>
-                      <a:srgbClr val="1C1D1F"/>
-                    </a:solidFill>
-                  </a:tcPr>
-                </a:tc>
-                <a:tc>
-                  <a:txBody>
-                    <a:bodyPr/>
-                    <a:lstStyle/>
-                    <a:p>
-                      <a:pPr indent="0" marL="0">
-                        <a:buNone/>
-                      </a:pPr>
-                      <a:r>
-                        <a:rPr lang="en-US" sz="1450" dirty="0">
-                          <a:solidFill>
-                            <a:srgbClr val="C2C4B5"/>
-                          </a:solidFill>
-                          <a:latin typeface="Bitter" pitchFamily="34" charset="0"/>
-                          <a:ea typeface="Bitter" pitchFamily="34" charset="-122"/>
-                          <a:cs typeface="Bitter" pitchFamily="34" charset="-120"/>
-                        </a:rPr>
-                        <a:t>2222864042</a:t>
-                      </a:r>
-                      <a:endParaRPr lang="en-US" sz="1450" dirty="0">
-                        <a:latin typeface="Bitter" charset="0"/>
-                        <a:ea typeface="Bitter" charset="0"/>
-                        <a:cs typeface="Bitter" charset="0"/>
-                      </a:endParaRPr>
-                    </a:p>
-                  </a:txBody>
-                  <a:tcPr marL="189018" marR="189018" marT="6350" marB="6350" anchor="ctr">
-                    <a:lnL w="12700" cap="flat" cmpd="sng" algn="ctr">
-                      <a:solidFill>
-                        <a:srgbClr val="525355"/>
-                      </a:solidFill>
-                      <a:prstDash val="solid"/>
-                      <a:round/>
-                      <a:headEnd type="none" w="med" len="med"/>
-                      <a:tailEnd type="none" w="med" len="med"/>
-                    </a:lnL>
-                    <a:lnR w="12700" cap="flat" cmpd="sng" algn="ctr">
-                      <a:solidFill>
-                        <a:srgbClr val="525355"/>
-                      </a:solidFill>
-                      <a:prstDash val="solid"/>
-                      <a:round/>
-                      <a:headEnd type="none" w="med" len="med"/>
-                      <a:tailEnd type="none" w="med" len="med"/>
-                    </a:lnR>
-                    <a:lnT w="12700" cap="flat" cmpd="sng" algn="ctr">
-                      <a:solidFill>
-                        <a:srgbClr val="525355"/>
-                      </a:solidFill>
-                      <a:prstDash val="solid"/>
-                      <a:round/>
-                      <a:headEnd type="none" w="med" len="med"/>
-                      <a:tailEnd type="none" w="med" len="med"/>
-                    </a:lnT>
-                    <a:lnB w="12700" cap="flat" cmpd="sng" algn="ctr">
-                      <a:solidFill>
-                        <a:srgbClr val="525355"/>
-                      </a:solidFill>
-                      <a:prstDash val="solid"/>
-                      <a:round/>
-                      <a:headEnd type="none" w="med" len="med"/>
-                      <a:tailEnd type="none" w="med" len="med"/>
-                    </a:lnB>
-                    <a:solidFill>
-                      <a:srgbClr val="1C1D1F"/>
-                    </a:solidFill>
-                  </a:tcPr>
-                </a:tc>
-                <a:tc>
-                  <a:txBody>
-                    <a:bodyPr/>
-                    <a:lstStyle/>
-                    <a:p>
-                      <a:pPr indent="0" marL="0">
-                        <a:buNone/>
-                      </a:pPr>
-                      <a:r>
-                        <a:rPr lang="en-US" sz="1450" dirty="0">
-                          <a:solidFill>
-                            <a:srgbClr val="C2C4B5"/>
-                          </a:solidFill>
-                          <a:latin typeface="Bitter" pitchFamily="34" charset="0"/>
-                          <a:ea typeface="Bitter" pitchFamily="34" charset="-122"/>
-                          <a:cs typeface="Bitter" pitchFamily="34" charset="-120"/>
-                        </a:rPr>
-                        <a:t>—</a:t>
-                      </a:r>
-                      <a:endParaRPr lang="en-US" sz="1450" dirty="0">
-                        <a:latin typeface="Bitter" charset="0"/>
-                        <a:ea typeface="Bitter" charset="0"/>
-                        <a:cs typeface="Bitter" charset="0"/>
-                      </a:endParaRPr>
-                    </a:p>
-                  </a:txBody>
-                  <a:tcPr marL="189018" marR="189018" marT="6350" marB="6350" anchor="ctr">
-                    <a:lnL w="12700" cap="flat" cmpd="sng" algn="ctr">
-                      <a:solidFill>
-                        <a:srgbClr val="525355"/>
-                      </a:solidFill>
-                      <a:prstDash val="solid"/>
-                      <a:round/>
-                      <a:headEnd type="none" w="med" len="med"/>
-                      <a:tailEnd type="none" w="med" len="med"/>
-                    </a:lnL>
-                    <a:lnR w="12700" cap="flat" cmpd="sng" algn="ctr">
-                      <a:solidFill>
-                        <a:srgbClr val="525355"/>
-                      </a:solidFill>
-                      <a:prstDash val="solid"/>
-                      <a:round/>
-                      <a:headEnd type="none" w="med" len="med"/>
-                      <a:tailEnd type="none" w="med" len="med"/>
-                    </a:lnR>
-                    <a:lnT w="12700" cap="flat" cmpd="sng" algn="ctr">
-                      <a:solidFill>
-                        <a:srgbClr val="525355"/>
-                      </a:solidFill>
-                      <a:prstDash val="solid"/>
-                      <a:round/>
-                      <a:headEnd type="none" w="med" len="med"/>
-                      <a:tailEnd type="none" w="med" len="med"/>
-                    </a:lnT>
-                    <a:lnB w="12700" cap="flat" cmpd="sng" algn="ctr">
-                      <a:solidFill>
-                        <a:srgbClr val="525355"/>
-                      </a:solidFill>
-                      <a:prstDash val="solid"/>
-                      <a:round/>
-                      <a:headEnd type="none" w="med" len="med"/>
-                      <a:tailEnd type="none" w="med" len="med"/>
-                    </a:lnB>
-                    <a:solidFill>
-                      <a:srgbClr val="1C1D1F"/>
-                    </a:solidFill>
-                  </a:tcPr>
-                </a:tc>
-              </a:tr>
-            </a:tbl>
-          </a:graphicData>
-        </a:graphic>
-      </p:graphicFrame>
     </p:spTree>
   </p:cSld>
   <p:clrMapOvr>
@@ -12566,7 +11124,7 @@
           <a:bodyPr wrap="none" lIns="0" tIns="0" rIns="0" bIns="0" rtlCol="0" anchor="t"/>
           <a:lstStyle/>
           <a:p>
-            <a:pPr algn="l" indent="0" marL="0">
+            <a:pPr marL="0" indent="0" algn="l">
               <a:lnSpc>
                 <a:spcPct val="104000"/>
               </a:lnSpc>
@@ -12608,6 +11166,13 @@
           </a:solidFill>
           <a:ln/>
         </p:spPr>
+        <p:txBody>
+          <a:bodyPr/>
+          <a:lstStyle/>
+          <a:p>
+            <a:endParaRPr lang="en-US"/>
+          </a:p>
+        </p:txBody>
       </p:sp>
       <p:sp>
         <p:nvSpPr>
@@ -12630,7 +11195,7 @@
           <a:bodyPr wrap="none" lIns="0" tIns="0" rIns="0" bIns="0" rtlCol="0" anchor="t"/>
           <a:lstStyle/>
           <a:p>
-            <a:pPr algn="l" indent="0" marL="0">
+            <a:pPr marL="0" indent="0" algn="l">
               <a:lnSpc>
                 <a:spcPct val="104000"/>
               </a:lnSpc>
@@ -12674,7 +11239,7 @@
           </a:bodyPr>
           <a:lstStyle/>
           <a:p>
-            <a:pPr algn="l" indent="0" marL="0">
+            <a:pPr marL="0" indent="0" algn="l">
               <a:lnSpc>
                 <a:spcPct val="133000"/>
               </a:lnSpc>
@@ -12716,6 +11281,13 @@
           </a:solidFill>
           <a:ln/>
         </p:spPr>
+        <p:txBody>
+          <a:bodyPr/>
+          <a:lstStyle/>
+          <a:p>
+            <a:endParaRPr lang="en-US"/>
+          </a:p>
+        </p:txBody>
       </p:sp>
       <p:sp>
         <p:nvSpPr>
@@ -12738,7 +11310,7 @@
           <a:bodyPr wrap="none" lIns="0" tIns="0" rIns="0" bIns="0" rtlCol="0" anchor="t"/>
           <a:lstStyle/>
           <a:p>
-            <a:pPr algn="l" indent="0" marL="0">
+            <a:pPr marL="0" indent="0" algn="l">
               <a:lnSpc>
                 <a:spcPct val="104000"/>
               </a:lnSpc>
@@ -12782,7 +11354,7 @@
           </a:bodyPr>
           <a:lstStyle/>
           <a:p>
-            <a:pPr algn="l" indent="0" marL="0">
+            <a:pPr marL="0" indent="0" algn="l">
               <a:lnSpc>
                 <a:spcPct val="133000"/>
               </a:lnSpc>
@@ -12799,12 +11371,6 @@
               </a:rPr>
               <a:t>This project explores </a:t>
             </a:r>
-            <a:pPr algn="l" indent="0" marL="0">
-              <a:lnSpc>
-                <a:spcPct val="133000"/>
-              </a:lnSpc>
-              <a:buNone/>
-            </a:pPr>
             <a:r>
               <a:rPr lang="en-US" sz="1450" b="1" dirty="0">
                 <a:solidFill>
@@ -12816,12 +11382,6 @@
               </a:rPr>
               <a:t>Post-Disaster Rescue Guidance using Fine-Tuned Vision Language Models (VLMs)</a:t>
             </a:r>
-            <a:pPr algn="l" indent="0" marL="0">
-              <a:lnSpc>
-                <a:spcPct val="133000"/>
-              </a:lnSpc>
-              <a:buNone/>
-            </a:pPr>
             <a:r>
               <a:rPr lang="en-US" sz="1450" dirty="0">
                 <a:solidFill>
@@ -12858,6 +11418,13 @@
           </a:solidFill>
           <a:ln/>
         </p:spPr>
+        <p:txBody>
+          <a:bodyPr/>
+          <a:lstStyle/>
+          <a:p>
+            <a:endParaRPr lang="en-US"/>
+          </a:p>
+        </p:txBody>
       </p:sp>
       <p:sp>
         <p:nvSpPr>
@@ -12880,7 +11447,7 @@
           <a:bodyPr wrap="none" lIns="0" tIns="0" rIns="0" bIns="0" rtlCol="0" anchor="t"/>
           <a:lstStyle/>
           <a:p>
-            <a:pPr algn="l" indent="0" marL="0">
+            <a:pPr marL="0" indent="0" algn="l">
               <a:lnSpc>
                 <a:spcPct val="104000"/>
               </a:lnSpc>
@@ -12924,7 +11491,7 @@
           </a:bodyPr>
           <a:lstStyle/>
           <a:p>
-            <a:pPr algn="l" indent="0" marL="0">
+            <a:pPr marL="0" indent="0" algn="l">
               <a:lnSpc>
                 <a:spcPct val="133000"/>
               </a:lnSpc>
@@ -12991,7 +11558,7 @@
           <a:bodyPr wrap="none" lIns="0" tIns="0" rIns="0" bIns="0" rtlCol="0" anchor="t"/>
           <a:lstStyle/>
           <a:p>
-            <a:pPr algn="l" indent="0" marL="0">
+            <a:pPr marL="0" indent="0" algn="l">
               <a:lnSpc>
                 <a:spcPct val="104000"/>
               </a:lnSpc>
@@ -13033,6 +11600,13 @@
           </a:solidFill>
           <a:ln/>
         </p:spPr>
+        <p:txBody>
+          <a:bodyPr/>
+          <a:lstStyle/>
+          <a:p>
+            <a:endParaRPr lang="en-US"/>
+          </a:p>
+        </p:txBody>
       </p:sp>
       <p:sp>
         <p:nvSpPr>
@@ -13055,7 +11629,7 @@
           <a:bodyPr wrap="none" lIns="0" tIns="0" rIns="0" bIns="0" rtlCol="0" anchor="t"/>
           <a:lstStyle/>
           <a:p>
-            <a:pPr algn="l" indent="0" marL="0">
+            <a:pPr marL="0" indent="0" algn="l">
               <a:lnSpc>
                 <a:spcPct val="104000"/>
               </a:lnSpc>
@@ -13099,7 +11673,7 @@
           </a:bodyPr>
           <a:lstStyle/>
           <a:p>
-            <a:pPr algn="l" indent="0" marL="0">
+            <a:pPr marL="0" indent="0" algn="l">
               <a:lnSpc>
                 <a:spcPct val="120000"/>
               </a:lnSpc>
@@ -13141,7 +11715,7 @@
           <a:bodyPr wrap="none" lIns="0" tIns="0" rIns="0" bIns="0" rtlCol="0" anchor="t"/>
           <a:lstStyle/>
           <a:p>
-            <a:pPr algn="l" indent="0" marL="0">
+            <a:pPr marL="0" indent="0" algn="l">
               <a:lnSpc>
                 <a:spcPct val="104000"/>
               </a:lnSpc>
@@ -13185,7 +11759,7 @@
           </a:bodyPr>
           <a:lstStyle/>
           <a:p>
-            <a:pPr algn="l" indent="0" marL="0">
+            <a:pPr marL="0" indent="0" algn="l">
               <a:lnSpc>
                 <a:spcPct val="120000"/>
               </a:lnSpc>
@@ -13208,14 +11782,14 @@
       </p:sp>
       <p:pic>
         <p:nvPicPr>
-          <p:cNvPr id="8" name="Image 0" descr="preencoded.png">    </p:cNvPr>
+          <p:cNvPr id="8" name="Image 0" descr="preencoded.png"/>
           <p:cNvPicPr>
             <a:picLocks noChangeAspect="1"/>
           </p:cNvPicPr>
           <p:nvPr/>
         </p:nvPicPr>
         <p:blipFill>
-          <a:blip r:embed="rId1"/>
+          <a:blip r:embed="rId3"/>
           <a:stretch>
             <a:fillRect/>
           </a:stretch>
@@ -13251,7 +11825,7 @@
           <a:bodyPr wrap="none" lIns="0" tIns="0" rIns="0" bIns="0" rtlCol="0" anchor="t"/>
           <a:lstStyle/>
           <a:p>
-            <a:pPr algn="l" indent="0" marL="0">
+            <a:pPr marL="0" indent="0" algn="l">
               <a:lnSpc>
                 <a:spcPct val="104000"/>
               </a:lnSpc>
@@ -13293,7 +11867,7 @@
           <a:bodyPr wrap="none" lIns="0" tIns="0" rIns="0" bIns="0" rtlCol="0" anchor="t"/>
           <a:lstStyle/>
           <a:p>
-            <a:pPr algn="l" indent="0" marL="0">
+            <a:pPr marL="0" indent="0" algn="l">
               <a:lnSpc>
                 <a:spcPct val="104000"/>
               </a:lnSpc>
@@ -13335,7 +11909,7 @@
           <a:bodyPr wrap="none" lIns="0" tIns="0" rIns="0" bIns="0" rtlCol="0" anchor="t"/>
           <a:lstStyle/>
           <a:p>
-            <a:pPr algn="l" indent="0" marL="0">
+            <a:pPr marL="0" indent="0" algn="l">
               <a:lnSpc>
                 <a:spcPct val="104000"/>
               </a:lnSpc>
@@ -13377,7 +11951,7 @@
           <a:bodyPr wrap="none" lIns="0" tIns="0" rIns="0" bIns="0" rtlCol="0" anchor="t"/>
           <a:lstStyle/>
           <a:p>
-            <a:pPr algn="l" indent="0" marL="0">
+            <a:pPr marL="0" indent="0" algn="l">
               <a:lnSpc>
                 <a:spcPct val="104000"/>
               </a:lnSpc>
@@ -13444,7 +12018,7 @@
           <a:bodyPr wrap="none" lIns="0" tIns="0" rIns="0" bIns="0" rtlCol="0" anchor="t"/>
           <a:lstStyle/>
           <a:p>
-            <a:pPr algn="l" indent="0" marL="0">
+            <a:pPr marL="0" indent="0" algn="l">
               <a:lnSpc>
                 <a:spcPct val="104000"/>
               </a:lnSpc>
@@ -13486,6 +12060,13 @@
           </a:solidFill>
           <a:ln/>
         </p:spPr>
+        <p:txBody>
+          <a:bodyPr/>
+          <a:lstStyle/>
+          <a:p>
+            <a:endParaRPr lang="en-US"/>
+          </a:p>
+        </p:txBody>
       </p:sp>
       <p:sp>
         <p:nvSpPr>
@@ -13506,20 +12087,27 @@
           </a:solidFill>
           <a:ln/>
         </p:spPr>
+        <p:txBody>
+          <a:bodyPr/>
+          <a:lstStyle/>
+          <a:p>
+            <a:endParaRPr lang="en-US"/>
+          </a:p>
+        </p:txBody>
       </p:sp>
       <p:pic>
         <p:nvPicPr>
-          <p:cNvPr id="5" name="Image 0" descr="preencoded.png">    </p:cNvPr>
+          <p:cNvPr id="5" name="Image 0" descr="preencoded.png"/>
           <p:cNvPicPr>
             <a:picLocks noChangeAspect="1"/>
           </p:cNvPicPr>
           <p:nvPr/>
         </p:nvPicPr>
         <p:blipFill>
-          <a:blip r:embed="rId1">
+          <a:blip>
             <a:extLst>
               <a:ext uri="{96DAC541-7B7A-43D3-8B79-37D633B846F1}">
-                <asvg:svgBlip xmlns:asvg="http://schemas.microsoft.com/office/drawing/2016/SVG/main" r:embed="rId2"/>
+                <asvg:svgBlip xmlns:asvg="http://schemas.microsoft.com/office/drawing/2016/SVG/main" r:embed="rId3"/>
               </a:ext>
             </a:extLst>
           </a:blip>
@@ -13558,7 +12146,7 @@
           <a:bodyPr wrap="none" lIns="0" tIns="0" rIns="0" bIns="0" rtlCol="0" anchor="t"/>
           <a:lstStyle/>
           <a:p>
-            <a:pPr algn="l" indent="0" marL="0">
+            <a:pPr marL="0" indent="0" algn="l">
               <a:lnSpc>
                 <a:spcPct val="104000"/>
               </a:lnSpc>
@@ -13602,7 +12190,7 @@
           </a:bodyPr>
           <a:lstStyle/>
           <a:p>
-            <a:pPr algn="l" indent="0" marL="0">
+            <a:pPr marL="0" indent="0" algn="l">
               <a:lnSpc>
                 <a:spcPct val="133000"/>
               </a:lnSpc>
@@ -13644,6 +12232,13 @@
           </a:solidFill>
           <a:ln/>
         </p:spPr>
+        <p:txBody>
+          <a:bodyPr/>
+          <a:lstStyle/>
+          <a:p>
+            <a:endParaRPr lang="en-US"/>
+          </a:p>
+        </p:txBody>
       </p:sp>
       <p:sp>
         <p:nvSpPr>
@@ -13664,17 +12259,24 @@
           </a:solidFill>
           <a:ln/>
         </p:spPr>
+        <p:txBody>
+          <a:bodyPr/>
+          <a:lstStyle/>
+          <a:p>
+            <a:endParaRPr lang="en-US"/>
+          </a:p>
+        </p:txBody>
       </p:sp>
       <p:pic>
         <p:nvPicPr>
-          <p:cNvPr id="10" name="Image 1" descr="preencoded.png">    </p:cNvPr>
+          <p:cNvPr id="10" name="Image 1" descr="preencoded.png"/>
           <p:cNvPicPr>
             <a:picLocks noChangeAspect="1"/>
           </p:cNvPicPr>
           <p:nvPr/>
         </p:nvPicPr>
         <p:blipFill>
-          <a:blip r:embed="rId3">
+          <a:blip>
             <a:extLst>
               <a:ext uri="{96DAC541-7B7A-43D3-8B79-37D633B846F1}">
                 <asvg:svgBlip xmlns:asvg="http://schemas.microsoft.com/office/drawing/2016/SVG/main" r:embed="rId4"/>
@@ -13716,7 +12318,7 @@
           <a:bodyPr wrap="none" lIns="0" tIns="0" rIns="0" bIns="0" rtlCol="0" anchor="t"/>
           <a:lstStyle/>
           <a:p>
-            <a:pPr algn="l" indent="0" marL="0">
+            <a:pPr marL="0" indent="0" algn="l">
               <a:lnSpc>
                 <a:spcPct val="104000"/>
               </a:lnSpc>
@@ -13760,7 +12362,7 @@
           </a:bodyPr>
           <a:lstStyle/>
           <a:p>
-            <a:pPr algn="l" indent="0" marL="0">
+            <a:pPr marL="0" indent="0" algn="l">
               <a:lnSpc>
                 <a:spcPct val="133000"/>
               </a:lnSpc>
@@ -13802,6 +12404,13 @@
           </a:solidFill>
           <a:ln/>
         </p:spPr>
+        <p:txBody>
+          <a:bodyPr/>
+          <a:lstStyle/>
+          <a:p>
+            <a:endParaRPr lang="en-US"/>
+          </a:p>
+        </p:txBody>
       </p:sp>
       <p:sp>
         <p:nvSpPr>
@@ -13822,20 +12431,27 @@
           </a:solidFill>
           <a:ln/>
         </p:spPr>
+        <p:txBody>
+          <a:bodyPr/>
+          <a:lstStyle/>
+          <a:p>
+            <a:endParaRPr lang="en-US"/>
+          </a:p>
+        </p:txBody>
       </p:sp>
       <p:pic>
         <p:nvPicPr>
-          <p:cNvPr id="15" name="Image 2" descr="preencoded.png">    </p:cNvPr>
+          <p:cNvPr id="15" name="Image 2" descr="preencoded.png"/>
           <p:cNvPicPr>
             <a:picLocks noChangeAspect="1"/>
           </p:cNvPicPr>
           <p:nvPr/>
         </p:nvPicPr>
         <p:blipFill>
-          <a:blip r:embed="rId5">
+          <a:blip>
             <a:extLst>
               <a:ext uri="{96DAC541-7B7A-43D3-8B79-37D633B846F1}">
-                <asvg:svgBlip xmlns:asvg="http://schemas.microsoft.com/office/drawing/2016/SVG/main" r:embed="rId6"/>
+                <asvg:svgBlip xmlns:asvg="http://schemas.microsoft.com/office/drawing/2016/SVG/main" r:embed="rId5"/>
               </a:ext>
             </a:extLst>
           </a:blip>
@@ -13874,7 +12490,7 @@
           <a:bodyPr wrap="none" lIns="0" tIns="0" rIns="0" bIns="0" rtlCol="0" anchor="t"/>
           <a:lstStyle/>
           <a:p>
-            <a:pPr algn="l" indent="0" marL="0">
+            <a:pPr marL="0" indent="0" algn="l">
               <a:lnSpc>
                 <a:spcPct val="104000"/>
               </a:lnSpc>
@@ -13918,7 +12534,7 @@
           </a:bodyPr>
           <a:lstStyle/>
           <a:p>
-            <a:pPr algn="l" indent="0" marL="0">
+            <a:pPr marL="0" indent="0" algn="l">
               <a:lnSpc>
                 <a:spcPct val="133000"/>
               </a:lnSpc>
@@ -13985,7 +12601,7 @@
           <a:bodyPr wrap="none" lIns="0" tIns="0" rIns="0" bIns="0" rtlCol="0" anchor="t"/>
           <a:lstStyle/>
           <a:p>
-            <a:pPr algn="l" indent="0" marL="0">
+            <a:pPr marL="0" indent="0" algn="l">
               <a:lnSpc>
                 <a:spcPct val="104000"/>
               </a:lnSpc>
@@ -14027,7 +12643,7 @@
           <a:bodyPr wrap="none" lIns="0" tIns="0" rIns="0" bIns="0" rtlCol="0" anchor="t"/>
           <a:lstStyle/>
           <a:p>
-            <a:pPr algn="l" indent="0" marL="0">
+            <a:pPr marL="0" indent="0" algn="l">
               <a:lnSpc>
                 <a:spcPct val="127000"/>
               </a:lnSpc>
@@ -14050,17 +12666,17 @@
       </p:sp>
       <p:pic>
         <p:nvPicPr>
-          <p:cNvPr id="4" name="Image 0" descr="preencoded.png">    </p:cNvPr>
+          <p:cNvPr id="4" name="Image 0" descr="preencoded.png"/>
           <p:cNvPicPr>
             <a:picLocks noChangeAspect="1"/>
           </p:cNvPicPr>
           <p:nvPr/>
         </p:nvPicPr>
         <p:blipFill>
-          <a:blip r:embed="rId1">
+          <a:blip>
             <a:extLst>
               <a:ext uri="{96DAC541-7B7A-43D3-8B79-37D633B846F1}">
-                <asvg:svgBlip xmlns:asvg="http://schemas.microsoft.com/office/drawing/2016/SVG/main" r:embed="rId2"/>
+                <asvg:svgBlip xmlns:asvg="http://schemas.microsoft.com/office/drawing/2016/SVG/main" r:embed="rId3"/>
               </a:ext>
             </a:extLst>
           </a:blip>
@@ -14099,7 +12715,7 @@
           <a:bodyPr wrap="none" lIns="0" tIns="0" rIns="0" bIns="0" rtlCol="0" anchor="ctr"/>
           <a:lstStyle/>
           <a:p>
-            <a:pPr algn="ctr" indent="0" marL="0">
+            <a:pPr marL="0" indent="0" algn="ctr">
               <a:lnSpc>
                 <a:spcPct val="100000"/>
               </a:lnSpc>
@@ -14141,7 +12757,7 @@
           <a:bodyPr wrap="none" lIns="0" tIns="0" rIns="0" bIns="0" rtlCol="0" anchor="t"/>
           <a:lstStyle/>
           <a:p>
-            <a:pPr algn="l" indent="0" marL="0">
+            <a:pPr marL="0" indent="0" algn="l">
               <a:lnSpc>
                 <a:spcPct val="104000"/>
               </a:lnSpc>
@@ -14185,7 +12801,7 @@
           </a:bodyPr>
           <a:lstStyle/>
           <a:p>
-            <a:pPr algn="l" indent="0" marL="0">
+            <a:pPr marL="0" indent="0" algn="l">
               <a:lnSpc>
                 <a:spcPct val="127000"/>
               </a:lnSpc>
@@ -14202,12 +12818,6 @@
               </a:rPr>
               <a:t>Upscale low-resolution aerial images using </a:t>
             </a:r>
-            <a:pPr algn="l" indent="0" marL="0">
-              <a:lnSpc>
-                <a:spcPct val="127000"/>
-              </a:lnSpc>
-              <a:buNone/>
-            </a:pPr>
             <a:r>
               <a:rPr lang="en-US" sz="1300" b="1" dirty="0">
                 <a:solidFill>
@@ -14219,12 +12829,6 @@
               </a:rPr>
               <a:t>Super-Resolution</a:t>
             </a:r>
-            <a:pPr algn="l" indent="0" marL="0">
-              <a:lnSpc>
-                <a:spcPct val="127000"/>
-              </a:lnSpc>
-              <a:buNone/>
-            </a:pPr>
             <a:r>
               <a:rPr lang="en-US" sz="1300" dirty="0">
                 <a:solidFill>
@@ -14242,17 +12846,17 @@
       </p:sp>
       <p:pic>
         <p:nvPicPr>
-          <p:cNvPr id="8" name="Image 1" descr="preencoded.png">    </p:cNvPr>
+          <p:cNvPr id="8" name="Image 1" descr="preencoded.png"/>
           <p:cNvPicPr>
             <a:picLocks noChangeAspect="1"/>
           </p:cNvPicPr>
           <p:nvPr/>
         </p:nvPicPr>
         <p:blipFill>
-          <a:blip r:embed="rId3">
+          <a:blip>
             <a:extLst>
               <a:ext uri="{96DAC541-7B7A-43D3-8B79-37D633B846F1}">
-                <asvg:svgBlip xmlns:asvg="http://schemas.microsoft.com/office/drawing/2016/SVG/main" r:embed="rId4"/>
+                <asvg:svgBlip xmlns:asvg="http://schemas.microsoft.com/office/drawing/2016/SVG/main" r:embed="rId3"/>
               </a:ext>
             </a:extLst>
           </a:blip>
@@ -14291,7 +12895,7 @@
           <a:bodyPr wrap="none" lIns="0" tIns="0" rIns="0" bIns="0" rtlCol="0" anchor="ctr"/>
           <a:lstStyle/>
           <a:p>
-            <a:pPr algn="ctr" indent="0" marL="0">
+            <a:pPr marL="0" indent="0" algn="ctr">
               <a:lnSpc>
                 <a:spcPct val="100000"/>
               </a:lnSpc>
@@ -14333,7 +12937,7 @@
           <a:bodyPr wrap="none" lIns="0" tIns="0" rIns="0" bIns="0" rtlCol="0" anchor="t"/>
           <a:lstStyle/>
           <a:p>
-            <a:pPr algn="l" indent="0" marL="0">
+            <a:pPr marL="0" indent="0" algn="l">
               <a:lnSpc>
                 <a:spcPct val="104000"/>
               </a:lnSpc>
@@ -14377,7 +12981,7 @@
           </a:bodyPr>
           <a:lstStyle/>
           <a:p>
-            <a:pPr algn="l" indent="0" marL="0">
+            <a:pPr marL="0" indent="0" algn="l">
               <a:lnSpc>
                 <a:spcPct val="127000"/>
               </a:lnSpc>
@@ -14394,12 +12998,6 @@
               </a:rPr>
               <a:t>Accurately detect and count damaged structures using </a:t>
             </a:r>
-            <a:pPr algn="l" indent="0" marL="0">
-              <a:lnSpc>
-                <a:spcPct val="127000"/>
-              </a:lnSpc>
-              <a:buNone/>
-            </a:pPr>
             <a:r>
               <a:rPr lang="en-US" sz="1300" b="1" dirty="0">
                 <a:solidFill>
@@ -14411,12 +13009,6 @@
               </a:rPr>
               <a:t>semantic segmentation</a:t>
             </a:r>
-            <a:pPr algn="l" indent="0" marL="0">
-              <a:lnSpc>
-                <a:spcPct val="127000"/>
-              </a:lnSpc>
-              <a:buNone/>
-            </a:pPr>
             <a:r>
               <a:rPr lang="en-US" sz="1300" dirty="0">
                 <a:solidFill>
@@ -14434,17 +13026,17 @@
       </p:sp>
       <p:pic>
         <p:nvPicPr>
-          <p:cNvPr id="12" name="Image 2" descr="preencoded.png">    </p:cNvPr>
+          <p:cNvPr id="12" name="Image 2" descr="preencoded.png"/>
           <p:cNvPicPr>
             <a:picLocks noChangeAspect="1"/>
           </p:cNvPicPr>
           <p:nvPr/>
         </p:nvPicPr>
         <p:blipFill>
-          <a:blip r:embed="rId5">
+          <a:blip>
             <a:extLst>
               <a:ext uri="{96DAC541-7B7A-43D3-8B79-37D633B846F1}">
-                <asvg:svgBlip xmlns:asvg="http://schemas.microsoft.com/office/drawing/2016/SVG/main" r:embed="rId6"/>
+                <asvg:svgBlip xmlns:asvg="http://schemas.microsoft.com/office/drawing/2016/SVG/main" r:embed="rId3"/>
               </a:ext>
             </a:extLst>
           </a:blip>
@@ -14483,7 +13075,7 @@
           <a:bodyPr wrap="none" lIns="0" tIns="0" rIns="0" bIns="0" rtlCol="0" anchor="ctr"/>
           <a:lstStyle/>
           <a:p>
-            <a:pPr algn="ctr" indent="0" marL="0">
+            <a:pPr marL="0" indent="0" algn="ctr">
               <a:lnSpc>
                 <a:spcPct val="100000"/>
               </a:lnSpc>
@@ -14525,7 +13117,7 @@
           <a:bodyPr wrap="none" lIns="0" tIns="0" rIns="0" bIns="0" rtlCol="0" anchor="t"/>
           <a:lstStyle/>
           <a:p>
-            <a:pPr algn="l" indent="0" marL="0">
+            <a:pPr marL="0" indent="0" algn="l">
               <a:lnSpc>
                 <a:spcPct val="104000"/>
               </a:lnSpc>
@@ -14569,7 +13161,7 @@
           </a:bodyPr>
           <a:lstStyle/>
           <a:p>
-            <a:pPr algn="l" indent="0" marL="0">
+            <a:pPr marL="0" indent="0" algn="l">
               <a:lnSpc>
                 <a:spcPct val="127000"/>
               </a:lnSpc>
@@ -14586,12 +13178,6 @@
               </a:rPr>
               <a:t>Fine-tune a </a:t>
             </a:r>
-            <a:pPr algn="l" indent="0" marL="0">
-              <a:lnSpc>
-                <a:spcPct val="127000"/>
-              </a:lnSpc>
-              <a:buNone/>
-            </a:pPr>
             <a:r>
               <a:rPr lang="en-US" sz="1300" b="1" dirty="0">
                 <a:solidFill>
@@ -14603,12 +13189,6 @@
               </a:rPr>
               <a:t>Large Vision-Language Model (VLM)</a:t>
             </a:r>
-            <a:pPr algn="l" indent="0" marL="0">
-              <a:lnSpc>
-                <a:spcPct val="127000"/>
-              </a:lnSpc>
-              <a:buNone/>
-            </a:pPr>
             <a:r>
               <a:rPr lang="en-US" sz="1300" dirty="0">
                 <a:solidFill>
@@ -14626,17 +13206,17 @@
       </p:sp>
       <p:pic>
         <p:nvPicPr>
-          <p:cNvPr id="16" name="Image 3" descr="preencoded.png">    </p:cNvPr>
+          <p:cNvPr id="16" name="Image 3" descr="preencoded.png"/>
           <p:cNvPicPr>
             <a:picLocks noChangeAspect="1"/>
           </p:cNvPicPr>
           <p:nvPr/>
         </p:nvPicPr>
         <p:blipFill>
-          <a:blip r:embed="rId7">
+          <a:blip>
             <a:extLst>
               <a:ext uri="{96DAC541-7B7A-43D3-8B79-37D633B846F1}">
-                <asvg:svgBlip xmlns:asvg="http://schemas.microsoft.com/office/drawing/2016/SVG/main" r:embed="rId8"/>
+                <asvg:svgBlip xmlns:asvg="http://schemas.microsoft.com/office/drawing/2016/SVG/main" r:embed="rId3"/>
               </a:ext>
             </a:extLst>
           </a:blip>
@@ -14675,7 +13255,7 @@
           <a:bodyPr wrap="none" lIns="0" tIns="0" rIns="0" bIns="0" rtlCol="0" anchor="ctr"/>
           <a:lstStyle/>
           <a:p>
-            <a:pPr algn="ctr" indent="0" marL="0">
+            <a:pPr marL="0" indent="0" algn="ctr">
               <a:lnSpc>
                 <a:spcPct val="100000"/>
               </a:lnSpc>
@@ -14717,7 +13297,7 @@
           <a:bodyPr wrap="none" lIns="0" tIns="0" rIns="0" bIns="0" rtlCol="0" anchor="t"/>
           <a:lstStyle/>
           <a:p>
-            <a:pPr algn="l" indent="0" marL="0">
+            <a:pPr marL="0" indent="0" algn="l">
               <a:lnSpc>
                 <a:spcPct val="104000"/>
               </a:lnSpc>
@@ -14761,7 +13341,7 @@
           </a:bodyPr>
           <a:lstStyle/>
           <a:p>
-            <a:pPr algn="l" indent="0" marL="0">
+            <a:pPr marL="0" indent="0" algn="l">
               <a:lnSpc>
                 <a:spcPct val="127000"/>
               </a:lnSpc>
@@ -14778,12 +13358,6 @@
               </a:rPr>
               <a:t>Orchestrate VLM outputs into a </a:t>
             </a:r>
-            <a:pPr algn="l" indent="0" marL="0">
-              <a:lnSpc>
-                <a:spcPct val="127000"/>
-              </a:lnSpc>
-              <a:buNone/>
-            </a:pPr>
             <a:r>
               <a:rPr lang="en-US" sz="1300" b="1" dirty="0">
                 <a:solidFill>
@@ -14795,12 +13369,6 @@
               </a:rPr>
               <a:t>multi-agent system</a:t>
             </a:r>
-            <a:pPr algn="l" indent="0" marL="0">
-              <a:lnSpc>
-                <a:spcPct val="127000"/>
-              </a:lnSpc>
-              <a:buNone/>
-            </a:pPr>
             <a:r>
               <a:rPr lang="en-US" sz="1300" dirty="0">
                 <a:solidFill>
@@ -14843,14 +13411,14 @@
       </p:grpSpPr>
       <p:pic>
         <p:nvPicPr>
-          <p:cNvPr id="2" name="Image 0" descr="preencoded.png">    </p:cNvPr>
+          <p:cNvPr id="2" name="Image 0" descr="preencoded.png"/>
           <p:cNvPicPr>
             <a:picLocks noChangeAspect="1"/>
           </p:cNvPicPr>
           <p:nvPr/>
         </p:nvPicPr>
         <p:blipFill>
-          <a:blip r:embed="rId1"/>
+          <a:blip r:embed="rId3"/>
           <a:stretch>
             <a:fillRect/>
           </a:stretch>
@@ -14911,7 +13479,7 @@
           <a:bodyPr wrap="none" lIns="0" tIns="0" rIns="0" bIns="0" rtlCol="0" anchor="t"/>
           <a:lstStyle/>
           <a:p>
-            <a:pPr algn="l" indent="0" marL="0">
+            <a:pPr marL="0" indent="0" algn="l">
               <a:lnSpc>
                 <a:spcPct val="104000"/>
               </a:lnSpc>
@@ -14953,6 +13521,13 @@
           </a:solidFill>
           <a:ln/>
         </p:spPr>
+        <p:txBody>
+          <a:bodyPr/>
+          <a:lstStyle/>
+          <a:p>
+            <a:endParaRPr lang="en-US"/>
+          </a:p>
+        </p:txBody>
       </p:sp>
       <p:sp>
         <p:nvSpPr>
@@ -14975,6 +13550,13 @@
           </a:solidFill>
           <a:ln/>
         </p:spPr>
+        <p:txBody>
+          <a:bodyPr/>
+          <a:lstStyle/>
+          <a:p>
+            <a:endParaRPr lang="en-US"/>
+          </a:p>
+        </p:txBody>
       </p:sp>
       <p:sp>
         <p:nvSpPr>
@@ -14995,6 +13577,13 @@
           </a:solidFill>
           <a:ln/>
         </p:spPr>
+        <p:txBody>
+          <a:bodyPr/>
+          <a:lstStyle/>
+          <a:p>
+            <a:endParaRPr lang="en-US"/>
+          </a:p>
+        </p:txBody>
       </p:sp>
       <p:sp>
         <p:nvSpPr>
@@ -15017,7 +13606,7 @@
           <a:bodyPr wrap="none" lIns="0" tIns="0" rIns="0" bIns="0" rtlCol="0" anchor="t"/>
           <a:lstStyle/>
           <a:p>
-            <a:pPr algn="r" indent="0" marL="0">
+            <a:pPr marL="0" indent="0" algn="r">
               <a:lnSpc>
                 <a:spcPct val="104000"/>
               </a:lnSpc>
@@ -15059,7 +13648,7 @@
           <a:bodyPr wrap="none" lIns="0" tIns="0" rIns="0" bIns="0" rtlCol="0" anchor="t"/>
           <a:lstStyle/>
           <a:p>
-            <a:pPr algn="r" indent="0" marL="0">
+            <a:pPr marL="0" indent="0" algn="r">
               <a:lnSpc>
                 <a:spcPct val="130000"/>
               </a:lnSpc>
@@ -15101,6 +13690,13 @@
           </a:solidFill>
           <a:ln/>
         </p:spPr>
+        <p:txBody>
+          <a:bodyPr/>
+          <a:lstStyle/>
+          <a:p>
+            <a:endParaRPr lang="en-US"/>
+          </a:p>
+        </p:txBody>
       </p:sp>
       <p:sp>
         <p:nvSpPr>
@@ -15121,6 +13717,13 @@
           </a:solidFill>
           <a:ln/>
         </p:spPr>
+        <p:txBody>
+          <a:bodyPr/>
+          <a:lstStyle/>
+          <a:p>
+            <a:endParaRPr lang="en-US"/>
+          </a:p>
+        </p:txBody>
       </p:sp>
       <p:sp>
         <p:nvSpPr>
@@ -15143,7 +13746,7 @@
           <a:bodyPr wrap="none" lIns="0" tIns="0" rIns="0" bIns="0" rtlCol="0" anchor="t"/>
           <a:lstStyle/>
           <a:p>
-            <a:pPr algn="l" indent="0" marL="0">
+            <a:pPr marL="0" indent="0" algn="l">
               <a:lnSpc>
                 <a:spcPct val="104000"/>
               </a:lnSpc>
@@ -15187,7 +13790,7 @@
           </a:bodyPr>
           <a:lstStyle/>
           <a:p>
-            <a:pPr algn="l" indent="0" marL="0">
+            <a:pPr marL="0" indent="0" algn="l">
               <a:lnSpc>
                 <a:spcPct val="130000"/>
               </a:lnSpc>
@@ -15229,6 +13832,13 @@
           </a:solidFill>
           <a:ln/>
         </p:spPr>
+        <p:txBody>
+          <a:bodyPr/>
+          <a:lstStyle/>
+          <a:p>
+            <a:endParaRPr lang="en-US"/>
+          </a:p>
+        </p:txBody>
       </p:sp>
       <p:sp>
         <p:nvSpPr>
@@ -15249,6 +13859,13 @@
           </a:solidFill>
           <a:ln/>
         </p:spPr>
+        <p:txBody>
+          <a:bodyPr/>
+          <a:lstStyle/>
+          <a:p>
+            <a:endParaRPr lang="en-US"/>
+          </a:p>
+        </p:txBody>
       </p:sp>
       <p:sp>
         <p:nvSpPr>
@@ -15271,7 +13888,7 @@
           <a:bodyPr wrap="none" lIns="0" tIns="0" rIns="0" bIns="0" rtlCol="0" anchor="t"/>
           <a:lstStyle/>
           <a:p>
-            <a:pPr algn="r" indent="0" marL="0">
+            <a:pPr marL="0" indent="0" algn="r">
               <a:lnSpc>
                 <a:spcPct val="104000"/>
               </a:lnSpc>
@@ -15315,7 +13932,7 @@
           </a:bodyPr>
           <a:lstStyle/>
           <a:p>
-            <a:pPr algn="r" indent="0" marL="0">
+            <a:pPr marL="0" indent="0" algn="r">
               <a:lnSpc>
                 <a:spcPct val="130000"/>
               </a:lnSpc>
@@ -15357,6 +13974,13 @@
           </a:solidFill>
           <a:ln/>
         </p:spPr>
+        <p:txBody>
+          <a:bodyPr/>
+          <a:lstStyle/>
+          <a:p>
+            <a:endParaRPr lang="en-US"/>
+          </a:p>
+        </p:txBody>
       </p:sp>
       <p:sp>
         <p:nvSpPr>
@@ -15377,6 +14001,13 @@
           </a:solidFill>
           <a:ln/>
         </p:spPr>
+        <p:txBody>
+          <a:bodyPr/>
+          <a:lstStyle/>
+          <a:p>
+            <a:endParaRPr lang="en-US"/>
+          </a:p>
+        </p:txBody>
       </p:sp>
       <p:sp>
         <p:nvSpPr>
@@ -15399,7 +14030,7 @@
           <a:bodyPr wrap="none" lIns="0" tIns="0" rIns="0" bIns="0" rtlCol="0" anchor="t"/>
           <a:lstStyle/>
           <a:p>
-            <a:pPr algn="l" indent="0" marL="0">
+            <a:pPr marL="0" indent="0" algn="l">
               <a:lnSpc>
                 <a:spcPct val="104000"/>
               </a:lnSpc>
@@ -15443,7 +14074,7 @@
           </a:bodyPr>
           <a:lstStyle/>
           <a:p>
-            <a:pPr algn="l" indent="0" marL="0">
+            <a:pPr marL="0" indent="0" algn="l">
               <a:lnSpc>
                 <a:spcPct val="130000"/>
               </a:lnSpc>
@@ -15510,7 +14141,7 @@
           <a:bodyPr wrap="none" lIns="0" tIns="0" rIns="0" bIns="0" rtlCol="0" anchor="t"/>
           <a:lstStyle/>
           <a:p>
-            <a:pPr algn="l" indent="0" marL="0">
+            <a:pPr marL="0" indent="0" algn="l">
               <a:lnSpc>
                 <a:spcPct val="104000"/>
               </a:lnSpc>
@@ -15552,7 +14183,7 @@
           <a:bodyPr wrap="none" lIns="0" tIns="0" rIns="0" bIns="0" rtlCol="0" anchor="t"/>
           <a:lstStyle/>
           <a:p>
-            <a:pPr algn="l" indent="0" marL="0">
+            <a:pPr marL="0" indent="0" algn="l">
               <a:lnSpc>
                 <a:spcPct val="133000"/>
               </a:lnSpc>
@@ -15575,227 +14206,7 @@
       </p:sp>
       <p:pic>
         <p:nvPicPr>
-          <p:cNvPr id="4" name="Image 0" descr="preencoded.png">    </p:cNvPr>
-          <p:cNvPicPr>
-            <a:picLocks noChangeAspect="1"/>
-          </p:cNvPicPr>
-          <p:nvPr/>
-        </p:nvPicPr>
-        <p:blipFill>
-          <a:blip r:embed="rId1"/>
-          <a:stretch>
-            <a:fillRect/>
-          </a:stretch>
-        </p:blipFill>
-        <p:spPr>
-          <a:xfrm>
-            <a:off x="661475" y="2023269"/>
-            <a:ext cx="5434373" cy="756047"/>
-          </a:xfrm>
-          <a:prstGeom prst="rect">
-            <a:avLst/>
-          </a:prstGeom>
-        </p:spPr>
-      </p:pic>
-      <p:sp>
-        <p:nvSpPr>
-          <p:cNvPr id="5" name="Text 2"/>
-          <p:cNvSpPr/>
-          <p:nvPr/>
-        </p:nvSpPr>
-        <p:spPr>
-          <a:xfrm>
-            <a:off x="850482" y="2968327"/>
-            <a:ext cx="5056359" cy="295275"/>
-          </a:xfrm>
-          <a:prstGeom prst="rect">
-            <a:avLst/>
-          </a:prstGeom>
-          <a:noFill/>
-          <a:ln/>
-        </p:spPr>
-        <p:txBody>
-          <a:bodyPr wrap="none" lIns="0" tIns="0" rIns="0" bIns="0" rtlCol="0" anchor="t"/>
-          <a:lstStyle/>
-          <a:p>
-            <a:pPr algn="l" indent="0" marL="0">
-              <a:lnSpc>
-                <a:spcPct val="104000"/>
-              </a:lnSpc>
-              <a:buNone/>
-            </a:pPr>
-            <a:r>
-              <a:rPr lang="en-US" sz="1850" b="1" dirty="0">
-                <a:solidFill>
-                  <a:srgbClr val="C2C4B5"/>
-                </a:solidFill>
-                <a:latin typeface="Outfit Bold" pitchFamily="34" charset="0"/>
-                <a:ea typeface="Outfit Bold" pitchFamily="34" charset="-122"/>
-                <a:cs typeface="Outfit Bold" pitchFamily="34" charset="-120"/>
-              </a:rPr>
-              <a:t>The Goal</a:t>
-            </a:r>
-            <a:endParaRPr lang="en-US" sz="1850" dirty="0"/>
-          </a:p>
-        </p:txBody>
-      </p:sp>
-      <p:sp>
-        <p:nvSpPr>
-          <p:cNvPr id="6" name="Text 3"/>
-          <p:cNvSpPr/>
-          <p:nvPr/>
-        </p:nvSpPr>
-        <p:spPr>
-          <a:xfrm>
-            <a:off x="850482" y="3377009"/>
-            <a:ext cx="5056359" cy="604838"/>
-          </a:xfrm>
-          <a:prstGeom prst="rect">
-            <a:avLst/>
-          </a:prstGeom>
-          <a:noFill/>
-          <a:ln/>
-        </p:spPr>
-        <p:txBody>
-          <a:bodyPr wrap="square" lIns="0" tIns="0" rIns="0" bIns="0" rtlCol="0" anchor="t">
-            <a:normAutofit/>
-          </a:bodyPr>
-          <a:lstStyle/>
-          <a:p>
-            <a:pPr algn="l" indent="0" marL="0">
-              <a:lnSpc>
-                <a:spcPct val="133000"/>
-              </a:lnSpc>
-              <a:buNone/>
-            </a:pPr>
-            <a:r>
-              <a:rPr lang="en-US" sz="1450" dirty="0">
-                <a:solidFill>
-                  <a:srgbClr val="C2C4B5"/>
-                </a:solidFill>
-                <a:latin typeface="Bitter" pitchFamily="34" charset="0"/>
-                <a:ea typeface="Bitter" pitchFamily="34" charset="-122"/>
-                <a:cs typeface="Bitter" pitchFamily="34" charset="-120"/>
-              </a:rPr>
-              <a:t>Rapidly assess disaster zones to deploy emergency resources</a:t>
-            </a:r>
-            <a:endParaRPr lang="en-US" sz="1450" dirty="0"/>
-          </a:p>
-        </p:txBody>
-      </p:sp>
-      <p:pic>
-        <p:nvPicPr>
-          <p:cNvPr id="7" name="Image 1" descr="preencoded.png">    </p:cNvPr>
-          <p:cNvPicPr>
-            <a:picLocks noChangeAspect="1"/>
-          </p:cNvPicPr>
-          <p:nvPr/>
-        </p:nvPicPr>
-        <p:blipFill>
-          <a:blip r:embed="rId2"/>
-          <a:stretch>
-            <a:fillRect/>
-          </a:stretch>
-        </p:blipFill>
-        <p:spPr>
-          <a:xfrm>
-            <a:off x="6095848" y="2023269"/>
-            <a:ext cx="5434373" cy="756047"/>
-          </a:xfrm>
-          <a:prstGeom prst="rect">
-            <a:avLst/>
-          </a:prstGeom>
-        </p:spPr>
-      </p:pic>
-      <p:sp>
-        <p:nvSpPr>
-          <p:cNvPr id="8" name="Text 4"/>
-          <p:cNvSpPr/>
-          <p:nvPr/>
-        </p:nvSpPr>
-        <p:spPr>
-          <a:xfrm>
-            <a:off x="6284854" y="2968327"/>
-            <a:ext cx="5056359" cy="295275"/>
-          </a:xfrm>
-          <a:prstGeom prst="rect">
-            <a:avLst/>
-          </a:prstGeom>
-          <a:noFill/>
-          <a:ln/>
-        </p:spPr>
-        <p:txBody>
-          <a:bodyPr wrap="none" lIns="0" tIns="0" rIns="0" bIns="0" rtlCol="0" anchor="t"/>
-          <a:lstStyle/>
-          <a:p>
-            <a:pPr algn="l" indent="0" marL="0">
-              <a:lnSpc>
-                <a:spcPct val="104000"/>
-              </a:lnSpc>
-              <a:buNone/>
-            </a:pPr>
-            <a:r>
-              <a:rPr lang="en-US" sz="1850" b="1" dirty="0">
-                <a:solidFill>
-                  <a:srgbClr val="C2C4B5"/>
-                </a:solidFill>
-                <a:latin typeface="Outfit Bold" pitchFamily="34" charset="0"/>
-                <a:ea typeface="Outfit Bold" pitchFamily="34" charset="-122"/>
-                <a:cs typeface="Outfit Bold" pitchFamily="34" charset="-120"/>
-              </a:rPr>
-              <a:t>The Problem</a:t>
-            </a:r>
-            <a:endParaRPr lang="en-US" sz="1850" dirty="0"/>
-          </a:p>
-        </p:txBody>
-      </p:sp>
-      <p:sp>
-        <p:nvSpPr>
-          <p:cNvPr id="9" name="Text 5"/>
-          <p:cNvSpPr/>
-          <p:nvPr/>
-        </p:nvSpPr>
-        <p:spPr>
-          <a:xfrm>
-            <a:off x="6284854" y="3377009"/>
-            <a:ext cx="5056359" cy="604838"/>
-          </a:xfrm>
-          <a:prstGeom prst="rect">
-            <a:avLst/>
-          </a:prstGeom>
-          <a:noFill/>
-          <a:ln/>
-        </p:spPr>
-        <p:txBody>
-          <a:bodyPr wrap="square" lIns="0" tIns="0" rIns="0" bIns="0" rtlCol="0" anchor="t">
-            <a:normAutofit/>
-          </a:bodyPr>
-          <a:lstStyle/>
-          <a:p>
-            <a:pPr algn="l" indent="0" marL="0">
-              <a:lnSpc>
-                <a:spcPct val="133000"/>
-              </a:lnSpc>
-              <a:buNone/>
-            </a:pPr>
-            <a:r>
-              <a:rPr lang="en-US" sz="1450" dirty="0">
-                <a:solidFill>
-                  <a:srgbClr val="C2C4B5"/>
-                </a:solidFill>
-                <a:latin typeface="Bitter" pitchFamily="34" charset="0"/>
-                <a:ea typeface="Bitter" pitchFamily="34" charset="-122"/>
-                <a:cs typeface="Bitter" pitchFamily="34" charset="-120"/>
-              </a:rPr>
-              <a:t>VLMs excel at reasoning but struggle with precise geometric mapping</a:t>
-            </a:r>
-            <a:endParaRPr lang="en-US" sz="1450" dirty="0"/>
-          </a:p>
-        </p:txBody>
-      </p:sp>
-      <p:pic>
-        <p:nvPicPr>
-          <p:cNvPr id="10" name="Image 2" descr="preencoded.png">    </p:cNvPr>
+          <p:cNvPr id="4" name="Image 0" descr="preencoded.png"/>
           <p:cNvPicPr>
             <a:picLocks noChangeAspect="1"/>
           </p:cNvPicPr>
@@ -15809,7 +14220,7 @@
         </p:blipFill>
         <p:spPr>
           <a:xfrm>
-            <a:off x="661475" y="4170859"/>
+            <a:off x="661475" y="2023269"/>
             <a:ext cx="5434373" cy="756047"/>
           </a:xfrm>
           <a:prstGeom prst="rect">
@@ -15819,13 +14230,13 @@
       </p:pic>
       <p:sp>
         <p:nvSpPr>
-          <p:cNvPr id="11" name="Text 6"/>
-          <p:cNvSpPr/>
-          <p:nvPr/>
-        </p:nvSpPr>
-        <p:spPr>
-          <a:xfrm>
-            <a:off x="850482" y="5115917"/>
+          <p:cNvPr id="5" name="Text 2"/>
+          <p:cNvSpPr/>
+          <p:nvPr/>
+        </p:nvSpPr>
+        <p:spPr>
+          <a:xfrm>
+            <a:off x="850482" y="2968327"/>
             <a:ext cx="5056359" cy="295275"/>
           </a:xfrm>
           <a:prstGeom prst="rect">
@@ -15838,7 +14249,7 @@
           <a:bodyPr wrap="none" lIns="0" tIns="0" rIns="0" bIns="0" rtlCol="0" anchor="t"/>
           <a:lstStyle/>
           <a:p>
-            <a:pPr algn="l" indent="0" marL="0">
+            <a:pPr marL="0" indent="0" algn="l">
               <a:lnSpc>
                 <a:spcPct val="104000"/>
               </a:lnSpc>
@@ -15853,7 +14264,7 @@
                 <a:ea typeface="Outfit Bold" pitchFamily="34" charset="-122"/>
                 <a:cs typeface="Outfit Bold" pitchFamily="34" charset="-120"/>
               </a:rPr>
-              <a:t>The Spatial Bottleneck</a:t>
+              <a:t>The Goal</a:t>
             </a:r>
             <a:endParaRPr lang="en-US" sz="1850" dirty="0"/>
           </a:p>
@@ -15861,13 +14272,13 @@
       </p:sp>
       <p:sp>
         <p:nvSpPr>
-          <p:cNvPr id="12" name="Text 7"/>
-          <p:cNvSpPr/>
-          <p:nvPr/>
-        </p:nvSpPr>
-        <p:spPr>
-          <a:xfrm>
-            <a:off x="850482" y="5524599"/>
+          <p:cNvPr id="6" name="Text 3"/>
+          <p:cNvSpPr/>
+          <p:nvPr/>
+        </p:nvSpPr>
+        <p:spPr>
+          <a:xfrm>
+            <a:off x="850482" y="3377009"/>
             <a:ext cx="5056359" cy="604838"/>
           </a:xfrm>
           <a:prstGeom prst="rect">
@@ -15882,7 +14293,7 @@
           </a:bodyPr>
           <a:lstStyle/>
           <a:p>
-            <a:pPr algn="l" indent="0" marL="0">
+            <a:pPr marL="0" indent="0" algn="l">
               <a:lnSpc>
                 <a:spcPct val="133000"/>
               </a:lnSpc>
@@ -15897,7 +14308,7 @@
                 <a:ea typeface="Bitter" pitchFamily="34" charset="-122"/>
                 <a:cs typeface="Bitter" pitchFamily="34" charset="-120"/>
               </a:rPr>
-              <a:t>VLMs can identify collapsed buildings but cannot generate exact geographical bounding boxes</a:t>
+              <a:t>Rapidly assess disaster zones to deploy emergency resources</a:t>
             </a:r>
             <a:endParaRPr lang="en-US" sz="1450" dirty="0"/>
           </a:p>
@@ -15905,7 +14316,7 @@
       </p:sp>
       <p:pic>
         <p:nvPicPr>
-          <p:cNvPr id="13" name="Image 3" descr="preencoded.png">    </p:cNvPr>
+          <p:cNvPr id="7" name="Image 1" descr="preencoded.png"/>
           <p:cNvPicPr>
             <a:picLocks noChangeAspect="1"/>
           </p:cNvPicPr>
@@ -15919,7 +14330,7 @@
         </p:blipFill>
         <p:spPr>
           <a:xfrm>
-            <a:off x="6095848" y="4170859"/>
+            <a:off x="6095848" y="2023269"/>
             <a:ext cx="5434373" cy="756047"/>
           </a:xfrm>
           <a:prstGeom prst="rect">
@@ -15929,13 +14340,13 @@
       </p:pic>
       <p:sp>
         <p:nvSpPr>
-          <p:cNvPr id="14" name="Text 8"/>
-          <p:cNvSpPr/>
-          <p:nvPr/>
-        </p:nvSpPr>
-        <p:spPr>
-          <a:xfrm>
-            <a:off x="6284854" y="5115917"/>
+          <p:cNvPr id="8" name="Text 4"/>
+          <p:cNvSpPr/>
+          <p:nvPr/>
+        </p:nvSpPr>
+        <p:spPr>
+          <a:xfrm>
+            <a:off x="6284854" y="2968327"/>
             <a:ext cx="5056359" cy="295275"/>
           </a:xfrm>
           <a:prstGeom prst="rect">
@@ -15948,7 +14359,7 @@
           <a:bodyPr wrap="none" lIns="0" tIns="0" rIns="0" bIns="0" rtlCol="0" anchor="t"/>
           <a:lstStyle/>
           <a:p>
-            <a:pPr algn="l" indent="0" marL="0">
+            <a:pPr marL="0" indent="0" algn="l">
               <a:lnSpc>
                 <a:spcPct val="104000"/>
               </a:lnSpc>
@@ -15963,7 +14374,7 @@
                 <a:ea typeface="Outfit Bold" pitchFamily="34" charset="-122"/>
                 <a:cs typeface="Outfit Bold" pitchFamily="34" charset="-120"/>
               </a:rPr>
-              <a:t>The Risk</a:t>
+              <a:t>The Problem</a:t>
             </a:r>
             <a:endParaRPr lang="en-US" sz="1850" dirty="0"/>
           </a:p>
@@ -15971,13 +14382,13 @@
       </p:sp>
       <p:sp>
         <p:nvSpPr>
-          <p:cNvPr id="15" name="Text 9"/>
-          <p:cNvSpPr/>
-          <p:nvPr/>
-        </p:nvSpPr>
-        <p:spPr>
-          <a:xfrm>
-            <a:off x="6284854" y="5524599"/>
+          <p:cNvPr id="9" name="Text 5"/>
+          <p:cNvSpPr/>
+          <p:nvPr/>
+        </p:nvSpPr>
+        <p:spPr>
+          <a:xfrm>
+            <a:off x="6284854" y="3377009"/>
             <a:ext cx="5056359" cy="604838"/>
           </a:xfrm>
           <a:prstGeom prst="rect">
@@ -15992,7 +14403,227 @@
           </a:bodyPr>
           <a:lstStyle/>
           <a:p>
-            <a:pPr algn="l" indent="0" marL="0">
+            <a:pPr marL="0" indent="0" algn="l">
+              <a:lnSpc>
+                <a:spcPct val="133000"/>
+              </a:lnSpc>
+              <a:buNone/>
+            </a:pPr>
+            <a:r>
+              <a:rPr lang="en-US" sz="1450" dirty="0">
+                <a:solidFill>
+                  <a:srgbClr val="C2C4B5"/>
+                </a:solidFill>
+                <a:latin typeface="Bitter" pitchFamily="34" charset="0"/>
+                <a:ea typeface="Bitter" pitchFamily="34" charset="-122"/>
+                <a:cs typeface="Bitter" pitchFamily="34" charset="-120"/>
+              </a:rPr>
+              <a:t>VLMs excel at reasoning but struggle with precise geometric mapping</a:t>
+            </a:r>
+            <a:endParaRPr lang="en-US" sz="1450" dirty="0"/>
+          </a:p>
+        </p:txBody>
+      </p:sp>
+      <p:pic>
+        <p:nvPicPr>
+          <p:cNvPr id="10" name="Image 2" descr="preencoded.png"/>
+          <p:cNvPicPr>
+            <a:picLocks noChangeAspect="1"/>
+          </p:cNvPicPr>
+          <p:nvPr/>
+        </p:nvPicPr>
+        <p:blipFill>
+          <a:blip r:embed="rId5"/>
+          <a:stretch>
+            <a:fillRect/>
+          </a:stretch>
+        </p:blipFill>
+        <p:spPr>
+          <a:xfrm>
+            <a:off x="661475" y="4170859"/>
+            <a:ext cx="5434373" cy="756047"/>
+          </a:xfrm>
+          <a:prstGeom prst="rect">
+            <a:avLst/>
+          </a:prstGeom>
+        </p:spPr>
+      </p:pic>
+      <p:sp>
+        <p:nvSpPr>
+          <p:cNvPr id="11" name="Text 6"/>
+          <p:cNvSpPr/>
+          <p:nvPr/>
+        </p:nvSpPr>
+        <p:spPr>
+          <a:xfrm>
+            <a:off x="850482" y="5115917"/>
+            <a:ext cx="5056359" cy="295275"/>
+          </a:xfrm>
+          <a:prstGeom prst="rect">
+            <a:avLst/>
+          </a:prstGeom>
+          <a:noFill/>
+          <a:ln/>
+        </p:spPr>
+        <p:txBody>
+          <a:bodyPr wrap="none" lIns="0" tIns="0" rIns="0" bIns="0" rtlCol="0" anchor="t"/>
+          <a:lstStyle/>
+          <a:p>
+            <a:pPr marL="0" indent="0" algn="l">
+              <a:lnSpc>
+                <a:spcPct val="104000"/>
+              </a:lnSpc>
+              <a:buNone/>
+            </a:pPr>
+            <a:r>
+              <a:rPr lang="en-US" sz="1850" b="1" dirty="0">
+                <a:solidFill>
+                  <a:srgbClr val="C2C4B5"/>
+                </a:solidFill>
+                <a:latin typeface="Outfit Bold" pitchFamily="34" charset="0"/>
+                <a:ea typeface="Outfit Bold" pitchFamily="34" charset="-122"/>
+                <a:cs typeface="Outfit Bold" pitchFamily="34" charset="-120"/>
+              </a:rPr>
+              <a:t>The Spatial Bottleneck</a:t>
+            </a:r>
+            <a:endParaRPr lang="en-US" sz="1850" dirty="0"/>
+          </a:p>
+        </p:txBody>
+      </p:sp>
+      <p:sp>
+        <p:nvSpPr>
+          <p:cNvPr id="12" name="Text 7"/>
+          <p:cNvSpPr/>
+          <p:nvPr/>
+        </p:nvSpPr>
+        <p:spPr>
+          <a:xfrm>
+            <a:off x="850482" y="5524599"/>
+            <a:ext cx="5056359" cy="604838"/>
+          </a:xfrm>
+          <a:prstGeom prst="rect">
+            <a:avLst/>
+          </a:prstGeom>
+          <a:noFill/>
+          <a:ln/>
+        </p:spPr>
+        <p:txBody>
+          <a:bodyPr wrap="square" lIns="0" tIns="0" rIns="0" bIns="0" rtlCol="0" anchor="t">
+            <a:normAutofit/>
+          </a:bodyPr>
+          <a:lstStyle/>
+          <a:p>
+            <a:pPr marL="0" indent="0" algn="l">
+              <a:lnSpc>
+                <a:spcPct val="133000"/>
+              </a:lnSpc>
+              <a:buNone/>
+            </a:pPr>
+            <a:r>
+              <a:rPr lang="en-US" sz="1450" dirty="0">
+                <a:solidFill>
+                  <a:srgbClr val="C2C4B5"/>
+                </a:solidFill>
+                <a:latin typeface="Bitter" pitchFamily="34" charset="0"/>
+                <a:ea typeface="Bitter" pitchFamily="34" charset="-122"/>
+                <a:cs typeface="Bitter" pitchFamily="34" charset="-120"/>
+              </a:rPr>
+              <a:t>VLMs can identify collapsed buildings but cannot generate exact geographical bounding boxes</a:t>
+            </a:r>
+            <a:endParaRPr lang="en-US" sz="1450" dirty="0"/>
+          </a:p>
+        </p:txBody>
+      </p:sp>
+      <p:pic>
+        <p:nvPicPr>
+          <p:cNvPr id="13" name="Image 3" descr="preencoded.png"/>
+          <p:cNvPicPr>
+            <a:picLocks noChangeAspect="1"/>
+          </p:cNvPicPr>
+          <p:nvPr/>
+        </p:nvPicPr>
+        <p:blipFill>
+          <a:blip r:embed="rId6"/>
+          <a:stretch>
+            <a:fillRect/>
+          </a:stretch>
+        </p:blipFill>
+        <p:spPr>
+          <a:xfrm>
+            <a:off x="6095848" y="4170859"/>
+            <a:ext cx="5434373" cy="756047"/>
+          </a:xfrm>
+          <a:prstGeom prst="rect">
+            <a:avLst/>
+          </a:prstGeom>
+        </p:spPr>
+      </p:pic>
+      <p:sp>
+        <p:nvSpPr>
+          <p:cNvPr id="14" name="Text 8"/>
+          <p:cNvSpPr/>
+          <p:nvPr/>
+        </p:nvSpPr>
+        <p:spPr>
+          <a:xfrm>
+            <a:off x="6284854" y="5115917"/>
+            <a:ext cx="5056359" cy="295275"/>
+          </a:xfrm>
+          <a:prstGeom prst="rect">
+            <a:avLst/>
+          </a:prstGeom>
+          <a:noFill/>
+          <a:ln/>
+        </p:spPr>
+        <p:txBody>
+          <a:bodyPr wrap="none" lIns="0" tIns="0" rIns="0" bIns="0" rtlCol="0" anchor="t"/>
+          <a:lstStyle/>
+          <a:p>
+            <a:pPr marL="0" indent="0" algn="l">
+              <a:lnSpc>
+                <a:spcPct val="104000"/>
+              </a:lnSpc>
+              <a:buNone/>
+            </a:pPr>
+            <a:r>
+              <a:rPr lang="en-US" sz="1850" b="1" dirty="0">
+                <a:solidFill>
+                  <a:srgbClr val="C2C4B5"/>
+                </a:solidFill>
+                <a:latin typeface="Outfit Bold" pitchFamily="34" charset="0"/>
+                <a:ea typeface="Outfit Bold" pitchFamily="34" charset="-122"/>
+                <a:cs typeface="Outfit Bold" pitchFamily="34" charset="-120"/>
+              </a:rPr>
+              <a:t>The Risk</a:t>
+            </a:r>
+            <a:endParaRPr lang="en-US" sz="1850" dirty="0"/>
+          </a:p>
+        </p:txBody>
+      </p:sp>
+      <p:sp>
+        <p:nvSpPr>
+          <p:cNvPr id="15" name="Text 9"/>
+          <p:cNvSpPr/>
+          <p:nvPr/>
+        </p:nvSpPr>
+        <p:spPr>
+          <a:xfrm>
+            <a:off x="6284854" y="5524599"/>
+            <a:ext cx="5056359" cy="604838"/>
+          </a:xfrm>
+          <a:prstGeom prst="rect">
+            <a:avLst/>
+          </a:prstGeom>
+          <a:noFill/>
+          <a:ln/>
+        </p:spPr>
+        <p:txBody>
+          <a:bodyPr wrap="square" lIns="0" tIns="0" rIns="0" bIns="0" rtlCol="0" anchor="t">
+            <a:normAutofit/>
+          </a:bodyPr>
+          <a:lstStyle/>
+          <a:p>
+            <a:pPr marL="0" indent="0" algn="l">
               <a:lnSpc>
                 <a:spcPct val="133000"/>
               </a:lnSpc>
@@ -16059,7 +14690,7 @@
           <a:bodyPr wrap="none" lIns="0" tIns="0" rIns="0" bIns="0" rtlCol="0" anchor="t"/>
           <a:lstStyle/>
           <a:p>
-            <a:pPr algn="l" indent="0" marL="0">
+            <a:pPr marL="0" indent="0" algn="l">
               <a:lnSpc>
                 <a:spcPct val="104000"/>
               </a:lnSpc>
@@ -16082,17 +14713,17 @@
       </p:sp>
       <p:pic>
         <p:nvPicPr>
-          <p:cNvPr id="3" name="Image 0" descr="preencoded.png">    </p:cNvPr>
+          <p:cNvPr id="3" name="Image 0" descr="preencoded.png"/>
           <p:cNvPicPr>
             <a:picLocks noChangeAspect="1"/>
           </p:cNvPicPr>
           <p:nvPr/>
         </p:nvPicPr>
         <p:blipFill>
-          <a:blip r:embed="rId1">
+          <a:blip>
             <a:extLst>
               <a:ext uri="{96DAC541-7B7A-43D3-8B79-37D633B846F1}">
-                <asvg:svgBlip xmlns:asvg="http://schemas.microsoft.com/office/drawing/2016/SVG/main" r:embed="rId2"/>
+                <asvg:svgBlip xmlns:asvg="http://schemas.microsoft.com/office/drawing/2016/SVG/main" r:embed="rId3"/>
               </a:ext>
             </a:extLst>
           </a:blip>
@@ -16131,7 +14762,7 @@
           <a:bodyPr wrap="none" lIns="0" tIns="0" rIns="0" bIns="0" rtlCol="0" anchor="t"/>
           <a:lstStyle/>
           <a:p>
-            <a:pPr algn="l" indent="0" marL="0">
+            <a:pPr marL="0" indent="0" algn="l">
               <a:lnSpc>
                 <a:spcPct val="104000"/>
               </a:lnSpc>
@@ -16175,7 +14806,7 @@
           </a:bodyPr>
           <a:lstStyle/>
           <a:p>
-            <a:pPr algn="l" indent="0" marL="0">
+            <a:pPr marL="0" indent="0" algn="l">
               <a:lnSpc>
                 <a:spcPct val="133000"/>
               </a:lnSpc>
@@ -16198,14 +14829,14 @@
       </p:sp>
       <p:pic>
         <p:nvPicPr>
-          <p:cNvPr id="6" name="Image 1" descr="preencoded.png">    </p:cNvPr>
+          <p:cNvPr id="6" name="Image 1" descr="preencoded.png"/>
           <p:cNvPicPr>
             <a:picLocks noChangeAspect="1"/>
           </p:cNvPicPr>
           <p:nvPr/>
         </p:nvPicPr>
         <p:blipFill>
-          <a:blip r:embed="rId3">
+          <a:blip>
             <a:extLst>
               <a:ext uri="{96DAC541-7B7A-43D3-8B79-37D633B846F1}">
                 <asvg:svgBlip xmlns:asvg="http://schemas.microsoft.com/office/drawing/2016/SVG/main" r:embed="rId4"/>
@@ -16247,7 +14878,7 @@
           <a:bodyPr wrap="none" lIns="0" tIns="0" rIns="0" bIns="0" rtlCol="0" anchor="t"/>
           <a:lstStyle/>
           <a:p>
-            <a:pPr algn="l" indent="0" marL="0">
+            <a:pPr marL="0" indent="0" algn="l">
               <a:lnSpc>
                 <a:spcPct val="104000"/>
               </a:lnSpc>
@@ -16291,7 +14922,7 @@
           </a:bodyPr>
           <a:lstStyle/>
           <a:p>
-            <a:pPr algn="l" indent="0" marL="0">
+            <a:pPr marL="0" indent="0" algn="l">
               <a:lnSpc>
                 <a:spcPct val="133000"/>
               </a:lnSpc>
@@ -16314,14 +14945,130 @@
       </p:sp>
       <p:pic>
         <p:nvPicPr>
-          <p:cNvPr id="9" name="Image 2" descr="preencoded.png">    </p:cNvPr>
+          <p:cNvPr id="9" name="Image 2" descr="preencoded.png"/>
           <p:cNvPicPr>
             <a:picLocks noChangeAspect="1"/>
           </p:cNvPicPr>
           <p:nvPr/>
         </p:nvPicPr>
         <p:blipFill>
-          <a:blip r:embed="rId5">
+          <a:blip>
+            <a:extLst>
+              <a:ext uri="{96DAC541-7B7A-43D3-8B79-37D633B846F1}">
+                <asvg:svgBlip xmlns:asvg="http://schemas.microsoft.com/office/drawing/2016/SVG/main" r:embed="rId5"/>
+              </a:ext>
+            </a:extLst>
+          </a:blip>
+          <a:stretch>
+            <a:fillRect/>
+          </a:stretch>
+        </p:blipFill>
+        <p:spPr>
+          <a:xfrm>
+            <a:off x="8064794" y="1548408"/>
+            <a:ext cx="472468" cy="472480"/>
+          </a:xfrm>
+          <a:prstGeom prst="rect">
+            <a:avLst/>
+          </a:prstGeom>
+        </p:spPr>
+      </p:pic>
+      <p:sp>
+        <p:nvSpPr>
+          <p:cNvPr id="10" name="Text 5"/>
+          <p:cNvSpPr/>
+          <p:nvPr/>
+        </p:nvSpPr>
+        <p:spPr>
+          <a:xfrm>
+            <a:off x="8064794" y="2257127"/>
+            <a:ext cx="3465426" cy="295275"/>
+          </a:xfrm>
+          <a:prstGeom prst="rect">
+            <a:avLst/>
+          </a:prstGeom>
+          <a:noFill/>
+          <a:ln/>
+        </p:spPr>
+        <p:txBody>
+          <a:bodyPr wrap="none" lIns="0" tIns="0" rIns="0" bIns="0" rtlCol="0" anchor="t"/>
+          <a:lstStyle/>
+          <a:p>
+            <a:pPr marL="0" indent="0" algn="l">
+              <a:lnSpc>
+                <a:spcPct val="104000"/>
+              </a:lnSpc>
+              <a:buNone/>
+            </a:pPr>
+            <a:r>
+              <a:rPr lang="en-US" sz="1850" b="1" dirty="0">
+                <a:solidFill>
+                  <a:srgbClr val="C2C4B5"/>
+                </a:solidFill>
+                <a:latin typeface="Outfit Bold" pitchFamily="34" charset="0"/>
+                <a:ea typeface="Outfit Bold" pitchFamily="34" charset="-122"/>
+                <a:cs typeface="Outfit Bold" pitchFamily="34" charset="-120"/>
+              </a:rPr>
+              <a:t>Dataset</a:t>
+            </a:r>
+            <a:endParaRPr lang="en-US" sz="1850" dirty="0"/>
+          </a:p>
+        </p:txBody>
+      </p:sp>
+      <p:sp>
+        <p:nvSpPr>
+          <p:cNvPr id="11" name="Text 6"/>
+          <p:cNvSpPr/>
+          <p:nvPr/>
+        </p:nvSpPr>
+        <p:spPr>
+          <a:xfrm>
+            <a:off x="8064794" y="2665809"/>
+            <a:ext cx="3465426" cy="604838"/>
+          </a:xfrm>
+          <a:prstGeom prst="rect">
+            <a:avLst/>
+          </a:prstGeom>
+          <a:noFill/>
+          <a:ln/>
+        </p:spPr>
+        <p:txBody>
+          <a:bodyPr wrap="square" lIns="0" tIns="0" rIns="0" bIns="0" rtlCol="0" anchor="t">
+            <a:normAutofit/>
+          </a:bodyPr>
+          <a:lstStyle/>
+          <a:p>
+            <a:pPr marL="0" indent="0" algn="l">
+              <a:lnSpc>
+                <a:spcPct val="133000"/>
+              </a:lnSpc>
+              <a:buNone/>
+            </a:pPr>
+            <a:r>
+              <a:rPr lang="en-US" sz="1450" dirty="0">
+                <a:solidFill>
+                  <a:srgbClr val="C2C4B5"/>
+                </a:solidFill>
+                <a:latin typeface="Bitter" pitchFamily="34" charset="0"/>
+                <a:ea typeface="Bitter" pitchFamily="34" charset="-122"/>
+                <a:cs typeface="Bitter" pitchFamily="34" charset="-120"/>
+              </a:rPr>
+              <a:t>37,204 high-resolution images from DisasterM3 dataset.</a:t>
+            </a:r>
+            <a:endParaRPr lang="en-US" sz="1450" dirty="0"/>
+          </a:p>
+        </p:txBody>
+      </p:sp>
+      <p:pic>
+        <p:nvPicPr>
+          <p:cNvPr id="12" name="Image 3" descr="preencoded.png"/>
+          <p:cNvPicPr>
+            <a:picLocks noChangeAspect="1"/>
+          </p:cNvPicPr>
+          <p:nvPr/>
+        </p:nvPicPr>
+        <p:blipFill>
+          <a:blip>
             <a:extLst>
               <a:ext uri="{96DAC541-7B7A-43D3-8B79-37D633B846F1}">
                 <asvg:svgBlip xmlns:asvg="http://schemas.microsoft.com/office/drawing/2016/SVG/main" r:embed="rId6"/>
@@ -16334,7 +15081,7 @@
         </p:blipFill>
         <p:spPr>
           <a:xfrm>
-            <a:off x="8064794" y="1548408"/>
+            <a:off x="661475" y="4253508"/>
             <a:ext cx="472468" cy="472480"/>
           </a:xfrm>
           <a:prstGeom prst="rect">
@@ -16344,13 +15091,13 @@
       </p:pic>
       <p:sp>
         <p:nvSpPr>
-          <p:cNvPr id="10" name="Text 5"/>
-          <p:cNvSpPr/>
-          <p:nvPr/>
-        </p:nvSpPr>
-        <p:spPr>
-          <a:xfrm>
-            <a:off x="8064794" y="2257127"/>
+          <p:cNvPr id="13" name="Text 7"/>
+          <p:cNvSpPr/>
+          <p:nvPr/>
+        </p:nvSpPr>
+        <p:spPr>
+          <a:xfrm>
+            <a:off x="661475" y="4962227"/>
             <a:ext cx="3465426" cy="295275"/>
           </a:xfrm>
           <a:prstGeom prst="rect">
@@ -16363,7 +15110,7 @@
           <a:bodyPr wrap="none" lIns="0" tIns="0" rIns="0" bIns="0" rtlCol="0" anchor="t"/>
           <a:lstStyle/>
           <a:p>
-            <a:pPr algn="l" indent="0" marL="0">
+            <a:pPr marL="0" indent="0" algn="l">
               <a:lnSpc>
                 <a:spcPct val="104000"/>
               </a:lnSpc>
@@ -16378,7 +15125,7 @@
                 <a:ea typeface="Outfit Bold" pitchFamily="34" charset="-122"/>
                 <a:cs typeface="Outfit Bold" pitchFamily="34" charset="-120"/>
               </a:rPr>
-              <a:t>Dataset</a:t>
+              <a:t>The Task</a:t>
             </a:r>
             <a:endParaRPr lang="en-US" sz="1850" dirty="0"/>
           </a:p>
@@ -16386,14 +15133,14 @@
       </p:sp>
       <p:sp>
         <p:nvSpPr>
-          <p:cNvPr id="11" name="Text 6"/>
-          <p:cNvSpPr/>
-          <p:nvPr/>
-        </p:nvSpPr>
-        <p:spPr>
-          <a:xfrm>
-            <a:off x="8064794" y="2665809"/>
-            <a:ext cx="3465426" cy="604838"/>
+          <p:cNvPr id="14" name="Text 8"/>
+          <p:cNvSpPr/>
+          <p:nvPr/>
+        </p:nvSpPr>
+        <p:spPr>
+          <a:xfrm>
+            <a:off x="661475" y="5370909"/>
+            <a:ext cx="3465426" cy="907256"/>
           </a:xfrm>
           <a:prstGeom prst="rect">
             <a:avLst/>
@@ -16407,7 +15154,7 @@
           </a:bodyPr>
           <a:lstStyle/>
           <a:p>
-            <a:pPr algn="l" indent="0" marL="0">
+            <a:pPr marL="0" indent="0" algn="l">
               <a:lnSpc>
                 <a:spcPct val="133000"/>
               </a:lnSpc>
@@ -16422,7 +15169,7 @@
                 <a:ea typeface="Bitter" pitchFamily="34" charset="-122"/>
                 <a:cs typeface="Bitter" pitchFamily="34" charset="-120"/>
               </a:rPr>
-              <a:t>37,204 high-resolution images from DisasterM3 dataset.</a:t>
+              <a:t>Pixel-by-pixel classification into 4 structural states (Background, Intact, Damaged, Destroyed).</a:t>
             </a:r>
             <a:endParaRPr lang="en-US" sz="1450" dirty="0"/>
           </a:p>
@@ -16430,17 +15177,17 @@
       </p:sp>
       <p:pic>
         <p:nvPicPr>
-          <p:cNvPr id="12" name="Image 3" descr="preencoded.png">    </p:cNvPr>
+          <p:cNvPr id="15" name="Image 4" descr="preencoded.png"/>
           <p:cNvPicPr>
             <a:picLocks noChangeAspect="1"/>
           </p:cNvPicPr>
           <p:nvPr/>
         </p:nvPicPr>
         <p:blipFill>
-          <a:blip r:embed="rId7">
+          <a:blip>
             <a:extLst>
               <a:ext uri="{96DAC541-7B7A-43D3-8B79-37D633B846F1}">
-                <asvg:svgBlip xmlns:asvg="http://schemas.microsoft.com/office/drawing/2016/SVG/main" r:embed="rId8"/>
+                <asvg:svgBlip xmlns:asvg="http://schemas.microsoft.com/office/drawing/2016/SVG/main" r:embed="rId7"/>
               </a:ext>
             </a:extLst>
           </a:blip>
@@ -16450,7 +15197,7 @@
         </p:blipFill>
         <p:spPr>
           <a:xfrm>
-            <a:off x="661475" y="4253508"/>
+            <a:off x="4363135" y="4253508"/>
             <a:ext cx="472468" cy="472480"/>
           </a:xfrm>
           <a:prstGeom prst="rect">
@@ -16460,13 +15207,13 @@
       </p:pic>
       <p:sp>
         <p:nvSpPr>
-          <p:cNvPr id="13" name="Text 7"/>
-          <p:cNvSpPr/>
-          <p:nvPr/>
-        </p:nvSpPr>
-        <p:spPr>
-          <a:xfrm>
-            <a:off x="661475" y="4962227"/>
+          <p:cNvPr id="16" name="Text 9"/>
+          <p:cNvSpPr/>
+          <p:nvPr/>
+        </p:nvSpPr>
+        <p:spPr>
+          <a:xfrm>
+            <a:off x="4363135" y="4962227"/>
             <a:ext cx="3465426" cy="295275"/>
           </a:xfrm>
           <a:prstGeom prst="rect">
@@ -16479,7 +15226,7 @@
           <a:bodyPr wrap="none" lIns="0" tIns="0" rIns="0" bIns="0" rtlCol="0" anchor="t"/>
           <a:lstStyle/>
           <a:p>
-            <a:pPr algn="l" indent="0" marL="0">
+            <a:pPr marL="0" indent="0" algn="l">
               <a:lnSpc>
                 <a:spcPct val="104000"/>
               </a:lnSpc>
@@ -16494,7 +15241,7 @@
                 <a:ea typeface="Outfit Bold" pitchFamily="34" charset="-122"/>
                 <a:cs typeface="Outfit Bold" pitchFamily="34" charset="-120"/>
               </a:rPr>
-              <a:t>The Task</a:t>
+              <a:t>Output</a:t>
             </a:r>
             <a:endParaRPr lang="en-US" sz="1850" dirty="0"/>
           </a:p>
@@ -16502,13 +15249,13 @@
       </p:sp>
       <p:sp>
         <p:nvSpPr>
-          <p:cNvPr id="14" name="Text 8"/>
-          <p:cNvSpPr/>
-          <p:nvPr/>
-        </p:nvSpPr>
-        <p:spPr>
-          <a:xfrm>
-            <a:off x="661475" y="5370909"/>
+          <p:cNvPr id="17" name="Text 10"/>
+          <p:cNvSpPr/>
+          <p:nvPr/>
+        </p:nvSpPr>
+        <p:spPr>
+          <a:xfrm>
+            <a:off x="4363135" y="5370909"/>
             <a:ext cx="3465426" cy="907256"/>
           </a:xfrm>
           <a:prstGeom prst="rect">
@@ -16523,123 +15270,7 @@
           </a:bodyPr>
           <a:lstStyle/>
           <a:p>
-            <a:pPr algn="l" indent="0" marL="0">
-              <a:lnSpc>
-                <a:spcPct val="133000"/>
-              </a:lnSpc>
-              <a:buNone/>
-            </a:pPr>
-            <a:r>
-              <a:rPr lang="en-US" sz="1450" dirty="0">
-                <a:solidFill>
-                  <a:srgbClr val="C2C4B5"/>
-                </a:solidFill>
-                <a:latin typeface="Bitter" pitchFamily="34" charset="0"/>
-                <a:ea typeface="Bitter" pitchFamily="34" charset="-122"/>
-                <a:cs typeface="Bitter" pitchFamily="34" charset="-120"/>
-              </a:rPr>
-              <a:t>Pixel-by-pixel classification into 4 structural states (Background, Intact, Damaged, Destroyed).</a:t>
-            </a:r>
-            <a:endParaRPr lang="en-US" sz="1450" dirty="0"/>
-          </a:p>
-        </p:txBody>
-      </p:sp>
-      <p:pic>
-        <p:nvPicPr>
-          <p:cNvPr id="15" name="Image 4" descr="preencoded.png">    </p:cNvPr>
-          <p:cNvPicPr>
-            <a:picLocks noChangeAspect="1"/>
-          </p:cNvPicPr>
-          <p:nvPr/>
-        </p:nvPicPr>
-        <p:blipFill>
-          <a:blip r:embed="rId9">
-            <a:extLst>
-              <a:ext uri="{96DAC541-7B7A-43D3-8B79-37D633B846F1}">
-                <asvg:svgBlip xmlns:asvg="http://schemas.microsoft.com/office/drawing/2016/SVG/main" r:embed="rId10"/>
-              </a:ext>
-            </a:extLst>
-          </a:blip>
-          <a:stretch>
-            <a:fillRect/>
-          </a:stretch>
-        </p:blipFill>
-        <p:spPr>
-          <a:xfrm>
-            <a:off x="4363135" y="4253508"/>
-            <a:ext cx="472468" cy="472480"/>
-          </a:xfrm>
-          <a:prstGeom prst="rect">
-            <a:avLst/>
-          </a:prstGeom>
-        </p:spPr>
-      </p:pic>
-      <p:sp>
-        <p:nvSpPr>
-          <p:cNvPr id="16" name="Text 9"/>
-          <p:cNvSpPr/>
-          <p:nvPr/>
-        </p:nvSpPr>
-        <p:spPr>
-          <a:xfrm>
-            <a:off x="4363135" y="4962227"/>
-            <a:ext cx="3465426" cy="295275"/>
-          </a:xfrm>
-          <a:prstGeom prst="rect">
-            <a:avLst/>
-          </a:prstGeom>
-          <a:noFill/>
-          <a:ln/>
-        </p:spPr>
-        <p:txBody>
-          <a:bodyPr wrap="none" lIns="0" tIns="0" rIns="0" bIns="0" rtlCol="0" anchor="t"/>
-          <a:lstStyle/>
-          <a:p>
-            <a:pPr algn="l" indent="0" marL="0">
-              <a:lnSpc>
-                <a:spcPct val="104000"/>
-              </a:lnSpc>
-              <a:buNone/>
-            </a:pPr>
-            <a:r>
-              <a:rPr lang="en-US" sz="1850" b="1" dirty="0">
-                <a:solidFill>
-                  <a:srgbClr val="C2C4B5"/>
-                </a:solidFill>
-                <a:latin typeface="Outfit Bold" pitchFamily="34" charset="0"/>
-                <a:ea typeface="Outfit Bold" pitchFamily="34" charset="-122"/>
-                <a:cs typeface="Outfit Bold" pitchFamily="34" charset="-120"/>
-              </a:rPr>
-              <a:t>Output</a:t>
-            </a:r>
-            <a:endParaRPr lang="en-US" sz="1850" dirty="0"/>
-          </a:p>
-        </p:txBody>
-      </p:sp>
-      <p:sp>
-        <p:nvSpPr>
-          <p:cNvPr id="17" name="Text 10"/>
-          <p:cNvSpPr/>
-          <p:nvPr/>
-        </p:nvSpPr>
-        <p:spPr>
-          <a:xfrm>
-            <a:off x="4363135" y="5370909"/>
-            <a:ext cx="3465426" cy="907256"/>
-          </a:xfrm>
-          <a:prstGeom prst="rect">
-            <a:avLst/>
-          </a:prstGeom>
-          <a:noFill/>
-          <a:ln/>
-        </p:spPr>
-        <p:txBody>
-          <a:bodyPr wrap="square" lIns="0" tIns="0" rIns="0" bIns="0" rtlCol="0" anchor="t">
-            <a:normAutofit/>
-          </a:bodyPr>
-          <a:lstStyle/>
-          <a:p>
-            <a:pPr algn="l" indent="0" marL="0">
+            <a:pPr marL="0" indent="0" algn="l">
               <a:lnSpc>
                 <a:spcPct val="133000"/>
               </a:lnSpc>
@@ -16961,4 +15592,319 @@
     </a:ext>
   </a:extLst>
 </a:theme>
+</file>
+
+<file path=ppt/theme/theme2.xml><?xml version="1.0" encoding="utf-8"?>
+<a:theme xmlns:a="http://schemas.openxmlformats.org/drawingml/2006/main" name="Office Theme">
+  <a:themeElements>
+    <a:clrScheme name="Office">
+      <a:dk1>
+        <a:sysClr val="windowText" lastClr="000000"/>
+      </a:dk1>
+      <a:lt1>
+        <a:sysClr val="window" lastClr="FFFFFF"/>
+      </a:lt1>
+      <a:dk2>
+        <a:srgbClr val="0E2841"/>
+      </a:dk2>
+      <a:lt2>
+        <a:srgbClr val="E8E8E8"/>
+      </a:lt2>
+      <a:accent1>
+        <a:srgbClr val="156082"/>
+      </a:accent1>
+      <a:accent2>
+        <a:srgbClr val="E97132"/>
+      </a:accent2>
+      <a:accent3>
+        <a:srgbClr val="196B24"/>
+      </a:accent3>
+      <a:accent4>
+        <a:srgbClr val="0F9ED5"/>
+      </a:accent4>
+      <a:accent5>
+        <a:srgbClr val="A02B93"/>
+      </a:accent5>
+      <a:accent6>
+        <a:srgbClr val="4EA72E"/>
+      </a:accent6>
+      <a:hlink>
+        <a:srgbClr val="467886"/>
+      </a:hlink>
+      <a:folHlink>
+        <a:srgbClr val="96607D"/>
+      </a:folHlink>
+    </a:clrScheme>
+    <a:fontScheme name="Office">
+      <a:majorFont>
+        <a:latin typeface="Aptos Display" panose="02110004020202020204"/>
+        <a:ea typeface=""/>
+        <a:cs typeface=""/>
+        <a:font script="Jpan" typeface="游ゴシック Light"/>
+        <a:font script="Hang" typeface="맑은 고딕"/>
+        <a:font script="Hans" typeface="等线 Light"/>
+        <a:font script="Hant" typeface="新細明體"/>
+        <a:font script="Arab" typeface="Times New Roman"/>
+        <a:font script="Hebr" typeface="Times New Roman"/>
+        <a:font script="Thai" typeface="Angsana New"/>
+        <a:font script="Ethi" typeface="Nyala"/>
+        <a:font script="Beng" typeface="Vrinda"/>
+        <a:font script="Gujr" typeface="Shruti"/>
+        <a:font script="Khmr" typeface="MoolBoran"/>
+        <a:font script="Knda" typeface="Tunga"/>
+        <a:font script="Guru" typeface="Raavi"/>
+        <a:font script="Cans" typeface="Euphemia"/>
+        <a:font script="Cher" typeface="Plantagenet Cherokee"/>
+        <a:font script="Yiii" typeface="Microsoft Yi Baiti"/>
+        <a:font script="Tibt" typeface="Microsoft Himalaya"/>
+        <a:font script="Thaa" typeface="MV Boli"/>
+        <a:font script="Deva" typeface="Mangal"/>
+        <a:font script="Telu" typeface="Gautami"/>
+        <a:font script="Taml" typeface="Latha"/>
+        <a:font script="Syrc" typeface="Estrangelo Edessa"/>
+        <a:font script="Orya" typeface="Kalinga"/>
+        <a:font script="Mlym" typeface="Kartika"/>
+        <a:font script="Laoo" typeface="DokChampa"/>
+        <a:font script="Sinh" typeface="Iskoola Pota"/>
+        <a:font script="Mong" typeface="Mongolian Baiti"/>
+        <a:font script="Viet" typeface="Times New Roman"/>
+        <a:font script="Uigh" typeface="Microsoft Uighur"/>
+        <a:font script="Geor" typeface="Sylfaen"/>
+        <a:font script="Armn" typeface="Arial"/>
+        <a:font script="Bugi" typeface="Leelawadee UI"/>
+        <a:font script="Bopo" typeface="Microsoft JhengHei"/>
+        <a:font script="Java" typeface="Javanese Text"/>
+        <a:font script="Lisu" typeface="Segoe UI"/>
+        <a:font script="Mymr" typeface="Myanmar Text"/>
+        <a:font script="Nkoo" typeface="Ebrima"/>
+        <a:font script="Olck" typeface="Nirmala UI"/>
+        <a:font script="Osma" typeface="Ebrima"/>
+        <a:font script="Phag" typeface="Phagspa"/>
+        <a:font script="Syrn" typeface="Estrangelo Edessa"/>
+        <a:font script="Syrj" typeface="Estrangelo Edessa"/>
+        <a:font script="Syre" typeface="Estrangelo Edessa"/>
+        <a:font script="Sora" typeface="Nirmala UI"/>
+        <a:font script="Tale" typeface="Microsoft Tai Le"/>
+        <a:font script="Talu" typeface="Microsoft New Tai Lue"/>
+        <a:font script="Tfng" typeface="Ebrima"/>
+      </a:majorFont>
+      <a:minorFont>
+        <a:latin typeface="Aptos" panose="02110004020202020204"/>
+        <a:ea typeface=""/>
+        <a:cs typeface=""/>
+        <a:font script="Jpan" typeface="游ゴシック"/>
+        <a:font script="Hang" typeface="맑은 고딕"/>
+        <a:font script="Hans" typeface="等线"/>
+        <a:font script="Hant" typeface="新細明體"/>
+        <a:font script="Arab" typeface="Arial"/>
+        <a:font script="Hebr" typeface="Arial"/>
+        <a:font script="Thai" typeface="Cordia New"/>
+        <a:font script="Ethi" typeface="Nyala"/>
+        <a:font script="Beng" typeface="Vrinda"/>
+        <a:font script="Gujr" typeface="Shruti"/>
+        <a:font script="Khmr" typeface="DaunPenh"/>
+        <a:font script="Knda" typeface="Tunga"/>
+        <a:font script="Guru" typeface="Raavi"/>
+        <a:font script="Cans" typeface="Euphemia"/>
+        <a:font script="Cher" typeface="Plantagenet Cherokee"/>
+        <a:font script="Yiii" typeface="Microsoft Yi Baiti"/>
+        <a:font script="Tibt" typeface="Microsoft Himalaya"/>
+        <a:font script="Thaa" typeface="MV Boli"/>
+        <a:font script="Deva" typeface="Mangal"/>
+        <a:font script="Telu" typeface="Gautami"/>
+        <a:font script="Taml" typeface="Latha"/>
+        <a:font script="Syrc" typeface="Estrangelo Edessa"/>
+        <a:font script="Orya" typeface="Kalinga"/>
+        <a:font script="Mlym" typeface="Kartika"/>
+        <a:font script="Laoo" typeface="DokChampa"/>
+        <a:font script="Sinh" typeface="Iskoola Pota"/>
+        <a:font script="Mong" typeface="Mongolian Baiti"/>
+        <a:font script="Viet" typeface="Arial"/>
+        <a:font script="Uigh" typeface="Microsoft Uighur"/>
+        <a:font script="Geor" typeface="Sylfaen"/>
+        <a:font script="Armn" typeface="Arial"/>
+        <a:font script="Bugi" typeface="Leelawadee UI"/>
+        <a:font script="Bopo" typeface="Microsoft JhengHei"/>
+        <a:font script="Java" typeface="Javanese Text"/>
+        <a:font script="Lisu" typeface="Segoe UI"/>
+        <a:font script="Mymr" typeface="Myanmar Text"/>
+        <a:font script="Nkoo" typeface="Ebrima"/>
+        <a:font script="Olck" typeface="Nirmala UI"/>
+        <a:font script="Osma" typeface="Ebrima"/>
+        <a:font script="Phag" typeface="Phagspa"/>
+        <a:font script="Syrn" typeface="Estrangelo Edessa"/>
+        <a:font script="Syrj" typeface="Estrangelo Edessa"/>
+        <a:font script="Syre" typeface="Estrangelo Edessa"/>
+        <a:font script="Sora" typeface="Nirmala UI"/>
+        <a:font script="Tale" typeface="Microsoft Tai Le"/>
+        <a:font script="Talu" typeface="Microsoft New Tai Lue"/>
+        <a:font script="Tfng" typeface="Ebrima"/>
+      </a:minorFont>
+    </a:fontScheme>
+    <a:fmtScheme name="Office">
+      <a:fillStyleLst>
+        <a:solidFill>
+          <a:schemeClr val="phClr"/>
+        </a:solidFill>
+        <a:gradFill rotWithShape="1">
+          <a:gsLst>
+            <a:gs pos="0">
+              <a:schemeClr val="phClr">
+                <a:lumMod val="110000"/>
+                <a:satMod val="105000"/>
+                <a:tint val="67000"/>
+              </a:schemeClr>
+            </a:gs>
+            <a:gs pos="50000">
+              <a:schemeClr val="phClr">
+                <a:lumMod val="105000"/>
+                <a:satMod val="103000"/>
+                <a:tint val="73000"/>
+              </a:schemeClr>
+            </a:gs>
+            <a:gs pos="100000">
+              <a:schemeClr val="phClr">
+                <a:lumMod val="105000"/>
+                <a:satMod val="109000"/>
+                <a:tint val="81000"/>
+              </a:schemeClr>
+            </a:gs>
+          </a:gsLst>
+          <a:lin ang="5400000" scaled="0"/>
+        </a:gradFill>
+        <a:gradFill rotWithShape="1">
+          <a:gsLst>
+            <a:gs pos="0">
+              <a:schemeClr val="phClr">
+                <a:satMod val="103000"/>
+                <a:lumMod val="102000"/>
+                <a:tint val="94000"/>
+              </a:schemeClr>
+            </a:gs>
+            <a:gs pos="50000">
+              <a:schemeClr val="phClr">
+                <a:satMod val="110000"/>
+                <a:lumMod val="100000"/>
+                <a:shade val="100000"/>
+              </a:schemeClr>
+            </a:gs>
+            <a:gs pos="100000">
+              <a:schemeClr val="phClr">
+                <a:lumMod val="99000"/>
+                <a:satMod val="120000"/>
+                <a:shade val="78000"/>
+              </a:schemeClr>
+            </a:gs>
+          </a:gsLst>
+          <a:lin ang="5400000" scaled="0"/>
+        </a:gradFill>
+      </a:fillStyleLst>
+      <a:lnStyleLst>
+        <a:ln w="12700" cap="flat" cmpd="sng" algn="ctr">
+          <a:solidFill>
+            <a:schemeClr val="phClr"/>
+          </a:solidFill>
+          <a:prstDash val="solid"/>
+          <a:miter lim="800000"/>
+        </a:ln>
+        <a:ln w="19050" cap="flat" cmpd="sng" algn="ctr">
+          <a:solidFill>
+            <a:schemeClr val="phClr"/>
+          </a:solidFill>
+          <a:prstDash val="solid"/>
+          <a:miter lim="800000"/>
+        </a:ln>
+        <a:ln w="25400" cap="flat" cmpd="sng" algn="ctr">
+          <a:solidFill>
+            <a:schemeClr val="phClr"/>
+          </a:solidFill>
+          <a:prstDash val="solid"/>
+          <a:miter lim="800000"/>
+        </a:ln>
+      </a:lnStyleLst>
+      <a:effectStyleLst>
+        <a:effectStyle>
+          <a:effectLst/>
+        </a:effectStyle>
+        <a:effectStyle>
+          <a:effectLst/>
+        </a:effectStyle>
+        <a:effectStyle>
+          <a:effectLst>
+            <a:outerShdw blurRad="57150" dist="19050" dir="5400000" algn="ctr" rotWithShape="0">
+              <a:srgbClr val="000000">
+                <a:alpha val="63000"/>
+              </a:srgbClr>
+            </a:outerShdw>
+          </a:effectLst>
+        </a:effectStyle>
+      </a:effectStyleLst>
+      <a:bgFillStyleLst>
+        <a:solidFill>
+          <a:schemeClr val="phClr"/>
+        </a:solidFill>
+        <a:solidFill>
+          <a:schemeClr val="phClr">
+            <a:tint val="95000"/>
+            <a:satMod val="170000"/>
+          </a:schemeClr>
+        </a:solidFill>
+        <a:gradFill rotWithShape="1">
+          <a:gsLst>
+            <a:gs pos="0">
+              <a:schemeClr val="phClr">
+                <a:tint val="93000"/>
+                <a:satMod val="150000"/>
+                <a:shade val="98000"/>
+                <a:lumMod val="102000"/>
+              </a:schemeClr>
+            </a:gs>
+            <a:gs pos="50000">
+              <a:schemeClr val="phClr">
+                <a:tint val="98000"/>
+                <a:satMod val="130000"/>
+                <a:shade val="90000"/>
+                <a:lumMod val="103000"/>
+              </a:schemeClr>
+            </a:gs>
+            <a:gs pos="100000">
+              <a:schemeClr val="phClr">
+                <a:shade val="63000"/>
+                <a:satMod val="120000"/>
+              </a:schemeClr>
+            </a:gs>
+          </a:gsLst>
+          <a:lin ang="5400000" scaled="0"/>
+        </a:gradFill>
+      </a:bgFillStyleLst>
+    </a:fmtScheme>
+  </a:themeElements>
+  <a:objectDefaults>
+    <a:lnDef>
+      <a:spPr/>
+      <a:bodyPr/>
+      <a:lstStyle/>
+      <a:style>
+        <a:lnRef idx="2">
+          <a:schemeClr val="accent1"/>
+        </a:lnRef>
+        <a:fillRef idx="0">
+          <a:schemeClr val="accent1"/>
+        </a:fillRef>
+        <a:effectRef idx="1">
+          <a:schemeClr val="accent1"/>
+        </a:effectRef>
+        <a:fontRef idx="minor">
+          <a:schemeClr val="tx1"/>
+        </a:fontRef>
+      </a:style>
+    </a:lnDef>
+  </a:objectDefaults>
+  <a:extraClrSchemeLst/>
+  <a:extLst>
+    <a:ext uri="{05A4C25C-085E-4340-85A3-A5531E510DB2}">
+      <thm15:themeFamily xmlns:thm15="http://schemas.microsoft.com/office/thememl/2012/main" name="Office Theme" id="{2E142A2C-CD16-42D6-873A-C26D2A0506FA}" vid="{1BDDFF52-6CD6-40A5-AB3C-68EB2F1E4D0A}"/>
+    </a:ext>
+  </a:extLst>
+</a:theme>
 </file>